--- a/lessons/lesson-12/slides.pptx
+++ b/lessons/lesson-12/slides.pptx
@@ -2,32 +2,32 @@
 <file path=ppt/presentation.xml><?xml version="1.0" encoding="utf-8"?>
 <p:presentation xmlns:p="http://schemas.openxmlformats.org/presentationml/2006/main">
   <p:sldMasterIdLst>
-    <p:sldMasterId xmlns:r="http://schemas.openxmlformats.org/officeDocument/2006/relationships" id="2147483648" r:id="R498251b84d6543bf"/>
+    <p:sldMasterId xmlns:r="http://schemas.openxmlformats.org/officeDocument/2006/relationships" id="2147483648" r:id="R3f09cb419b564b12"/>
   </p:sldMasterIdLst>
   <p:notesMasterIdLst>
-    <p:notesMasterId xmlns:r="http://schemas.openxmlformats.org/officeDocument/2006/relationships" r:id="Rdc411f1ea7c64eea"/>
+    <p:notesMasterId xmlns:r="http://schemas.openxmlformats.org/officeDocument/2006/relationships" r:id="R17998035d1324b17"/>
   </p:notesMasterIdLst>
   <p:sldIdLst>
-    <p:sldId xmlns:r="http://schemas.openxmlformats.org/officeDocument/2006/relationships" id="256" r:id="R75086568dbe7425e"/>
-    <p:sldId xmlns:r="http://schemas.openxmlformats.org/officeDocument/2006/relationships" id="257" r:id="Re121108a77764239"/>
-    <p:sldId xmlns:r="http://schemas.openxmlformats.org/officeDocument/2006/relationships" id="258" r:id="R1680797971b44d9a"/>
-    <p:sldId xmlns:r="http://schemas.openxmlformats.org/officeDocument/2006/relationships" id="259" r:id="Rbab906540e78464b"/>
-    <p:sldId xmlns:r="http://schemas.openxmlformats.org/officeDocument/2006/relationships" id="260" r:id="R870bbaed23f54096"/>
-    <p:sldId xmlns:r="http://schemas.openxmlformats.org/officeDocument/2006/relationships" id="261" r:id="R7d806f5c8cd3413b"/>
-    <p:sldId xmlns:r="http://schemas.openxmlformats.org/officeDocument/2006/relationships" id="262" r:id="R411c7ab8caeb42bb"/>
-    <p:sldId xmlns:r="http://schemas.openxmlformats.org/officeDocument/2006/relationships" id="263" r:id="R629aa011cac9433a"/>
-    <p:sldId xmlns:r="http://schemas.openxmlformats.org/officeDocument/2006/relationships" id="264" r:id="R93d9e68b33904899"/>
-    <p:sldId xmlns:r="http://schemas.openxmlformats.org/officeDocument/2006/relationships" id="265" r:id="Rf6bb46783aac4e5d"/>
-    <p:sldId xmlns:r="http://schemas.openxmlformats.org/officeDocument/2006/relationships" id="266" r:id="R3250859846054fa2"/>
-    <p:sldId xmlns:r="http://schemas.openxmlformats.org/officeDocument/2006/relationships" id="267" r:id="R757d3571096f4652"/>
-    <p:sldId xmlns:r="http://schemas.openxmlformats.org/officeDocument/2006/relationships" id="268" r:id="R83bf694cd3d74007"/>
-    <p:sldId xmlns:r="http://schemas.openxmlformats.org/officeDocument/2006/relationships" id="269" r:id="R43c143b8e70a4144"/>
-    <p:sldId xmlns:r="http://schemas.openxmlformats.org/officeDocument/2006/relationships" id="270" r:id="R5395ffc704604d2f"/>
-    <p:sldId xmlns:r="http://schemas.openxmlformats.org/officeDocument/2006/relationships" id="271" r:id="R77f684e7d3b2487f"/>
-    <p:sldId xmlns:r="http://schemas.openxmlformats.org/officeDocument/2006/relationships" id="272" r:id="R86e6faf9d6c54006"/>
-    <p:sldId xmlns:r="http://schemas.openxmlformats.org/officeDocument/2006/relationships" id="273" r:id="R71287e24c56542ab"/>
-    <p:sldId xmlns:r="http://schemas.openxmlformats.org/officeDocument/2006/relationships" id="274" r:id="R4257926f289e4cbc"/>
-    <p:sldId xmlns:r="http://schemas.openxmlformats.org/officeDocument/2006/relationships" id="275" r:id="R5b83d4d78dd944c2"/>
+    <p:sldId xmlns:r="http://schemas.openxmlformats.org/officeDocument/2006/relationships" id="256" r:id="R5f05ea6bbca642bf"/>
+    <p:sldId xmlns:r="http://schemas.openxmlformats.org/officeDocument/2006/relationships" id="257" r:id="R25bee86cf2bc4702"/>
+    <p:sldId xmlns:r="http://schemas.openxmlformats.org/officeDocument/2006/relationships" id="258" r:id="R485e6a62aa6c48b1"/>
+    <p:sldId xmlns:r="http://schemas.openxmlformats.org/officeDocument/2006/relationships" id="259" r:id="R6bef3cc1459b48da"/>
+    <p:sldId xmlns:r="http://schemas.openxmlformats.org/officeDocument/2006/relationships" id="260" r:id="R587fe72fb0f7413f"/>
+    <p:sldId xmlns:r="http://schemas.openxmlformats.org/officeDocument/2006/relationships" id="261" r:id="Rff518ab9d52b45e5"/>
+    <p:sldId xmlns:r="http://schemas.openxmlformats.org/officeDocument/2006/relationships" id="262" r:id="Rf9731f3637844bda"/>
+    <p:sldId xmlns:r="http://schemas.openxmlformats.org/officeDocument/2006/relationships" id="263" r:id="Ra63385f680ff478d"/>
+    <p:sldId xmlns:r="http://schemas.openxmlformats.org/officeDocument/2006/relationships" id="264" r:id="R3b9d12f02bbd40bc"/>
+    <p:sldId xmlns:r="http://schemas.openxmlformats.org/officeDocument/2006/relationships" id="265" r:id="Rff8a294a1b58491e"/>
+    <p:sldId xmlns:r="http://schemas.openxmlformats.org/officeDocument/2006/relationships" id="266" r:id="Rc447fb5ea4c14bbd"/>
+    <p:sldId xmlns:r="http://schemas.openxmlformats.org/officeDocument/2006/relationships" id="267" r:id="R169b116762664db0"/>
+    <p:sldId xmlns:r="http://schemas.openxmlformats.org/officeDocument/2006/relationships" id="268" r:id="R363b31f5e7a047ff"/>
+    <p:sldId xmlns:r="http://schemas.openxmlformats.org/officeDocument/2006/relationships" id="269" r:id="Rfb7b395c2af04f23"/>
+    <p:sldId xmlns:r="http://schemas.openxmlformats.org/officeDocument/2006/relationships" id="270" r:id="Rdc7da61b42344e3a"/>
+    <p:sldId xmlns:r="http://schemas.openxmlformats.org/officeDocument/2006/relationships" id="271" r:id="R8d9b7468ed6348e4"/>
+    <p:sldId xmlns:r="http://schemas.openxmlformats.org/officeDocument/2006/relationships" id="272" r:id="Rc5428fb119294a6a"/>
+    <p:sldId xmlns:r="http://schemas.openxmlformats.org/officeDocument/2006/relationships" id="273" r:id="R316af3e6f0174300"/>
+    <p:sldId xmlns:r="http://schemas.openxmlformats.org/officeDocument/2006/relationships" id="274" r:id="R1f55c62f2dfc495e"/>
+    <p:sldId xmlns:r="http://schemas.openxmlformats.org/officeDocument/2006/relationships" id="275" r:id="Rd683d3b356804968"/>
   </p:sldIdLst>
   <p:sldSz cx="12192000" cy="6858000"/>
   <p:notesSz cx="6858000" cy="9144000"/>
@@ -2298,7 +2298,7 @@
           <p:nvPr/>
         </p:nvPicPr>
         <p:blipFill>
-          <a:blip xmlns:r="http://schemas.openxmlformats.org/officeDocument/2006/relationships" xmlns:a="http://schemas.openxmlformats.org/drawingml/2006/main" r:embed="R609a548428fd4d59">
+          <a:blip xmlns:r="http://schemas.openxmlformats.org/officeDocument/2006/relationships" xmlns:a="http://schemas.openxmlformats.org/drawingml/2006/main" r:embed="Rb5c18a14eebe414c">
             <a:duotone>
               <a:prstClr val="black"/>
               <a:schemeClr val="accent1">
@@ -2476,7 +2476,7 @@
           <p:nvPr/>
         </p:nvPicPr>
         <p:blipFill rotWithShape="1">
-          <a:blip xmlns:r="http://schemas.openxmlformats.org/officeDocument/2006/relationships" xmlns:a="http://schemas.openxmlformats.org/drawingml/2006/main" r:embed="R72a12662f2634efd"/>
+          <a:blip xmlns:r="http://schemas.openxmlformats.org/officeDocument/2006/relationships" xmlns:a="http://schemas.openxmlformats.org/drawingml/2006/main" r:embed="R0e0ecf7457a2436c"/>
           <a:srcRect xmlns:a="http://schemas.openxmlformats.org/drawingml/2006/main" l="74359" t="0" r="1346" b="0"/>
           <a:stretch xmlns:a="http://schemas.openxmlformats.org/drawingml/2006/main"/>
         </p:blipFill>
@@ -2499,7 +2499,7 @@
           <p:nvPr/>
         </p:nvPicPr>
         <p:blipFill rotWithShape="1">
-          <a:blip xmlns:r="http://schemas.openxmlformats.org/officeDocument/2006/relationships" xmlns:a="http://schemas.openxmlformats.org/drawingml/2006/main" r:embed="R053acb1c4b134cfe">
+          <a:blip xmlns:r="http://schemas.openxmlformats.org/officeDocument/2006/relationships" xmlns:a="http://schemas.openxmlformats.org/drawingml/2006/main" r:embed="R36dee6805f824452">
             <a:alphaModFix amt="35000"/>
           </a:blip>
           <a:srcRect xmlns:a="http://schemas.openxmlformats.org/drawingml/2006/main" l="0" t="9831" r="0" b="36385"/>
@@ -2761,7 +2761,7 @@
           <p:nvPr/>
         </p:nvPicPr>
         <p:blipFill>
-          <a:blip xmlns:r="http://schemas.openxmlformats.org/officeDocument/2006/relationships" xmlns:a="http://schemas.openxmlformats.org/drawingml/2006/main" r:embed="Rfbfb4dbb4cf14387"/>
+          <a:blip xmlns:r="http://schemas.openxmlformats.org/officeDocument/2006/relationships" xmlns:a="http://schemas.openxmlformats.org/drawingml/2006/main" r:embed="R7c2a548362a84259"/>
           <a:srcRect xmlns:a="http://schemas.openxmlformats.org/drawingml/2006/main" l="0" t="0" r="54251" b="0"/>
           <a:stretch xmlns:a="http://schemas.openxmlformats.org/drawingml/2006/main"/>
         </p:blipFill>
@@ -3018,7 +3018,7 @@
           <p:nvPr/>
         </p:nvPicPr>
         <p:blipFill rotWithShape="1">
-          <a:blip xmlns:r="http://schemas.openxmlformats.org/officeDocument/2006/relationships" xmlns:a="http://schemas.openxmlformats.org/drawingml/2006/main" r:embed="Rbc6d8aca20ee4b34"/>
+          <a:blip xmlns:r="http://schemas.openxmlformats.org/officeDocument/2006/relationships" xmlns:a="http://schemas.openxmlformats.org/drawingml/2006/main" r:embed="R8fc9232fbe564aa2"/>
           <a:srcRect xmlns:a="http://schemas.openxmlformats.org/drawingml/2006/main" l="0" t="0" r="1346" b="0"/>
           <a:stretch xmlns:a="http://schemas.openxmlformats.org/drawingml/2006/main"/>
         </p:blipFill>
@@ -3201,7 +3201,7 @@
           <p:nvPr/>
         </p:nvPicPr>
         <p:blipFill>
-          <a:blip xmlns:r="http://schemas.openxmlformats.org/officeDocument/2006/relationships" xmlns:a="http://schemas.openxmlformats.org/drawingml/2006/main" r:embed="R890680483c2b4298"/>
+          <a:blip xmlns:r="http://schemas.openxmlformats.org/officeDocument/2006/relationships" xmlns:a="http://schemas.openxmlformats.org/drawingml/2006/main" r:embed="R1cd4686f84ca406a"/>
           <a:stretch xmlns:a="http://schemas.openxmlformats.org/drawingml/2006/main">
             <a:fillRect l="0" t="0" r="0" b="0"/>
           </a:stretch>
@@ -3297,7 +3297,7 @@
           <p:nvPr/>
         </p:nvPicPr>
         <p:blipFill>
-          <a:blip xmlns:r="http://schemas.openxmlformats.org/officeDocument/2006/relationships" xmlns:a="http://schemas.openxmlformats.org/drawingml/2006/main" r:embed="R260426149da04258">
+          <a:blip xmlns:r="http://schemas.openxmlformats.org/officeDocument/2006/relationships" xmlns:a="http://schemas.openxmlformats.org/drawingml/2006/main" r:embed="R43cbdd48efc941cb">
             <a:duotone>
               <a:prstClr val="black"/>
               <a:schemeClr val="accent1">
@@ -3464,7 +3464,7 @@
           <p:nvPr/>
         </p:nvPicPr>
         <p:blipFill rotWithShape="1">
-          <a:blip xmlns:r="http://schemas.openxmlformats.org/officeDocument/2006/relationships" xmlns:a="http://schemas.openxmlformats.org/drawingml/2006/main" r:embed="Rc915acbaeaa0445c">
+          <a:blip xmlns:r="http://schemas.openxmlformats.org/officeDocument/2006/relationships" xmlns:a="http://schemas.openxmlformats.org/drawingml/2006/main" r:embed="R225abf307bcd45ea">
             <a:alphaModFix amt="20000"/>
             <a:duotone>
               <a:schemeClr val="accent4">
@@ -3562,10 +3562,10 @@
   </p:cSld>
   <p:clrMap bg1="lt1" tx1="dk1" bg2="lt2" tx2="dk2" accent1="accent1" accent2="accent2" accent3="accent3" accent4="accent4" accent5="accent5" accent6="accent6" hlink="hlink" folHlink="folHlink"/>
   <p:sldLayoutIdLst>
-    <p:sldLayoutId xmlns:r="http://schemas.openxmlformats.org/officeDocument/2006/relationships" id="2147483649" r:id="R6b1c497de4434b5a"/>
-    <p:sldLayoutId xmlns:r="http://schemas.openxmlformats.org/officeDocument/2006/relationships" id="2147483650" r:id="Rc164117152874134"/>
-    <p:sldLayoutId xmlns:r="http://schemas.openxmlformats.org/officeDocument/2006/relationships" id="2147483651" r:id="R4cbdadb7d49f4e9f"/>
-    <p:sldLayoutId xmlns:r="http://schemas.openxmlformats.org/officeDocument/2006/relationships" id="2147483652" r:id="R8d76443fdff44a28"/>
+    <p:sldLayoutId xmlns:r="http://schemas.openxmlformats.org/officeDocument/2006/relationships" id="2147483649" r:id="R363d927da4a642b9"/>
+    <p:sldLayoutId xmlns:r="http://schemas.openxmlformats.org/officeDocument/2006/relationships" id="2147483650" r:id="R3135ea031a04441f"/>
+    <p:sldLayoutId xmlns:r="http://schemas.openxmlformats.org/officeDocument/2006/relationships" id="2147483651" r:id="R2de37040f73b465d"/>
+    <p:sldLayoutId xmlns:r="http://schemas.openxmlformats.org/officeDocument/2006/relationships" id="2147483652" r:id="Rdf1c60f1bdd64944"/>
   </p:sldLayoutIdLst>
   <p:hf hdr="0" ftr="0" dt="0"/>
   <p:txStyles>
@@ -4366,7 +4366,7 @@
           <p:cNvPr id="6" name="p10-x">
             <a:extLst xmlns:a="http://schemas.openxmlformats.org/drawingml/2006/main">
               <a:ext uri="{FF2B5EF4-FFF2-40B4-BE49-F238E27FC236}">
-                <a16:creationId xmlns:a16="http://schemas.microsoft.com/office/drawing/2014/main" id="{B395B782-80E3-4280-9044-C4715C218B1F}"/>
+                <a16:creationId xmlns:a16="http://schemas.microsoft.com/office/drawing/2014/main" id="{9CDCCB28-29B5-4D26-9FE3-45D140FAAB1F}"/>
               </a:ext>
             </a:extLst>
           </p:cNvPr>
@@ -4397,7 +4397,7 @@
           <p:cNvPr id="7" name="p10-y">
             <a:extLst xmlns:a="http://schemas.openxmlformats.org/drawingml/2006/main">
               <a:ext uri="{FF2B5EF4-FFF2-40B4-BE49-F238E27FC236}">
-                <a16:creationId xmlns:a16="http://schemas.microsoft.com/office/drawing/2014/main" id="{BC88711D-14A1-489C-BC2A-A4036D5689DE}"/>
+                <a16:creationId xmlns:a16="http://schemas.microsoft.com/office/drawing/2014/main" id="{828F3F42-EDBE-444B-B70B-9AD2088DBF6F}"/>
               </a:ext>
             </a:extLst>
           </p:cNvPr>
@@ -4428,7 +4428,7 @@
           <p:cNvPr id="8" name="p10-xlabel">
             <a:extLst xmlns:a="http://schemas.openxmlformats.org/drawingml/2006/main">
               <a:ext uri="{FF2B5EF4-FFF2-40B4-BE49-F238E27FC236}">
-                <a16:creationId xmlns:a16="http://schemas.microsoft.com/office/drawing/2014/main" id="{07928F1F-09CF-4ADD-AFA1-9D661B679717}"/>
+                <a16:creationId xmlns:a16="http://schemas.microsoft.com/office/drawing/2014/main" id="{099B91B0-F2DC-4276-8683-ADBE547C68F9}"/>
               </a:ext>
             </a:extLst>
           </p:cNvPr>
@@ -4481,7 +4481,7 @@
           <p:cNvPr id="9" name="p10-ylabel">
             <a:extLst xmlns:a="http://schemas.openxmlformats.org/drawingml/2006/main">
               <a:ext uri="{FF2B5EF4-FFF2-40B4-BE49-F238E27FC236}">
-                <a16:creationId xmlns:a16="http://schemas.microsoft.com/office/drawing/2014/main" id="{C36C69A6-5477-4FCA-9A7F-219D02E6B026}"/>
+                <a16:creationId xmlns:a16="http://schemas.microsoft.com/office/drawing/2014/main" id="{A5EBADB5-7C80-4694-9B56-886A5C206A95}"/>
               </a:ext>
             </a:extLst>
           </p:cNvPr>
@@ -4534,7 +4534,7 @@
           <p:cNvPr id="10" name="p10-script">
             <a:extLst xmlns:a="http://schemas.openxmlformats.org/drawingml/2006/main">
               <a:ext uri="{FF2B5EF4-FFF2-40B4-BE49-F238E27FC236}">
-                <a16:creationId xmlns:a16="http://schemas.microsoft.com/office/drawing/2014/main" id="{9E56BC20-3881-455E-BF3A-11942A7EF12A}"/>
+                <a16:creationId xmlns:a16="http://schemas.microsoft.com/office/drawing/2014/main" id="{34D3A44A-80C1-45F8-BF61-664FDAD3FAE4}"/>
               </a:ext>
             </a:extLst>
           </p:cNvPr>
@@ -4609,7 +4609,7 @@
           <p:cNvPr id="11" name="p10-workflow">
             <a:extLst xmlns:a="http://schemas.openxmlformats.org/drawingml/2006/main">
               <a:ext uri="{FF2B5EF4-FFF2-40B4-BE49-F238E27FC236}">
-                <a16:creationId xmlns:a16="http://schemas.microsoft.com/office/drawing/2014/main" id="{CF651399-5187-4F15-9B83-D8D9B9AFB741}"/>
+                <a16:creationId xmlns:a16="http://schemas.microsoft.com/office/drawing/2014/main" id="{207DFEA5-1565-4340-B0F8-A4F43975F17D}"/>
               </a:ext>
             </a:extLst>
           </p:cNvPr>
@@ -4684,7 +4684,7 @@
           <p:cNvPr id="12" name="p10-agent">
             <a:extLst xmlns:a="http://schemas.openxmlformats.org/drawingml/2006/main">
               <a:ext uri="{FF2B5EF4-FFF2-40B4-BE49-F238E27FC236}">
-                <a16:creationId xmlns:a16="http://schemas.microsoft.com/office/drawing/2014/main" id="{70245975-FE68-4B16-A792-B5D7AEB2FDB2}"/>
+                <a16:creationId xmlns:a16="http://schemas.microsoft.com/office/drawing/2014/main" id="{6F1A337C-7B0A-496B-BA0F-4BF8A2B3B5A8}"/>
               </a:ext>
             </a:extLst>
           </p:cNvPr>
@@ -4759,7 +4759,7 @@
           <p:cNvPr id="13" name="p10-system">
             <a:extLst xmlns:a="http://schemas.openxmlformats.org/drawingml/2006/main">
               <a:ext uri="{FF2B5EF4-FFF2-40B4-BE49-F238E27FC236}">
-                <a16:creationId xmlns:a16="http://schemas.microsoft.com/office/drawing/2014/main" id="{33491904-450B-4889-A5CF-54ED138A0206}"/>
+                <a16:creationId xmlns:a16="http://schemas.microsoft.com/office/drawing/2014/main" id="{8EDD91CB-09DA-4C3D-8E75-FCFF902409AF}"/>
               </a:ext>
             </a:extLst>
           </p:cNvPr>
@@ -4834,7 +4834,7 @@
           <p:cNvPr id="14" name="p10-bottom">
             <a:extLst xmlns:a="http://schemas.openxmlformats.org/drawingml/2006/main">
               <a:ext uri="{FF2B5EF4-FFF2-40B4-BE49-F238E27FC236}">
-                <a16:creationId xmlns:a16="http://schemas.microsoft.com/office/drawing/2014/main" id="{3057877C-A8B1-471A-B9E2-F2450129FA90}"/>
+                <a16:creationId xmlns:a16="http://schemas.microsoft.com/office/drawing/2014/main" id="{11592171-82F3-4187-B1B3-994BE55A1C9B}"/>
               </a:ext>
             </a:extLst>
           </p:cNvPr>
@@ -4983,7 +4983,7 @@
           <p:cNvPr id="6" name="p11-center">
             <a:extLst xmlns:a="http://schemas.openxmlformats.org/drawingml/2006/main">
               <a:ext uri="{FF2B5EF4-FFF2-40B4-BE49-F238E27FC236}">
-                <a16:creationId xmlns:a16="http://schemas.microsoft.com/office/drawing/2014/main" id="{C451986A-3B0F-4D88-B69B-1A2A7A7AF23A}"/>
+                <a16:creationId xmlns:a16="http://schemas.microsoft.com/office/drawing/2014/main" id="{A959D8AC-CB0C-4A91-9182-5683CC04B1BE}"/>
               </a:ext>
             </a:extLst>
           </p:cNvPr>
@@ -5040,7 +5040,7 @@
           <p:cNvPr id="7" name="p11-line0">
             <a:extLst xmlns:a="http://schemas.openxmlformats.org/drawingml/2006/main">
               <a:ext uri="{FF2B5EF4-FFF2-40B4-BE49-F238E27FC236}">
-                <a16:creationId xmlns:a16="http://schemas.microsoft.com/office/drawing/2014/main" id="{1C0FB635-93CC-463F-8601-EB3320931D2C}"/>
+                <a16:creationId xmlns:a16="http://schemas.microsoft.com/office/drawing/2014/main" id="{4BF478E9-EEA0-4761-8CCB-84A1E79FD9D8}"/>
               </a:ext>
             </a:extLst>
           </p:cNvPr>
@@ -5071,7 +5071,7 @@
           <p:cNvPr id="8" name="p11-a0">
             <a:extLst xmlns:a="http://schemas.openxmlformats.org/drawingml/2006/main">
               <a:ext uri="{FF2B5EF4-FFF2-40B4-BE49-F238E27FC236}">
-                <a16:creationId xmlns:a16="http://schemas.microsoft.com/office/drawing/2014/main" id="{6347CEFC-9A20-4BC3-847C-3B23A8A12E01}"/>
+                <a16:creationId xmlns:a16="http://schemas.microsoft.com/office/drawing/2014/main" id="{3DD775C2-E73D-4E70-B889-4F641E69CC4A}"/>
               </a:ext>
             </a:extLst>
           </p:cNvPr>
@@ -5128,7 +5128,7 @@
           <p:cNvPr id="9" name="p11-b0">
             <a:extLst xmlns:a="http://schemas.openxmlformats.org/drawingml/2006/main">
               <a:ext uri="{FF2B5EF4-FFF2-40B4-BE49-F238E27FC236}">
-                <a16:creationId xmlns:a16="http://schemas.microsoft.com/office/drawing/2014/main" id="{7B4EF11B-4655-4C40-96EB-0A0D9DA36AAC}"/>
+                <a16:creationId xmlns:a16="http://schemas.microsoft.com/office/drawing/2014/main" id="{D3D494A4-7695-4061-AFC2-442310B72E54}"/>
               </a:ext>
             </a:extLst>
           </p:cNvPr>
@@ -5183,7 +5183,7 @@
           <p:cNvPr id="10" name="p11-line1">
             <a:extLst xmlns:a="http://schemas.openxmlformats.org/drawingml/2006/main">
               <a:ext uri="{FF2B5EF4-FFF2-40B4-BE49-F238E27FC236}">
-                <a16:creationId xmlns:a16="http://schemas.microsoft.com/office/drawing/2014/main" id="{A9BC7CCB-08DD-4E14-924F-A50BD1D7034B}"/>
+                <a16:creationId xmlns:a16="http://schemas.microsoft.com/office/drawing/2014/main" id="{C11687C6-99F7-4114-8222-FE8C73DB1866}"/>
               </a:ext>
             </a:extLst>
           </p:cNvPr>
@@ -5214,7 +5214,7 @@
           <p:cNvPr id="11" name="p11-a1">
             <a:extLst xmlns:a="http://schemas.openxmlformats.org/drawingml/2006/main">
               <a:ext uri="{FF2B5EF4-FFF2-40B4-BE49-F238E27FC236}">
-                <a16:creationId xmlns:a16="http://schemas.microsoft.com/office/drawing/2014/main" id="{3B07DE15-B212-4FD9-8E00-14B1C2C3BF76}"/>
+                <a16:creationId xmlns:a16="http://schemas.microsoft.com/office/drawing/2014/main" id="{56A8B4C3-2B2A-4070-BBAA-249B8CE8C1D0}"/>
               </a:ext>
             </a:extLst>
           </p:cNvPr>
@@ -5271,7 +5271,7 @@
           <p:cNvPr id="12" name="p11-b1">
             <a:extLst xmlns:a="http://schemas.openxmlformats.org/drawingml/2006/main">
               <a:ext uri="{FF2B5EF4-FFF2-40B4-BE49-F238E27FC236}">
-                <a16:creationId xmlns:a16="http://schemas.microsoft.com/office/drawing/2014/main" id="{5E2E2416-D4B3-4CF8-BC43-2EAC34007769}"/>
+                <a16:creationId xmlns:a16="http://schemas.microsoft.com/office/drawing/2014/main" id="{1F3DA371-5626-4F6E-BA00-392A6BC9EE6D}"/>
               </a:ext>
             </a:extLst>
           </p:cNvPr>
@@ -5326,7 +5326,7 @@
           <p:cNvPr id="13" name="p11-line2">
             <a:extLst xmlns:a="http://schemas.openxmlformats.org/drawingml/2006/main">
               <a:ext uri="{FF2B5EF4-FFF2-40B4-BE49-F238E27FC236}">
-                <a16:creationId xmlns:a16="http://schemas.microsoft.com/office/drawing/2014/main" id="{637F8F0A-5819-4179-8155-E86B494D5F6A}"/>
+                <a16:creationId xmlns:a16="http://schemas.microsoft.com/office/drawing/2014/main" id="{933B68C2-D863-4E93-AACC-A41040D2C5DA}"/>
               </a:ext>
             </a:extLst>
           </p:cNvPr>
@@ -5357,7 +5357,7 @@
           <p:cNvPr id="14" name="p11-a2">
             <a:extLst xmlns:a="http://schemas.openxmlformats.org/drawingml/2006/main">
               <a:ext uri="{FF2B5EF4-FFF2-40B4-BE49-F238E27FC236}">
-                <a16:creationId xmlns:a16="http://schemas.microsoft.com/office/drawing/2014/main" id="{4EBDCBA3-BB3D-480B-BE51-C8A36F805808}"/>
+                <a16:creationId xmlns:a16="http://schemas.microsoft.com/office/drawing/2014/main" id="{51E53225-45E5-4B28-A54D-465919F12669}"/>
               </a:ext>
             </a:extLst>
           </p:cNvPr>
@@ -5414,7 +5414,7 @@
           <p:cNvPr id="15" name="p11-b2">
             <a:extLst xmlns:a="http://schemas.openxmlformats.org/drawingml/2006/main">
               <a:ext uri="{FF2B5EF4-FFF2-40B4-BE49-F238E27FC236}">
-                <a16:creationId xmlns:a16="http://schemas.microsoft.com/office/drawing/2014/main" id="{2E32A915-7AA9-49DE-80A5-357E435635B6}"/>
+                <a16:creationId xmlns:a16="http://schemas.microsoft.com/office/drawing/2014/main" id="{49FAE9A4-84FA-446A-A2D0-F0A2DBC3141E}"/>
               </a:ext>
             </a:extLst>
           </p:cNvPr>
@@ -5469,7 +5469,7 @@
           <p:cNvPr id="16" name="p11-examples">
             <a:extLst xmlns:a="http://schemas.openxmlformats.org/drawingml/2006/main">
               <a:ext uri="{FF2B5EF4-FFF2-40B4-BE49-F238E27FC236}">
-                <a16:creationId xmlns:a16="http://schemas.microsoft.com/office/drawing/2014/main" id="{6FB73F97-6EEA-4A23-B1DB-B167FDBF6539}"/>
+                <a16:creationId xmlns:a16="http://schemas.microsoft.com/office/drawing/2014/main" id="{1B3F6E4B-F6D1-4981-B64A-1C51254BCD06}"/>
               </a:ext>
             </a:extLst>
           </p:cNvPr>
@@ -5618,7 +5618,7 @@
           <p:cNvPr id="6" name="p12-0-l">
             <a:extLst xmlns:a="http://schemas.openxmlformats.org/drawingml/2006/main">
               <a:ext uri="{FF2B5EF4-FFF2-40B4-BE49-F238E27FC236}">
-                <a16:creationId xmlns:a16="http://schemas.microsoft.com/office/drawing/2014/main" id="{1BB2B81F-8C52-412B-9FE9-25181668D18F}"/>
+                <a16:creationId xmlns:a16="http://schemas.microsoft.com/office/drawing/2014/main" id="{A77C09AB-9F6E-4F24-84C5-B38856D9B92B}"/>
               </a:ext>
             </a:extLst>
           </p:cNvPr>
@@ -5675,7 +5675,7 @@
           <p:cNvPr id="7" name="p12-0-t">
             <a:extLst xmlns:a="http://schemas.openxmlformats.org/drawingml/2006/main">
               <a:ext uri="{FF2B5EF4-FFF2-40B4-BE49-F238E27FC236}">
-                <a16:creationId xmlns:a16="http://schemas.microsoft.com/office/drawing/2014/main" id="{9AF11038-0D4C-4102-BE19-7961B3259A10}"/>
+                <a16:creationId xmlns:a16="http://schemas.microsoft.com/office/drawing/2014/main" id="{21048411-6617-44FD-8FC8-3E403BF917D1}"/>
               </a:ext>
             </a:extLst>
           </p:cNvPr>
@@ -5730,7 +5730,7 @@
           <p:cNvPr id="8" name="p12-1-l">
             <a:extLst xmlns:a="http://schemas.openxmlformats.org/drawingml/2006/main">
               <a:ext uri="{FF2B5EF4-FFF2-40B4-BE49-F238E27FC236}">
-                <a16:creationId xmlns:a16="http://schemas.microsoft.com/office/drawing/2014/main" id="{EE341390-BB45-4CBC-95F0-8131C5A1ACE0}"/>
+                <a16:creationId xmlns:a16="http://schemas.microsoft.com/office/drawing/2014/main" id="{D01BFCBD-8F7B-4F9A-A738-EC2E2CB99783}"/>
               </a:ext>
             </a:extLst>
           </p:cNvPr>
@@ -5787,7 +5787,7 @@
           <p:cNvPr id="9" name="p12-1-t">
             <a:extLst xmlns:a="http://schemas.openxmlformats.org/drawingml/2006/main">
               <a:ext uri="{FF2B5EF4-FFF2-40B4-BE49-F238E27FC236}">
-                <a16:creationId xmlns:a16="http://schemas.microsoft.com/office/drawing/2014/main" id="{63FB37BD-9363-4266-AD98-8F1EB510D31C}"/>
+                <a16:creationId xmlns:a16="http://schemas.microsoft.com/office/drawing/2014/main" id="{1F888689-2FFC-4A37-BE2C-5396F9A3260B}"/>
               </a:ext>
             </a:extLst>
           </p:cNvPr>
@@ -5842,7 +5842,7 @@
           <p:cNvPr id="10" name="p12-2-l">
             <a:extLst xmlns:a="http://schemas.openxmlformats.org/drawingml/2006/main">
               <a:ext uri="{FF2B5EF4-FFF2-40B4-BE49-F238E27FC236}">
-                <a16:creationId xmlns:a16="http://schemas.microsoft.com/office/drawing/2014/main" id="{A1F38101-A017-4DC7-AA24-F0E8A7702096}"/>
+                <a16:creationId xmlns:a16="http://schemas.microsoft.com/office/drawing/2014/main" id="{C133358E-8A70-4F7F-86A1-45CB666F9526}"/>
               </a:ext>
             </a:extLst>
           </p:cNvPr>
@@ -5899,7 +5899,7 @@
           <p:cNvPr id="11" name="p12-2-t">
             <a:extLst xmlns:a="http://schemas.openxmlformats.org/drawingml/2006/main">
               <a:ext uri="{FF2B5EF4-FFF2-40B4-BE49-F238E27FC236}">
-                <a16:creationId xmlns:a16="http://schemas.microsoft.com/office/drawing/2014/main" id="{63FF14F3-27A0-4FBD-8CAA-7F9BEC87F907}"/>
+                <a16:creationId xmlns:a16="http://schemas.microsoft.com/office/drawing/2014/main" id="{FA61B424-B830-4014-82D2-ACAF65012BD5}"/>
               </a:ext>
             </a:extLst>
           </p:cNvPr>
@@ -5954,7 +5954,7 @@
           <p:cNvPr id="12" name="p12-3-l">
             <a:extLst xmlns:a="http://schemas.openxmlformats.org/drawingml/2006/main">
               <a:ext uri="{FF2B5EF4-FFF2-40B4-BE49-F238E27FC236}">
-                <a16:creationId xmlns:a16="http://schemas.microsoft.com/office/drawing/2014/main" id="{16490CE9-817C-4951-9614-ED6BF099E079}"/>
+                <a16:creationId xmlns:a16="http://schemas.microsoft.com/office/drawing/2014/main" id="{32D2AE1B-2B48-40F3-AFF1-52828675AA3B}"/>
               </a:ext>
             </a:extLst>
           </p:cNvPr>
@@ -6011,7 +6011,7 @@
           <p:cNvPr id="13" name="p12-3-t">
             <a:extLst xmlns:a="http://schemas.openxmlformats.org/drawingml/2006/main">
               <a:ext uri="{FF2B5EF4-FFF2-40B4-BE49-F238E27FC236}">
-                <a16:creationId xmlns:a16="http://schemas.microsoft.com/office/drawing/2014/main" id="{068603BE-A242-4369-9525-B134CBB98C21}"/>
+                <a16:creationId xmlns:a16="http://schemas.microsoft.com/office/drawing/2014/main" id="{150491AD-5430-48AE-A2C2-CB1B575E7AE0}"/>
               </a:ext>
             </a:extLst>
           </p:cNvPr>
@@ -6066,7 +6066,7 @@
           <p:cNvPr id="14" name="p12-4-l">
             <a:extLst xmlns:a="http://schemas.openxmlformats.org/drawingml/2006/main">
               <a:ext uri="{FF2B5EF4-FFF2-40B4-BE49-F238E27FC236}">
-                <a16:creationId xmlns:a16="http://schemas.microsoft.com/office/drawing/2014/main" id="{E852E114-74C6-481E-A5D2-E65D7CE2805D}"/>
+                <a16:creationId xmlns:a16="http://schemas.microsoft.com/office/drawing/2014/main" id="{A4B64E7B-511A-4377-9296-F211A80F318A}"/>
               </a:ext>
             </a:extLst>
           </p:cNvPr>
@@ -6123,7 +6123,7 @@
           <p:cNvPr id="15" name="p12-4-t">
             <a:extLst xmlns:a="http://schemas.openxmlformats.org/drawingml/2006/main">
               <a:ext uri="{FF2B5EF4-FFF2-40B4-BE49-F238E27FC236}">
-                <a16:creationId xmlns:a16="http://schemas.microsoft.com/office/drawing/2014/main" id="{2E7E7C6E-14DF-4F15-B2BA-0088CE5B9F8D}"/>
+                <a16:creationId xmlns:a16="http://schemas.microsoft.com/office/drawing/2014/main" id="{7A8A47F6-9435-4694-81A1-BBE85B109CA5}"/>
               </a:ext>
             </a:extLst>
           </p:cNvPr>
@@ -6178,7 +6178,7 @@
           <p:cNvPr id="16" name="p12-5-l">
             <a:extLst xmlns:a="http://schemas.openxmlformats.org/drawingml/2006/main">
               <a:ext uri="{FF2B5EF4-FFF2-40B4-BE49-F238E27FC236}">
-                <a16:creationId xmlns:a16="http://schemas.microsoft.com/office/drawing/2014/main" id="{DDED5E6D-8EE3-46CA-A010-09A2C80FB796}"/>
+                <a16:creationId xmlns:a16="http://schemas.microsoft.com/office/drawing/2014/main" id="{AFDBC3AB-4485-406C-899F-D137DD8FB743}"/>
               </a:ext>
             </a:extLst>
           </p:cNvPr>
@@ -6235,7 +6235,7 @@
           <p:cNvPr id="17" name="p12-5-t">
             <a:extLst xmlns:a="http://schemas.openxmlformats.org/drawingml/2006/main">
               <a:ext uri="{FF2B5EF4-FFF2-40B4-BE49-F238E27FC236}">
-                <a16:creationId xmlns:a16="http://schemas.microsoft.com/office/drawing/2014/main" id="{1751BC8B-4205-49C5-8221-BFAD3652C075}"/>
+                <a16:creationId xmlns:a16="http://schemas.microsoft.com/office/drawing/2014/main" id="{3EBC3637-460D-4A97-B833-DC630505ACA3}"/>
               </a:ext>
             </a:extLst>
           </p:cNvPr>
@@ -6290,7 +6290,7 @@
           <p:cNvPr id="18" name="p12-6-l">
             <a:extLst xmlns:a="http://schemas.openxmlformats.org/drawingml/2006/main">
               <a:ext uri="{FF2B5EF4-FFF2-40B4-BE49-F238E27FC236}">
-                <a16:creationId xmlns:a16="http://schemas.microsoft.com/office/drawing/2014/main" id="{870BEA1B-24AF-4987-8B08-1C608112C422}"/>
+                <a16:creationId xmlns:a16="http://schemas.microsoft.com/office/drawing/2014/main" id="{444DAABA-A0A6-416F-B80D-E627D402B80D}"/>
               </a:ext>
             </a:extLst>
           </p:cNvPr>
@@ -6347,7 +6347,7 @@
           <p:cNvPr id="19" name="p12-6-t">
             <a:extLst xmlns:a="http://schemas.openxmlformats.org/drawingml/2006/main">
               <a:ext uri="{FF2B5EF4-FFF2-40B4-BE49-F238E27FC236}">
-                <a16:creationId xmlns:a16="http://schemas.microsoft.com/office/drawing/2014/main" id="{B0BB14D6-A048-4E46-9A97-263B86759180}"/>
+                <a16:creationId xmlns:a16="http://schemas.microsoft.com/office/drawing/2014/main" id="{A1CE6748-6EAA-4DAD-B9D3-4A99F2A63F71}"/>
               </a:ext>
             </a:extLst>
           </p:cNvPr>
@@ -6402,7 +6402,7 @@
           <p:cNvPr id="20" name="p12-7-l">
             <a:extLst xmlns:a="http://schemas.openxmlformats.org/drawingml/2006/main">
               <a:ext uri="{FF2B5EF4-FFF2-40B4-BE49-F238E27FC236}">
-                <a16:creationId xmlns:a16="http://schemas.microsoft.com/office/drawing/2014/main" id="{2962DFBF-64B2-4787-B36F-B110F51F3C3E}"/>
+                <a16:creationId xmlns:a16="http://schemas.microsoft.com/office/drawing/2014/main" id="{95E98F8D-72E7-4334-9DB0-3BF437C86CF7}"/>
               </a:ext>
             </a:extLst>
           </p:cNvPr>
@@ -6459,7 +6459,7 @@
           <p:cNvPr id="21" name="p12-7-t">
             <a:extLst xmlns:a="http://schemas.openxmlformats.org/drawingml/2006/main">
               <a:ext uri="{FF2B5EF4-FFF2-40B4-BE49-F238E27FC236}">
-                <a16:creationId xmlns:a16="http://schemas.microsoft.com/office/drawing/2014/main" id="{96FCE6D0-8B6C-4C94-B80E-AC74E655CBCB}"/>
+                <a16:creationId xmlns:a16="http://schemas.microsoft.com/office/drawing/2014/main" id="{91BE69A3-0340-4C49-98AC-D04686526FA2}"/>
               </a:ext>
             </a:extLst>
           </p:cNvPr>
@@ -6514,7 +6514,7 @@
           <p:cNvPr id="22" name="p12-bottom">
             <a:extLst xmlns:a="http://schemas.openxmlformats.org/drawingml/2006/main">
               <a:ext uri="{FF2B5EF4-FFF2-40B4-BE49-F238E27FC236}">
-                <a16:creationId xmlns:a16="http://schemas.microsoft.com/office/drawing/2014/main" id="{0060EEC4-5557-4C86-BC4F-2A321D2972D6}"/>
+                <a16:creationId xmlns:a16="http://schemas.microsoft.com/office/drawing/2014/main" id="{30199B1F-362E-4060-BA3B-1CBB62CC2CC7}"/>
               </a:ext>
             </a:extLst>
           </p:cNvPr>
@@ -6663,7 +6663,7 @@
           <p:cNvPr id="6" name="p13-0-l">
             <a:extLst xmlns:a="http://schemas.openxmlformats.org/drawingml/2006/main">
               <a:ext uri="{FF2B5EF4-FFF2-40B4-BE49-F238E27FC236}">
-                <a16:creationId xmlns:a16="http://schemas.microsoft.com/office/drawing/2014/main" id="{94753008-11A3-457D-9178-6404FCB71E38}"/>
+                <a16:creationId xmlns:a16="http://schemas.microsoft.com/office/drawing/2014/main" id="{A755779D-E073-4E19-ABA9-1A76793E11D1}"/>
               </a:ext>
             </a:extLst>
           </p:cNvPr>
@@ -6720,7 +6720,7 @@
           <p:cNvPr id="7" name="p13-0-t">
             <a:extLst xmlns:a="http://schemas.openxmlformats.org/drawingml/2006/main">
               <a:ext uri="{FF2B5EF4-FFF2-40B4-BE49-F238E27FC236}">
-                <a16:creationId xmlns:a16="http://schemas.microsoft.com/office/drawing/2014/main" id="{9537A38B-DA09-4C84-8CBB-01B79E77CA5D}"/>
+                <a16:creationId xmlns:a16="http://schemas.microsoft.com/office/drawing/2014/main" id="{E1FE4E09-8C04-48CA-A123-7B0A66877BD7}"/>
               </a:ext>
             </a:extLst>
           </p:cNvPr>
@@ -6775,7 +6775,7 @@
           <p:cNvPr id="8" name="p13-1-l">
             <a:extLst xmlns:a="http://schemas.openxmlformats.org/drawingml/2006/main">
               <a:ext uri="{FF2B5EF4-FFF2-40B4-BE49-F238E27FC236}">
-                <a16:creationId xmlns:a16="http://schemas.microsoft.com/office/drawing/2014/main" id="{CE6B33D5-FA8F-4B9E-B298-6F3789CBF283}"/>
+                <a16:creationId xmlns:a16="http://schemas.microsoft.com/office/drawing/2014/main" id="{D58EF8C5-6B47-4D84-B161-D5350861B930}"/>
               </a:ext>
             </a:extLst>
           </p:cNvPr>
@@ -6832,7 +6832,7 @@
           <p:cNvPr id="9" name="p13-1-t">
             <a:extLst xmlns:a="http://schemas.openxmlformats.org/drawingml/2006/main">
               <a:ext uri="{FF2B5EF4-FFF2-40B4-BE49-F238E27FC236}">
-                <a16:creationId xmlns:a16="http://schemas.microsoft.com/office/drawing/2014/main" id="{B528DCD3-3829-4742-8D9D-EC19605B71C5}"/>
+                <a16:creationId xmlns:a16="http://schemas.microsoft.com/office/drawing/2014/main" id="{1F252916-276D-4F26-9D65-3F8952671B09}"/>
               </a:ext>
             </a:extLst>
           </p:cNvPr>
@@ -6887,7 +6887,7 @@
           <p:cNvPr id="10" name="p13-2-l">
             <a:extLst xmlns:a="http://schemas.openxmlformats.org/drawingml/2006/main">
               <a:ext uri="{FF2B5EF4-FFF2-40B4-BE49-F238E27FC236}">
-                <a16:creationId xmlns:a16="http://schemas.microsoft.com/office/drawing/2014/main" id="{F34FFF9E-E5AF-4EFA-B907-8A34FCA36C96}"/>
+                <a16:creationId xmlns:a16="http://schemas.microsoft.com/office/drawing/2014/main" id="{2A95016C-9F9F-47FA-AB33-CC1D0C3CB6FA}"/>
               </a:ext>
             </a:extLst>
           </p:cNvPr>
@@ -6944,7 +6944,7 @@
           <p:cNvPr id="11" name="p13-2-t">
             <a:extLst xmlns:a="http://schemas.openxmlformats.org/drawingml/2006/main">
               <a:ext uri="{FF2B5EF4-FFF2-40B4-BE49-F238E27FC236}">
-                <a16:creationId xmlns:a16="http://schemas.microsoft.com/office/drawing/2014/main" id="{6BBD80A8-E91E-496E-A28B-CED68575353C}"/>
+                <a16:creationId xmlns:a16="http://schemas.microsoft.com/office/drawing/2014/main" id="{865DC166-10D8-40D1-A1F9-8587B3083C8E}"/>
               </a:ext>
             </a:extLst>
           </p:cNvPr>
@@ -6999,7 +6999,7 @@
           <p:cNvPr id="12" name="p13-3-l">
             <a:extLst xmlns:a="http://schemas.openxmlformats.org/drawingml/2006/main">
               <a:ext uri="{FF2B5EF4-FFF2-40B4-BE49-F238E27FC236}">
-                <a16:creationId xmlns:a16="http://schemas.microsoft.com/office/drawing/2014/main" id="{57DF7C7E-AE5B-4971-8AF1-8A94D04B4376}"/>
+                <a16:creationId xmlns:a16="http://schemas.microsoft.com/office/drawing/2014/main" id="{0EC3AE16-A324-41E9-A979-5EF917BC91B3}"/>
               </a:ext>
             </a:extLst>
           </p:cNvPr>
@@ -7056,7 +7056,7 @@
           <p:cNvPr id="13" name="p13-3-t">
             <a:extLst xmlns:a="http://schemas.openxmlformats.org/drawingml/2006/main">
               <a:ext uri="{FF2B5EF4-FFF2-40B4-BE49-F238E27FC236}">
-                <a16:creationId xmlns:a16="http://schemas.microsoft.com/office/drawing/2014/main" id="{AA788BEE-84EB-4F0B-8B05-3464AA56F846}"/>
+                <a16:creationId xmlns:a16="http://schemas.microsoft.com/office/drawing/2014/main" id="{DFABD779-C580-4165-96BD-11FE2D280715}"/>
               </a:ext>
             </a:extLst>
           </p:cNvPr>
@@ -7111,7 +7111,7 @@
           <p:cNvPr id="14" name="p13-4-l">
             <a:extLst xmlns:a="http://schemas.openxmlformats.org/drawingml/2006/main">
               <a:ext uri="{FF2B5EF4-FFF2-40B4-BE49-F238E27FC236}">
-                <a16:creationId xmlns:a16="http://schemas.microsoft.com/office/drawing/2014/main" id="{90DA915B-19F8-4EEF-970D-05CE70FF2358}"/>
+                <a16:creationId xmlns:a16="http://schemas.microsoft.com/office/drawing/2014/main" id="{68B6081F-C0C6-4782-AFB2-410C984982BD}"/>
               </a:ext>
             </a:extLst>
           </p:cNvPr>
@@ -7168,7 +7168,7 @@
           <p:cNvPr id="15" name="p13-4-t">
             <a:extLst xmlns:a="http://schemas.openxmlformats.org/drawingml/2006/main">
               <a:ext uri="{FF2B5EF4-FFF2-40B4-BE49-F238E27FC236}">
-                <a16:creationId xmlns:a16="http://schemas.microsoft.com/office/drawing/2014/main" id="{C4698DF2-B27E-4C32-A542-30F734D90FDE}"/>
+                <a16:creationId xmlns:a16="http://schemas.microsoft.com/office/drawing/2014/main" id="{36AF2374-A1AC-43C8-9B4B-110CE2659D30}"/>
               </a:ext>
             </a:extLst>
           </p:cNvPr>
@@ -7223,7 +7223,7 @@
           <p:cNvPr id="16" name="p13-wall">
             <a:extLst xmlns:a="http://schemas.openxmlformats.org/drawingml/2006/main">
               <a:ext uri="{FF2B5EF4-FFF2-40B4-BE49-F238E27FC236}">
-                <a16:creationId xmlns:a16="http://schemas.microsoft.com/office/drawing/2014/main" id="{030342D0-30DC-41F4-9C74-1CD64229D4E7}"/>
+                <a16:creationId xmlns:a16="http://schemas.microsoft.com/office/drawing/2014/main" id="{BF5B5719-2D5D-4974-B0B0-30F5EE919009}"/>
               </a:ext>
             </a:extLst>
           </p:cNvPr>
@@ -7254,7 +7254,7 @@
           <p:cNvPr id="17" name="p13-sep">
             <a:extLst xmlns:a="http://schemas.openxmlformats.org/drawingml/2006/main">
               <a:ext uri="{FF2B5EF4-FFF2-40B4-BE49-F238E27FC236}">
-                <a16:creationId xmlns:a16="http://schemas.microsoft.com/office/drawing/2014/main" id="{F67BFD69-D173-456B-9797-54869DA2E359}"/>
+                <a16:creationId xmlns:a16="http://schemas.microsoft.com/office/drawing/2014/main" id="{F0044F7B-6AB9-448B-8E11-8A8B80B8C9C8}"/>
               </a:ext>
             </a:extLst>
           </p:cNvPr>
@@ -7309,7 +7309,7 @@
           <p:cNvPr id="18" name="p13-code">
             <a:extLst xmlns:a="http://schemas.openxmlformats.org/drawingml/2006/main">
               <a:ext uri="{FF2B5EF4-FFF2-40B4-BE49-F238E27FC236}">
-                <a16:creationId xmlns:a16="http://schemas.microsoft.com/office/drawing/2014/main" id="{43965862-8938-4302-8D02-F709DA4732CC}"/>
+                <a16:creationId xmlns:a16="http://schemas.microsoft.com/office/drawing/2014/main" id="{19079AC9-FCC5-4125-A6F5-2FBD67DB3491}"/>
               </a:ext>
             </a:extLst>
           </p:cNvPr>
@@ -7442,7 +7442,7 @@
           <p:cNvPr id="19" name="p13-note">
             <a:extLst xmlns:a="http://schemas.openxmlformats.org/drawingml/2006/main">
               <a:ext uri="{FF2B5EF4-FFF2-40B4-BE49-F238E27FC236}">
-                <a16:creationId xmlns:a16="http://schemas.microsoft.com/office/drawing/2014/main" id="{A57AA17D-2DF2-4FC1-B049-6771CCB60188}"/>
+                <a16:creationId xmlns:a16="http://schemas.microsoft.com/office/drawing/2014/main" id="{0100BD6B-E696-48BA-AA83-C6B2CCBA8B03}"/>
               </a:ext>
             </a:extLst>
           </p:cNvPr>
@@ -7591,7 +7591,7 @@
           <p:cNvPr id="6" name="p14-label">
             <a:extLst xmlns:a="http://schemas.openxmlformats.org/drawingml/2006/main">
               <a:ext uri="{FF2B5EF4-FFF2-40B4-BE49-F238E27FC236}">
-                <a16:creationId xmlns:a16="http://schemas.microsoft.com/office/drawing/2014/main" id="{CB5F44DB-E05B-4BD3-873C-6CE77C76D59D}"/>
+                <a16:creationId xmlns:a16="http://schemas.microsoft.com/office/drawing/2014/main" id="{0FEE14E1-260F-45C9-8203-1AC1B89C49BB}"/>
               </a:ext>
             </a:extLst>
           </p:cNvPr>
@@ -7644,7 +7644,7 @@
           <p:cNvPr id="7" name="p14-0">
             <a:extLst xmlns:a="http://schemas.openxmlformats.org/drawingml/2006/main">
               <a:ext uri="{FF2B5EF4-FFF2-40B4-BE49-F238E27FC236}">
-                <a16:creationId xmlns:a16="http://schemas.microsoft.com/office/drawing/2014/main" id="{3920B979-C336-4FDB-AB6F-21EAE063CBFC}"/>
+                <a16:creationId xmlns:a16="http://schemas.microsoft.com/office/drawing/2014/main" id="{B2F429B8-E8D7-4D76-AA6B-121C0B7C02F5}"/>
               </a:ext>
             </a:extLst>
           </p:cNvPr>
@@ -7721,7 +7721,7 @@
           <p:cNvPr id="8" name="p14-a0">
             <a:extLst xmlns:a="http://schemas.openxmlformats.org/drawingml/2006/main">
               <a:ext uri="{FF2B5EF4-FFF2-40B4-BE49-F238E27FC236}">
-                <a16:creationId xmlns:a16="http://schemas.microsoft.com/office/drawing/2014/main" id="{1259F050-8B6F-458C-B9FE-B004031993A1}"/>
+                <a16:creationId xmlns:a16="http://schemas.microsoft.com/office/drawing/2014/main" id="{290BF375-2FAC-4908-8205-0E419AEB8B9C}"/>
               </a:ext>
             </a:extLst>
           </p:cNvPr>
@@ -7774,7 +7774,7 @@
           <p:cNvPr id="9" name="p14-1">
             <a:extLst xmlns:a="http://schemas.openxmlformats.org/drawingml/2006/main">
               <a:ext uri="{FF2B5EF4-FFF2-40B4-BE49-F238E27FC236}">
-                <a16:creationId xmlns:a16="http://schemas.microsoft.com/office/drawing/2014/main" id="{C0D01B37-C974-4CF8-998C-FC759F9A522D}"/>
+                <a16:creationId xmlns:a16="http://schemas.microsoft.com/office/drawing/2014/main" id="{D55FA1D2-452D-49FF-ADAA-AC64B68CF6FB}"/>
               </a:ext>
             </a:extLst>
           </p:cNvPr>
@@ -7851,7 +7851,7 @@
           <p:cNvPr id="10" name="p14-a1">
             <a:extLst xmlns:a="http://schemas.openxmlformats.org/drawingml/2006/main">
               <a:ext uri="{FF2B5EF4-FFF2-40B4-BE49-F238E27FC236}">
-                <a16:creationId xmlns:a16="http://schemas.microsoft.com/office/drawing/2014/main" id="{C37A903D-37C8-4C38-A09F-C8E868B781AB}"/>
+                <a16:creationId xmlns:a16="http://schemas.microsoft.com/office/drawing/2014/main" id="{431C1F4F-CC81-4667-8A7F-C045385BB410}"/>
               </a:ext>
             </a:extLst>
           </p:cNvPr>
@@ -7904,7 +7904,7 @@
           <p:cNvPr id="11" name="p14-2">
             <a:extLst xmlns:a="http://schemas.openxmlformats.org/drawingml/2006/main">
               <a:ext uri="{FF2B5EF4-FFF2-40B4-BE49-F238E27FC236}">
-                <a16:creationId xmlns:a16="http://schemas.microsoft.com/office/drawing/2014/main" id="{17345815-AB94-4320-8237-B8C6F303424B}"/>
+                <a16:creationId xmlns:a16="http://schemas.microsoft.com/office/drawing/2014/main" id="{11CEDA25-AC1C-4321-A1B2-B0FB0632E879}"/>
               </a:ext>
             </a:extLst>
           </p:cNvPr>
@@ -7981,7 +7981,7 @@
           <p:cNvPr id="12" name="p14-a2">
             <a:extLst xmlns:a="http://schemas.openxmlformats.org/drawingml/2006/main">
               <a:ext uri="{FF2B5EF4-FFF2-40B4-BE49-F238E27FC236}">
-                <a16:creationId xmlns:a16="http://schemas.microsoft.com/office/drawing/2014/main" id="{87BE2E64-7039-46C6-A433-A64EAA78AD00}"/>
+                <a16:creationId xmlns:a16="http://schemas.microsoft.com/office/drawing/2014/main" id="{9A9A5186-DD55-480B-83CC-05230286CE98}"/>
               </a:ext>
             </a:extLst>
           </p:cNvPr>
@@ -8034,7 +8034,7 @@
           <p:cNvPr id="13" name="p14-3">
             <a:extLst xmlns:a="http://schemas.openxmlformats.org/drawingml/2006/main">
               <a:ext uri="{FF2B5EF4-FFF2-40B4-BE49-F238E27FC236}">
-                <a16:creationId xmlns:a16="http://schemas.microsoft.com/office/drawing/2014/main" id="{7418063E-D4CB-4869-A870-1E2C75F29CC5}"/>
+                <a16:creationId xmlns:a16="http://schemas.microsoft.com/office/drawing/2014/main" id="{794CEBAC-603D-4F56-A827-844B492C7D62}"/>
               </a:ext>
             </a:extLst>
           </p:cNvPr>
@@ -8111,7 +8111,7 @@
           <p:cNvPr id="14" name="p14-bounds">
             <a:extLst xmlns:a="http://schemas.openxmlformats.org/drawingml/2006/main">
               <a:ext uri="{FF2B5EF4-FFF2-40B4-BE49-F238E27FC236}">
-                <a16:creationId xmlns:a16="http://schemas.microsoft.com/office/drawing/2014/main" id="{CD383AC4-40D5-4E4C-9DF3-74B7687A41B0}"/>
+                <a16:creationId xmlns:a16="http://schemas.microsoft.com/office/drawing/2014/main" id="{C79568BE-D962-4A0B-94E6-206B4FC0E3FF}"/>
               </a:ext>
             </a:extLst>
           </p:cNvPr>
@@ -8166,7 +8166,7 @@
           <p:cNvPr id="15" name="p14-eval">
             <a:extLst xmlns:a="http://schemas.openxmlformats.org/drawingml/2006/main">
               <a:ext uri="{FF2B5EF4-FFF2-40B4-BE49-F238E27FC236}">
-                <a16:creationId xmlns:a16="http://schemas.microsoft.com/office/drawing/2014/main" id="{0620382C-45F7-40BC-BF23-1DBFC1064077}"/>
+                <a16:creationId xmlns:a16="http://schemas.microsoft.com/office/drawing/2014/main" id="{FB52C0E7-9612-483E-BA9D-FF98F78CE3AD}"/>
               </a:ext>
             </a:extLst>
           </p:cNvPr>
@@ -8315,7 +8315,7 @@
           <p:cNvPr id="6" name="p15-label">
             <a:extLst xmlns:a="http://schemas.openxmlformats.org/drawingml/2006/main">
               <a:ext uri="{FF2B5EF4-FFF2-40B4-BE49-F238E27FC236}">
-                <a16:creationId xmlns:a16="http://schemas.microsoft.com/office/drawing/2014/main" id="{E7D12C48-44C1-41B3-9EED-8BF087E96343}"/>
+                <a16:creationId xmlns:a16="http://schemas.microsoft.com/office/drawing/2014/main" id="{EE07586E-095F-4585-A898-B414EB782D26}"/>
               </a:ext>
             </a:extLst>
           </p:cNvPr>
@@ -8368,7 +8368,7 @@
           <p:cNvPr id="7" name="p15-tree">
             <a:extLst xmlns:a="http://schemas.openxmlformats.org/drawingml/2006/main">
               <a:ext uri="{FF2B5EF4-FFF2-40B4-BE49-F238E27FC236}">
-                <a16:creationId xmlns:a16="http://schemas.microsoft.com/office/drawing/2014/main" id="{8F51CBE4-6525-49D2-9C47-27C2D367010A}"/>
+                <a16:creationId xmlns:a16="http://schemas.microsoft.com/office/drawing/2014/main" id="{F9100094-7574-47F2-8806-567CF0A0DE19}"/>
               </a:ext>
             </a:extLst>
           </p:cNvPr>
@@ -8573,7 +8573,7 @@
           <p:cNvPr id="8" name="p15-n0">
             <a:extLst xmlns:a="http://schemas.openxmlformats.org/drawingml/2006/main">
               <a:ext uri="{FF2B5EF4-FFF2-40B4-BE49-F238E27FC236}">
-                <a16:creationId xmlns:a16="http://schemas.microsoft.com/office/drawing/2014/main" id="{16FB99A4-D8C0-4CD9-B1D4-7F3FB806596B}"/>
+                <a16:creationId xmlns:a16="http://schemas.microsoft.com/office/drawing/2014/main" id="{2ED9BB2E-CBC2-4427-ABC7-847E6045315E}"/>
               </a:ext>
             </a:extLst>
           </p:cNvPr>
@@ -8630,7 +8630,7 @@
           <p:cNvPr id="9" name="p15-t0">
             <a:extLst xmlns:a="http://schemas.openxmlformats.org/drawingml/2006/main">
               <a:ext uri="{FF2B5EF4-FFF2-40B4-BE49-F238E27FC236}">
-                <a16:creationId xmlns:a16="http://schemas.microsoft.com/office/drawing/2014/main" id="{C5808594-626D-41CB-BC1A-F397779CAB01}"/>
+                <a16:creationId xmlns:a16="http://schemas.microsoft.com/office/drawing/2014/main" id="{F6118DA3-BB0B-4228-B104-EB20ED32A6AE}"/>
               </a:ext>
             </a:extLst>
           </p:cNvPr>
@@ -8685,7 +8685,7 @@
           <p:cNvPr id="10" name="p15-n1">
             <a:extLst xmlns:a="http://schemas.openxmlformats.org/drawingml/2006/main">
               <a:ext uri="{FF2B5EF4-FFF2-40B4-BE49-F238E27FC236}">
-                <a16:creationId xmlns:a16="http://schemas.microsoft.com/office/drawing/2014/main" id="{9D265515-1ACC-43BA-8097-9D9A21F02574}"/>
+                <a16:creationId xmlns:a16="http://schemas.microsoft.com/office/drawing/2014/main" id="{F2820D00-5076-4564-8435-D49EB5BB3D12}"/>
               </a:ext>
             </a:extLst>
           </p:cNvPr>
@@ -8742,7 +8742,7 @@
           <p:cNvPr id="11" name="p15-t1">
             <a:extLst xmlns:a="http://schemas.openxmlformats.org/drawingml/2006/main">
               <a:ext uri="{FF2B5EF4-FFF2-40B4-BE49-F238E27FC236}">
-                <a16:creationId xmlns:a16="http://schemas.microsoft.com/office/drawing/2014/main" id="{4ECEC42D-BE48-4A9B-91BC-BF0AC787CA80}"/>
+                <a16:creationId xmlns:a16="http://schemas.microsoft.com/office/drawing/2014/main" id="{94237697-7119-4454-9B28-115B3573C941}"/>
               </a:ext>
             </a:extLst>
           </p:cNvPr>
@@ -8797,7 +8797,7 @@
           <p:cNvPr id="12" name="p15-n2">
             <a:extLst xmlns:a="http://schemas.openxmlformats.org/drawingml/2006/main">
               <a:ext uri="{FF2B5EF4-FFF2-40B4-BE49-F238E27FC236}">
-                <a16:creationId xmlns:a16="http://schemas.microsoft.com/office/drawing/2014/main" id="{CCF19193-5519-4142-A84D-E86D9E43ED48}"/>
+                <a16:creationId xmlns:a16="http://schemas.microsoft.com/office/drawing/2014/main" id="{14EABB0B-9E32-494C-84D8-67FB03B90C06}"/>
               </a:ext>
             </a:extLst>
           </p:cNvPr>
@@ -8854,7 +8854,7 @@
           <p:cNvPr id="13" name="p15-t2">
             <a:extLst xmlns:a="http://schemas.openxmlformats.org/drawingml/2006/main">
               <a:ext uri="{FF2B5EF4-FFF2-40B4-BE49-F238E27FC236}">
-                <a16:creationId xmlns:a16="http://schemas.microsoft.com/office/drawing/2014/main" id="{ED3E783F-1FE8-4046-A76D-C9521468F175}"/>
+                <a16:creationId xmlns:a16="http://schemas.microsoft.com/office/drawing/2014/main" id="{D86734D5-B1D9-4145-9185-C15CEE067970}"/>
               </a:ext>
             </a:extLst>
           </p:cNvPr>
@@ -8909,7 +8909,7 @@
           <p:cNvPr id="14" name="p15-n3">
             <a:extLst xmlns:a="http://schemas.openxmlformats.org/drawingml/2006/main">
               <a:ext uri="{FF2B5EF4-FFF2-40B4-BE49-F238E27FC236}">
-                <a16:creationId xmlns:a16="http://schemas.microsoft.com/office/drawing/2014/main" id="{668ED2EE-D6DF-43FC-86A9-3A886FB0A471}"/>
+                <a16:creationId xmlns:a16="http://schemas.microsoft.com/office/drawing/2014/main" id="{DDCF2534-6335-4B65-BA62-D5B8D8795A92}"/>
               </a:ext>
             </a:extLst>
           </p:cNvPr>
@@ -8966,7 +8966,7 @@
           <p:cNvPr id="15" name="p15-t3">
             <a:extLst xmlns:a="http://schemas.openxmlformats.org/drawingml/2006/main">
               <a:ext uri="{FF2B5EF4-FFF2-40B4-BE49-F238E27FC236}">
-                <a16:creationId xmlns:a16="http://schemas.microsoft.com/office/drawing/2014/main" id="{EB78CF7F-7A38-4FC9-A140-E12BB267DE16}"/>
+                <a16:creationId xmlns:a16="http://schemas.microsoft.com/office/drawing/2014/main" id="{066841D7-E900-4AFD-8CB1-BEE0598A2866}"/>
               </a:ext>
             </a:extLst>
           </p:cNvPr>
@@ -9021,7 +9021,7 @@
           <p:cNvPr id="16" name="p15-bottom">
             <a:extLst xmlns:a="http://schemas.openxmlformats.org/drawingml/2006/main">
               <a:ext uri="{FF2B5EF4-FFF2-40B4-BE49-F238E27FC236}">
-                <a16:creationId xmlns:a16="http://schemas.microsoft.com/office/drawing/2014/main" id="{7E61AC73-E095-4320-BB9E-2AD11F45AAFC}"/>
+                <a16:creationId xmlns:a16="http://schemas.microsoft.com/office/drawing/2014/main" id="{52712C6B-F8FD-4F3A-B448-C19BB9D6F3F6}"/>
               </a:ext>
             </a:extLst>
           </p:cNvPr>
@@ -9167,110 +9167,164 @@
       </p:sp>
       <p:sp>
         <p:nvSpPr>
-          <p:cNvPr id="6" name="p16-axis">
-            <a:extLst xmlns:a="http://schemas.openxmlformats.org/drawingml/2006/main">
-              <a:ext uri="{FF2B5EF4-FFF2-40B4-BE49-F238E27FC236}">
-                <a16:creationId xmlns:a16="http://schemas.microsoft.com/office/drawing/2014/main" id="{62B56F15-FCE0-4BBD-AA78-6EE274285A28}"/>
-              </a:ext>
-            </a:extLst>
-          </p:cNvPr>
-          <p:cNvSpPr>
-            <a:spLocks xmlns:a="http://schemas.openxmlformats.org/drawingml/2006/main" noGrp="1"/>
-          </p:cNvSpPr>
-          <p:nvPr/>
-        </p:nvSpPr>
-        <p:spPr>
-          <a:xfrm xmlns:a="http://schemas.openxmlformats.org/drawingml/2006/main" rot="0">
-            <a:off x="876300" y="2743200"/>
-            <a:ext cx="10363200" cy="38100"/>
+          <p:cNvPr id="6" name="p16-label">
+            <a:extLst xmlns:a="http://schemas.openxmlformats.org/drawingml/2006/main">
+              <a:ext uri="{FF2B5EF4-FFF2-40B4-BE49-F238E27FC236}">
+                <a16:creationId xmlns:a16="http://schemas.microsoft.com/office/drawing/2014/main" id="{8EE1ED0E-84EA-4AFA-96EA-6E7C04FF54EE}"/>
+              </a:ext>
+            </a:extLst>
+          </p:cNvPr>
+          <p:cNvSpPr>
+            <a:spLocks xmlns:a="http://schemas.openxmlformats.org/drawingml/2006/main" noGrp="1"/>
+          </p:cNvSpPr>
+          <p:nvPr/>
+        </p:nvSpPr>
+        <p:spPr>
+          <a:xfrm xmlns:a="http://schemas.openxmlformats.org/drawingml/2006/main">
+            <a:off x="1428750" y="838200"/>
+            <a:ext cx="9334500" cy="419100"/>
           </a:xfrm>
           <a:prstGeom xmlns:a="http://schemas.openxmlformats.org/drawingml/2006/main" prst="rect">
             <a:avLst/>
           </a:prstGeom>
           <a:solidFill xmlns:a="http://schemas.openxmlformats.org/drawingml/2006/main">
-            <a:srgbClr val="18354E"/>
-          </a:solidFill>
-          <a:ln xmlns:a="http://schemas.openxmlformats.org/drawingml/2006/main" w="0">
-            <a:noFill/>
-            <a:prstDash val="solid"/>
-          </a:ln>
-        </p:spPr>
-      </p:sp>
-      <p:sp>
-        <p:nvSpPr>
-          <p:cNvPr id="7" name="p16-dot0">
-            <a:extLst xmlns:a="http://schemas.openxmlformats.org/drawingml/2006/main">
-              <a:ext uri="{FF2B5EF4-FFF2-40B4-BE49-F238E27FC236}">
-                <a16:creationId xmlns:a16="http://schemas.microsoft.com/office/drawing/2014/main" id="{C8A244B2-AE6B-43DB-8D1D-F463E8F7D25A}"/>
-              </a:ext>
-            </a:extLst>
-          </p:cNvPr>
-          <p:cNvSpPr>
-            <a:spLocks xmlns:a="http://schemas.openxmlformats.org/drawingml/2006/main" noGrp="1"/>
-          </p:cNvSpPr>
-          <p:nvPr/>
-        </p:nvSpPr>
-        <p:spPr>
-          <a:xfrm xmlns:a="http://schemas.openxmlformats.org/drawingml/2006/main">
-            <a:off x="514350" y="2514600"/>
-            <a:ext cx="1066800" cy="495300"/>
+            <a:srgbClr val="F8E9EA"/>
+          </a:solidFill>
+          <a:ln xmlns:a="http://schemas.openxmlformats.org/drawingml/2006/main" w="0">
+            <a:noFill/>
+            <a:prstDash val="solid"/>
+          </a:ln>
+        </p:spPr>
+        <p:txBody>
+          <a:bodyPr xmlns:a="http://schemas.openxmlformats.org/drawingml/2006/main" lIns="76200" tIns="38100" rIns="76200" bIns="38100" anchor="ctr"/>
+          <a:lstStyle xmlns:a="http://schemas.openxmlformats.org/drawingml/2006/main"/>
+          <a:p xmlns:a="http://schemas.openxmlformats.org/drawingml/2006/main">
+            <a:pPr algn="ctr">
+              <a:defRPr sz="1800" b="1">
+                <a:solidFill>
+                  <a:srgbClr val="C8161E"/>
+                </a:solidFill>
+              </a:defRPr>
+            </a:pPr>
+            <a:r>
+              <a:rPr sz="1800" b="1">
+                <a:solidFill>
+                  <a:srgbClr val="C8161E"/>
+                </a:solidFill>
+                <a:latin typeface="Microsoft YaHei"/>
+                <a:ea typeface="Microsoft YaHei"/>
+                <a:cs typeface="Microsoft YaHei"/>
+              </a:rPr>
+              <a:t>课程虚构教学 trace｜非真实运行日志</a:t>
+            </a:r>
+          </a:p>
+        </p:txBody>
+      </p:sp>
+      <p:sp>
+        <p:nvSpPr>
+          <p:cNvPr id="7" name="p16-e0">
+            <a:extLst xmlns:a="http://schemas.openxmlformats.org/drawingml/2006/main">
+              <a:ext uri="{FF2B5EF4-FFF2-40B4-BE49-F238E27FC236}">
+                <a16:creationId xmlns:a16="http://schemas.microsoft.com/office/drawing/2014/main" id="{2ED69329-0F00-4FB6-9581-70DC5505B843}"/>
+              </a:ext>
+            </a:extLst>
+          </p:cNvPr>
+          <p:cNvSpPr>
+            <a:spLocks xmlns:a="http://schemas.openxmlformats.org/drawingml/2006/main" noGrp="1"/>
+          </p:cNvSpPr>
+          <p:nvPr/>
+        </p:nvSpPr>
+        <p:spPr>
+          <a:xfrm xmlns:a="http://schemas.openxmlformats.org/drawingml/2006/main">
+            <a:off x="666750" y="1657350"/>
+            <a:ext cx="3200400" cy="1428750"/>
           </a:xfrm>
           <a:prstGeom xmlns:a="http://schemas.openxmlformats.org/drawingml/2006/main" prst="roundRect">
             <a:avLst>
-              <a:gd name="adj" fmla="val 15385"/>
+              <a:gd name="adj" fmla="val 5333"/>
             </a:avLst>
           </a:prstGeom>
           <a:solidFill xmlns:a="http://schemas.openxmlformats.org/drawingml/2006/main">
-            <a:srgbClr val="28745A"/>
-          </a:solidFill>
-          <a:ln xmlns:a="http://schemas.openxmlformats.org/drawingml/2006/main" w="0">
-            <a:noFill/>
-            <a:prstDash val="solid"/>
-          </a:ln>
-        </p:spPr>
-        <p:txBody>
-          <a:bodyPr xmlns:a="http://schemas.openxmlformats.org/drawingml/2006/main" lIns="76200" tIns="38100" rIns="76200" bIns="38100" anchor="ctr"/>
-          <a:lstStyle xmlns:a="http://schemas.openxmlformats.org/drawingml/2006/main"/>
-          <a:p xmlns:a="http://schemas.openxmlformats.org/drawingml/2006/main">
-            <a:pPr algn="ctr">
-              <a:defRPr sz="1200" b="1">
-                <a:solidFill>
-                  <a:srgbClr val="FFFFFF"/>
-                </a:solidFill>
-              </a:defRPr>
-            </a:pPr>
-            <a:r>
-              <a:rPr sz="1200" b="1">
-                <a:solidFill>
-                  <a:srgbClr val="FFFFFF"/>
-                </a:solidFill>
-                <a:latin typeface="Microsoft YaHei"/>
-                <a:ea typeface="Microsoft YaHei"/>
-                <a:cs typeface="Microsoft YaHei"/>
-              </a:rPr>
-              <a:t>ok</a:t>
-            </a:r>
-          </a:p>
-        </p:txBody>
-      </p:sp>
-      <p:sp>
-        <p:nvSpPr>
-          <p:cNvPr id="8" name="p16-time0">
-            <a:extLst xmlns:a="http://schemas.openxmlformats.org/drawingml/2006/main">
-              <a:ext uri="{FF2B5EF4-FFF2-40B4-BE49-F238E27FC236}">
-                <a16:creationId xmlns:a16="http://schemas.microsoft.com/office/drawing/2014/main" id="{607AAE15-5AE3-4DF7-AD1B-36DBE6CBC90C}"/>
-              </a:ext>
-            </a:extLst>
-          </p:cNvPr>
-          <p:cNvSpPr>
-            <a:spLocks xmlns:a="http://schemas.openxmlformats.org/drawingml/2006/main" noGrp="1"/>
-          </p:cNvSpPr>
-          <p:nvPr/>
-        </p:nvSpPr>
-        <p:spPr>
-          <a:xfrm xmlns:a="http://schemas.openxmlformats.org/drawingml/2006/main">
-            <a:off x="514350" y="1885950"/>
-            <a:ext cx="1066800" cy="361950"/>
+            <a:srgbClr val="F8E9EA"/>
+          </a:solidFill>
+          <a:ln xmlns:a="http://schemas.openxmlformats.org/drawingml/2006/main" w="19050">
+            <a:solidFill>
+              <a:srgbClr val="C8161E"/>
+            </a:solidFill>
+            <a:prstDash val="solid"/>
+          </a:ln>
+        </p:spPr>
+        <p:txBody>
+          <a:bodyPr xmlns:a="http://schemas.openxmlformats.org/drawingml/2006/main" lIns="76200" tIns="38100" rIns="76200" bIns="38100" anchor="ctr"/>
+          <a:lstStyle xmlns:a="http://schemas.openxmlformats.org/drawingml/2006/main"/>
+          <a:p xmlns:a="http://schemas.openxmlformats.org/drawingml/2006/main">
+            <a:pPr algn="ctr">
+              <a:lnSpc>
+                <a:spcPct val="128000"/>
+              </a:lnSpc>
+              <a:buNone/>
+              <a:defRPr sz="1800" b="1">
+                <a:solidFill>
+                  <a:srgbClr val="C8161E"/>
+                </a:solidFill>
+              </a:defRPr>
+            </a:pPr>
+            <a:r>
+              <a:rPr sz="1800" b="1">
+                <a:solidFill>
+                  <a:srgbClr val="C8161E"/>
+                </a:solidFill>
+                <a:latin typeface="Microsoft YaHei"/>
+                <a:ea typeface="Microsoft YaHei"/>
+                <a:cs typeface="Microsoft YaHei"/>
+              </a:rPr>
+              <a:t>09:03｜越权请求</a:t>
+            </a:r>
+          </a:p>
+          <a:p xmlns:a="http://schemas.openxmlformats.org/drawingml/2006/main">
+            <a:pPr algn="ctr">
+              <a:lnSpc>
+                <a:spcPct val="128000"/>
+              </a:lnSpc>
+              <a:buNone/>
+              <a:defRPr sz="1800" b="1">
+                <a:solidFill>
+                  <a:srgbClr val="C8161E"/>
+                </a:solidFill>
+              </a:defRPr>
+            </a:pPr>
+            <a:r>
+              <a:rPr sz="1800" b="1">
+                <a:solidFill>
+                  <a:srgbClr val="C8161E"/>
+                </a:solidFill>
+                <a:latin typeface="Microsoft YaHei"/>
+                <a:ea typeface="Microsoft YaHei"/>
+                <a:cs typeface="Microsoft YaHei"/>
+              </a:rPr>
+              <a:t>尝试联网补文献</a:t>
+            </a:r>
+          </a:p>
+        </p:txBody>
+      </p:sp>
+      <p:sp>
+        <p:nvSpPr>
+          <p:cNvPr id="8" name="p16-a0">
+            <a:extLst xmlns:a="http://schemas.openxmlformats.org/drawingml/2006/main">
+              <a:ext uri="{FF2B5EF4-FFF2-40B4-BE49-F238E27FC236}">
+                <a16:creationId xmlns:a16="http://schemas.microsoft.com/office/drawing/2014/main" id="{4DFBCAA0-A960-4C1C-BA6F-3608222902AF}"/>
+              </a:ext>
+            </a:extLst>
+          </p:cNvPr>
+          <p:cNvSpPr>
+            <a:spLocks xmlns:a="http://schemas.openxmlformats.org/drawingml/2006/main" noGrp="1"/>
+          </p:cNvSpPr>
+          <p:nvPr/>
+        </p:nvSpPr>
+        <p:spPr>
+          <a:xfrm xmlns:a="http://schemas.openxmlformats.org/drawingml/2006/main">
+            <a:off x="3924300" y="2019300"/>
+            <a:ext cx="495300" cy="685800"/>
           </a:xfrm>
           <a:prstGeom xmlns:a="http://schemas.openxmlformats.org/drawingml/2006/main" prst="rect">
             <a:avLst/>
@@ -9286,762 +9340,276 @@
           <a:lstStyle xmlns:a="http://schemas.openxmlformats.org/drawingml/2006/main"/>
           <a:p xmlns:a="http://schemas.openxmlformats.org/drawingml/2006/main">
             <a:pPr algn="ctr">
-              <a:defRPr sz="1350" b="1">
-                <a:solidFill>
-                  <a:srgbClr val="667684"/>
-                </a:solidFill>
-              </a:defRPr>
-            </a:pPr>
-            <a:r>
-              <a:rPr sz="1350" b="1">
-                <a:solidFill>
-                  <a:srgbClr val="667684"/>
-                </a:solidFill>
-                <a:latin typeface="Consolas"/>
-                <a:ea typeface="Consolas"/>
-                <a:cs typeface="Consolas"/>
-              </a:rPr>
-              <a:t>09:00</a:t>
-            </a:r>
-          </a:p>
-        </p:txBody>
-      </p:sp>
-      <p:sp>
-        <p:nvSpPr>
-          <p:cNvPr id="9" name="p16-t0">
-            <a:extLst xmlns:a="http://schemas.openxmlformats.org/drawingml/2006/main">
-              <a:ext uri="{FF2B5EF4-FFF2-40B4-BE49-F238E27FC236}">
-                <a16:creationId xmlns:a16="http://schemas.microsoft.com/office/drawing/2014/main" id="{C01FD10C-D2B8-45AB-A989-A0F832CD9D24}"/>
-              </a:ext>
-            </a:extLst>
-          </p:cNvPr>
-          <p:cNvSpPr>
-            <a:spLocks xmlns:a="http://schemas.openxmlformats.org/drawingml/2006/main" noGrp="1"/>
-          </p:cNvSpPr>
-          <p:nvPr/>
-        </p:nvSpPr>
-        <p:spPr>
-          <a:xfrm xmlns:a="http://schemas.openxmlformats.org/drawingml/2006/main">
-            <a:off x="209550" y="3238500"/>
-            <a:ext cx="1676400" cy="819150"/>
+              <a:defRPr sz="2700" b="1">
+                <a:solidFill>
+                  <a:srgbClr val="C8161E"/>
+                </a:solidFill>
+              </a:defRPr>
+            </a:pPr>
+            <a:r>
+              <a:rPr sz="2700" b="1">
+                <a:solidFill>
+                  <a:srgbClr val="C8161E"/>
+                </a:solidFill>
+                <a:latin typeface="Microsoft YaHei"/>
+                <a:ea typeface="Microsoft YaHei"/>
+                <a:cs typeface="Microsoft YaHei"/>
+              </a:rPr>
+              <a:t>→</a:t>
+            </a:r>
+          </a:p>
+        </p:txBody>
+      </p:sp>
+      <p:sp>
+        <p:nvSpPr>
+          <p:cNvPr id="9" name="p16-e1">
+            <a:extLst xmlns:a="http://schemas.openxmlformats.org/drawingml/2006/main">
+              <a:ext uri="{FF2B5EF4-FFF2-40B4-BE49-F238E27FC236}">
+                <a16:creationId xmlns:a16="http://schemas.microsoft.com/office/drawing/2014/main" id="{D1F64D31-2D8F-4756-BD0F-2A7A70D375ED}"/>
+              </a:ext>
+            </a:extLst>
+          </p:cNvPr>
+          <p:cNvSpPr>
+            <a:spLocks xmlns:a="http://schemas.openxmlformats.org/drawingml/2006/main" noGrp="1"/>
+          </p:cNvSpPr>
+          <p:nvPr/>
+        </p:nvSpPr>
+        <p:spPr>
+          <a:xfrm xmlns:a="http://schemas.openxmlformats.org/drawingml/2006/main">
+            <a:off x="4495800" y="1657350"/>
+            <a:ext cx="3200400" cy="1428750"/>
+          </a:xfrm>
+          <a:prstGeom xmlns:a="http://schemas.openxmlformats.org/drawingml/2006/main" prst="roundRect">
+            <a:avLst>
+              <a:gd name="adj" fmla="val 5333"/>
+            </a:avLst>
+          </a:prstGeom>
+          <a:solidFill xmlns:a="http://schemas.openxmlformats.org/drawingml/2006/main">
+            <a:srgbClr val="FAF0DD"/>
+          </a:solidFill>
+          <a:ln xmlns:a="http://schemas.openxmlformats.org/drawingml/2006/main" w="19050">
+            <a:solidFill>
+              <a:srgbClr val="A86C12"/>
+            </a:solidFill>
+            <a:prstDash val="solid"/>
+          </a:ln>
+        </p:spPr>
+        <p:txBody>
+          <a:bodyPr xmlns:a="http://schemas.openxmlformats.org/drawingml/2006/main" lIns="76200" tIns="38100" rIns="76200" bIns="38100" anchor="ctr"/>
+          <a:lstStyle xmlns:a="http://schemas.openxmlformats.org/drawingml/2006/main"/>
+          <a:p xmlns:a="http://schemas.openxmlformats.org/drawingml/2006/main">
+            <a:pPr algn="ctr">
+              <a:lnSpc>
+                <a:spcPct val="128000"/>
+              </a:lnSpc>
+              <a:buNone/>
+              <a:defRPr sz="1800" b="1">
+                <a:solidFill>
+                  <a:srgbClr val="A86C12"/>
+                </a:solidFill>
+              </a:defRPr>
+            </a:pPr>
+            <a:r>
+              <a:rPr sz="1800" b="1">
+                <a:solidFill>
+                  <a:srgbClr val="A86C12"/>
+                </a:solidFill>
+                <a:latin typeface="Microsoft YaHei"/>
+                <a:ea typeface="Microsoft YaHei"/>
+                <a:cs typeface="Microsoft YaHei"/>
+              </a:rPr>
+              <a:t>09:04｜拒绝并记录</a:t>
+            </a:r>
+          </a:p>
+          <a:p xmlns:a="http://schemas.openxmlformats.org/drawingml/2006/main">
+            <a:pPr algn="ctr">
+              <a:lnSpc>
+                <a:spcPct val="128000"/>
+              </a:lnSpc>
+              <a:buNone/>
+              <a:defRPr sz="1800" b="1">
+                <a:solidFill>
+                  <a:srgbClr val="A86C12"/>
+                </a:solidFill>
+              </a:defRPr>
+            </a:pPr>
+            <a:r>
+              <a:rPr sz="1800" b="1">
+                <a:solidFill>
+                  <a:srgbClr val="A86C12"/>
+                </a:solidFill>
+                <a:latin typeface="Microsoft YaHei"/>
+                <a:ea typeface="Microsoft YaHei"/>
+                <a:cs typeface="Microsoft YaHei"/>
+              </a:rPr>
+              <a:t>权限不足；保留事件</a:t>
+            </a:r>
+          </a:p>
+        </p:txBody>
+      </p:sp>
+      <p:sp>
+        <p:nvSpPr>
+          <p:cNvPr id="10" name="p16-a1">
+            <a:extLst xmlns:a="http://schemas.openxmlformats.org/drawingml/2006/main">
+              <a:ext uri="{FF2B5EF4-FFF2-40B4-BE49-F238E27FC236}">
+                <a16:creationId xmlns:a16="http://schemas.microsoft.com/office/drawing/2014/main" id="{D39B2A54-AE23-4192-A7B4-1AE130C6C692}"/>
+              </a:ext>
+            </a:extLst>
+          </p:cNvPr>
+          <p:cNvSpPr>
+            <a:spLocks xmlns:a="http://schemas.openxmlformats.org/drawingml/2006/main" noGrp="1"/>
+          </p:cNvSpPr>
+          <p:nvPr/>
+        </p:nvSpPr>
+        <p:spPr>
+          <a:xfrm xmlns:a="http://schemas.openxmlformats.org/drawingml/2006/main">
+            <a:off x="7753350" y="2019300"/>
+            <a:ext cx="495300" cy="685800"/>
           </a:xfrm>
           <a:prstGeom xmlns:a="http://schemas.openxmlformats.org/drawingml/2006/main" prst="rect">
             <a:avLst/>
           </a:prstGeom>
-          <a:solidFill xmlns:a="http://schemas.openxmlformats.org/drawingml/2006/main">
-            <a:srgbClr val="E7F2ED"/>
-          </a:solidFill>
-          <a:ln xmlns:a="http://schemas.openxmlformats.org/drawingml/2006/main" w="0">
-            <a:noFill/>
-            <a:prstDash val="solid"/>
-          </a:ln>
-        </p:spPr>
-        <p:txBody>
-          <a:bodyPr xmlns:a="http://schemas.openxmlformats.org/drawingml/2006/main" lIns="76200" tIns="38100" rIns="76200" bIns="38100" anchor="ctr"/>
-          <a:lstStyle xmlns:a="http://schemas.openxmlformats.org/drawingml/2006/main"/>
-          <a:p xmlns:a="http://schemas.openxmlformats.org/drawingml/2006/main">
-            <a:pPr algn="ctr">
-              <a:defRPr sz="1425" b="1">
-                <a:solidFill>
-                  <a:srgbClr val="28745A"/>
-                </a:solidFill>
-              </a:defRPr>
-            </a:pPr>
-            <a:r>
-              <a:rPr sz="1425" b="1">
-                <a:solidFill>
-                  <a:srgbClr val="28745A"/>
-                </a:solidFill>
-                <a:latin typeface="Microsoft YaHei"/>
-                <a:ea typeface="Microsoft YaHei"/>
-                <a:cs typeface="Microsoft YaHei"/>
-              </a:rPr>
-              <a:t>读取 8 篇</a:t>
-            </a:r>
-          </a:p>
-        </p:txBody>
-      </p:sp>
-      <p:sp>
-        <p:nvSpPr>
-          <p:cNvPr id="10" name="p16-dot1">
-            <a:extLst xmlns:a="http://schemas.openxmlformats.org/drawingml/2006/main">
-              <a:ext uri="{FF2B5EF4-FFF2-40B4-BE49-F238E27FC236}">
-                <a16:creationId xmlns:a16="http://schemas.microsoft.com/office/drawing/2014/main" id="{337B9718-D20A-46BD-BF53-A2E63BFD6109}"/>
-              </a:ext>
-            </a:extLst>
-          </p:cNvPr>
-          <p:cNvSpPr>
-            <a:spLocks xmlns:a="http://schemas.openxmlformats.org/drawingml/2006/main" noGrp="1"/>
-          </p:cNvSpPr>
-          <p:nvPr/>
-        </p:nvSpPr>
-        <p:spPr>
-          <a:xfrm xmlns:a="http://schemas.openxmlformats.org/drawingml/2006/main">
-            <a:off x="2838450" y="2514600"/>
-            <a:ext cx="1066800" cy="495300"/>
+          <a:noFill xmlns:a="http://schemas.openxmlformats.org/drawingml/2006/main"/>
+          <a:ln xmlns:a="http://schemas.openxmlformats.org/drawingml/2006/main" w="0">
+            <a:noFill/>
+            <a:prstDash val="solid"/>
+          </a:ln>
+        </p:spPr>
+        <p:txBody>
+          <a:bodyPr xmlns:a="http://schemas.openxmlformats.org/drawingml/2006/main" lIns="76200" tIns="38100" rIns="76200" bIns="38100" anchor="ctr"/>
+          <a:lstStyle xmlns:a="http://schemas.openxmlformats.org/drawingml/2006/main"/>
+          <a:p xmlns:a="http://schemas.openxmlformats.org/drawingml/2006/main">
+            <a:pPr algn="ctr">
+              <a:defRPr sz="2700" b="1">
+                <a:solidFill>
+                  <a:srgbClr val="C8161E"/>
+                </a:solidFill>
+              </a:defRPr>
+            </a:pPr>
+            <a:r>
+              <a:rPr sz="2700" b="1">
+                <a:solidFill>
+                  <a:srgbClr val="C8161E"/>
+                </a:solidFill>
+                <a:latin typeface="Microsoft YaHei"/>
+                <a:ea typeface="Microsoft YaHei"/>
+                <a:cs typeface="Microsoft YaHei"/>
+              </a:rPr>
+              <a:t>→</a:t>
+            </a:r>
+          </a:p>
+        </p:txBody>
+      </p:sp>
+      <p:sp>
+        <p:nvSpPr>
+          <p:cNvPr id="11" name="p16-e2">
+            <a:extLst xmlns:a="http://schemas.openxmlformats.org/drawingml/2006/main">
+              <a:ext uri="{FF2B5EF4-FFF2-40B4-BE49-F238E27FC236}">
+                <a16:creationId xmlns:a16="http://schemas.microsoft.com/office/drawing/2014/main" id="{AF5142B3-D3E9-465F-B98E-BFD2B14EE53D}"/>
+              </a:ext>
+            </a:extLst>
+          </p:cNvPr>
+          <p:cNvSpPr>
+            <a:spLocks xmlns:a="http://schemas.openxmlformats.org/drawingml/2006/main" noGrp="1"/>
+          </p:cNvSpPr>
+          <p:nvPr/>
+        </p:nvSpPr>
+        <p:spPr>
+          <a:xfrm xmlns:a="http://schemas.openxmlformats.org/drawingml/2006/main">
+            <a:off x="8324850" y="1657350"/>
+            <a:ext cx="3200400" cy="1428750"/>
           </a:xfrm>
           <a:prstGeom xmlns:a="http://schemas.openxmlformats.org/drawingml/2006/main" prst="roundRect">
             <a:avLst>
-              <a:gd name="adj" fmla="val 15385"/>
+              <a:gd name="adj" fmla="val 5333"/>
             </a:avLst>
           </a:prstGeom>
           <a:solidFill xmlns:a="http://schemas.openxmlformats.org/drawingml/2006/main">
-            <a:srgbClr val="C8161E"/>
-          </a:solidFill>
-          <a:ln xmlns:a="http://schemas.openxmlformats.org/drawingml/2006/main" w="0">
-            <a:noFill/>
-            <a:prstDash val="solid"/>
-          </a:ln>
-        </p:spPr>
-        <p:txBody>
-          <a:bodyPr xmlns:a="http://schemas.openxmlformats.org/drawingml/2006/main" lIns="76200" tIns="38100" rIns="76200" bIns="38100" anchor="ctr"/>
-          <a:lstStyle xmlns:a="http://schemas.openxmlformats.org/drawingml/2006/main"/>
-          <a:p xmlns:a="http://schemas.openxmlformats.org/drawingml/2006/main">
-            <a:pPr algn="ctr">
-              <a:defRPr sz="1200" b="1">
-                <a:solidFill>
-                  <a:srgbClr val="FFFFFF"/>
-                </a:solidFill>
-              </a:defRPr>
-            </a:pPr>
-            <a:r>
-              <a:rPr sz="1200" b="1">
-                <a:solidFill>
-                  <a:srgbClr val="FFFFFF"/>
-                </a:solidFill>
-                <a:latin typeface="Microsoft YaHei"/>
-                <a:ea typeface="Microsoft YaHei"/>
-                <a:cs typeface="Microsoft YaHei"/>
-              </a:rPr>
-              <a:t>越权</a:t>
-            </a:r>
-          </a:p>
-        </p:txBody>
-      </p:sp>
-      <p:sp>
-        <p:nvSpPr>
-          <p:cNvPr id="11" name="p16-time1">
-            <a:extLst xmlns:a="http://schemas.openxmlformats.org/drawingml/2006/main">
-              <a:ext uri="{FF2B5EF4-FFF2-40B4-BE49-F238E27FC236}">
-                <a16:creationId xmlns:a16="http://schemas.microsoft.com/office/drawing/2014/main" id="{E170A4A7-90DF-4337-B71F-6EA5D52DF280}"/>
-              </a:ext>
-            </a:extLst>
-          </p:cNvPr>
-          <p:cNvSpPr>
-            <a:spLocks xmlns:a="http://schemas.openxmlformats.org/drawingml/2006/main" noGrp="1"/>
-          </p:cNvSpPr>
-          <p:nvPr/>
-        </p:nvSpPr>
-        <p:spPr>
-          <a:xfrm xmlns:a="http://schemas.openxmlformats.org/drawingml/2006/main">
-            <a:off x="2838450" y="1885950"/>
-            <a:ext cx="1066800" cy="361950"/>
-          </a:xfrm>
-          <a:prstGeom xmlns:a="http://schemas.openxmlformats.org/drawingml/2006/main" prst="rect">
-            <a:avLst/>
-          </a:prstGeom>
-          <a:noFill xmlns:a="http://schemas.openxmlformats.org/drawingml/2006/main"/>
-          <a:ln xmlns:a="http://schemas.openxmlformats.org/drawingml/2006/main" w="0">
-            <a:noFill/>
-            <a:prstDash val="solid"/>
-          </a:ln>
-        </p:spPr>
-        <p:txBody>
-          <a:bodyPr xmlns:a="http://schemas.openxmlformats.org/drawingml/2006/main" lIns="76200" tIns="38100" rIns="76200" bIns="38100" anchor="ctr"/>
-          <a:lstStyle xmlns:a="http://schemas.openxmlformats.org/drawingml/2006/main"/>
-          <a:p xmlns:a="http://schemas.openxmlformats.org/drawingml/2006/main">
-            <a:pPr algn="ctr">
-              <a:defRPr sz="1350" b="1">
-                <a:solidFill>
-                  <a:srgbClr val="667684"/>
-                </a:solidFill>
-              </a:defRPr>
-            </a:pPr>
-            <a:r>
-              <a:rPr sz="1350" b="1">
-                <a:solidFill>
-                  <a:srgbClr val="667684"/>
-                </a:solidFill>
-                <a:latin typeface="Consolas"/>
-                <a:ea typeface="Consolas"/>
-                <a:cs typeface="Consolas"/>
-              </a:rPr>
-              <a:t>09:03</a:t>
-            </a:r>
-          </a:p>
-        </p:txBody>
-      </p:sp>
-      <p:sp>
-        <p:nvSpPr>
-          <p:cNvPr id="12" name="p16-t1">
-            <a:extLst xmlns:a="http://schemas.openxmlformats.org/drawingml/2006/main">
-              <a:ext uri="{FF2B5EF4-FFF2-40B4-BE49-F238E27FC236}">
-                <a16:creationId xmlns:a16="http://schemas.microsoft.com/office/drawing/2014/main" id="{55813DA1-C309-45AB-BB96-78D7FA19801F}"/>
-              </a:ext>
-            </a:extLst>
-          </p:cNvPr>
-          <p:cNvSpPr>
-            <a:spLocks xmlns:a="http://schemas.openxmlformats.org/drawingml/2006/main" noGrp="1"/>
-          </p:cNvSpPr>
-          <p:nvPr/>
-        </p:nvSpPr>
-        <p:spPr>
-          <a:xfrm xmlns:a="http://schemas.openxmlformats.org/drawingml/2006/main">
-            <a:off x="2533650" y="3238500"/>
-            <a:ext cx="1676400" cy="819150"/>
-          </a:xfrm>
-          <a:prstGeom xmlns:a="http://schemas.openxmlformats.org/drawingml/2006/main" prst="rect">
-            <a:avLst/>
-          </a:prstGeom>
-          <a:solidFill xmlns:a="http://schemas.openxmlformats.org/drawingml/2006/main">
-            <a:srgbClr val="F8E9EA"/>
-          </a:solidFill>
-          <a:ln xmlns:a="http://schemas.openxmlformats.org/drawingml/2006/main" w="0">
-            <a:noFill/>
-            <a:prstDash val="solid"/>
-          </a:ln>
-        </p:spPr>
-        <p:txBody>
-          <a:bodyPr xmlns:a="http://schemas.openxmlformats.org/drawingml/2006/main" lIns="76200" tIns="38100" rIns="76200" bIns="38100" anchor="ctr"/>
-          <a:lstStyle xmlns:a="http://schemas.openxmlformats.org/drawingml/2006/main"/>
-          <a:p xmlns:a="http://schemas.openxmlformats.org/drawingml/2006/main">
-            <a:pPr algn="ctr">
-              <a:defRPr sz="1425" b="1">
-                <a:solidFill>
-                  <a:srgbClr val="C8161E"/>
-                </a:solidFill>
-              </a:defRPr>
-            </a:pPr>
-            <a:r>
-              <a:rPr sz="1425" b="1">
-                <a:solidFill>
-                  <a:srgbClr val="C8161E"/>
-                </a:solidFill>
-                <a:latin typeface="Microsoft YaHei"/>
-                <a:ea typeface="Microsoft YaHei"/>
-                <a:cs typeface="Microsoft YaHei"/>
-              </a:rPr>
-              <a:t>尝试联网补文献</a:t>
-            </a:r>
-          </a:p>
-        </p:txBody>
-      </p:sp>
-      <p:sp>
-        <p:nvSpPr>
-          <p:cNvPr id="13" name="p16-dot2">
-            <a:extLst xmlns:a="http://schemas.openxmlformats.org/drawingml/2006/main">
-              <a:ext uri="{FF2B5EF4-FFF2-40B4-BE49-F238E27FC236}">
-                <a16:creationId xmlns:a16="http://schemas.microsoft.com/office/drawing/2014/main" id="{83ECC269-43B5-4B28-89FF-0EF842092B8E}"/>
-              </a:ext>
-            </a:extLst>
-          </p:cNvPr>
-          <p:cNvSpPr>
-            <a:spLocks xmlns:a="http://schemas.openxmlformats.org/drawingml/2006/main" noGrp="1"/>
-          </p:cNvSpPr>
-          <p:nvPr/>
-        </p:nvSpPr>
-        <p:spPr>
-          <a:xfrm xmlns:a="http://schemas.openxmlformats.org/drawingml/2006/main">
-            <a:off x="5162550" y="2514600"/>
-            <a:ext cx="1066800" cy="495300"/>
+            <a:srgbClr val="E7F2ED"/>
+          </a:solidFill>
+          <a:ln xmlns:a="http://schemas.openxmlformats.org/drawingml/2006/main" w="19050">
+            <a:solidFill>
+              <a:srgbClr val="28745A"/>
+            </a:solidFill>
+            <a:prstDash val="solid"/>
+          </a:ln>
+        </p:spPr>
+        <p:txBody>
+          <a:bodyPr xmlns:a="http://schemas.openxmlformats.org/drawingml/2006/main" lIns="76200" tIns="38100" rIns="76200" bIns="38100" anchor="ctr"/>
+          <a:lstStyle xmlns:a="http://schemas.openxmlformats.org/drawingml/2006/main"/>
+          <a:p xmlns:a="http://schemas.openxmlformats.org/drawingml/2006/main">
+            <a:pPr algn="ctr">
+              <a:lnSpc>
+                <a:spcPct val="128000"/>
+              </a:lnSpc>
+              <a:buNone/>
+              <a:defRPr sz="1800" b="1">
+                <a:solidFill>
+                  <a:srgbClr val="28745A"/>
+                </a:solidFill>
+              </a:defRPr>
+            </a:pPr>
+            <a:r>
+              <a:rPr sz="1800" b="1">
+                <a:solidFill>
+                  <a:srgbClr val="28745A"/>
+                </a:solidFill>
+                <a:latin typeface="Microsoft YaHei"/>
+                <a:ea typeface="Microsoft YaHei"/>
+                <a:cs typeface="Microsoft YaHei"/>
+              </a:rPr>
+              <a:t>09:06｜人工恢复</a:t>
+            </a:r>
+          </a:p>
+          <a:p xmlns:a="http://schemas.openxmlformats.org/drawingml/2006/main">
+            <a:pPr algn="ctr">
+              <a:lnSpc>
+                <a:spcPct val="128000"/>
+              </a:lnSpc>
+              <a:buNone/>
+              <a:defRPr sz="1800" b="1">
+                <a:solidFill>
+                  <a:srgbClr val="28745A"/>
+                </a:solidFill>
+              </a:defRPr>
+            </a:pPr>
+            <a:r>
+              <a:rPr sz="1800" b="1">
+                <a:solidFill>
+                  <a:srgbClr val="28745A"/>
+                </a:solidFill>
+                <a:latin typeface="Microsoft YaHei"/>
+                <a:ea typeface="Microsoft YaHei"/>
+                <a:cs typeface="Microsoft YaHei"/>
+              </a:rPr>
+              <a:t>收窄到允许清单</a:t>
+            </a:r>
+          </a:p>
+        </p:txBody>
+      </p:sp>
+      <p:sp>
+        <p:nvSpPr>
+          <p:cNvPr id="12" name="p16-log">
+            <a:extLst xmlns:a="http://schemas.openxmlformats.org/drawingml/2006/main">
+              <a:ext uri="{FF2B5EF4-FFF2-40B4-BE49-F238E27FC236}">
+                <a16:creationId xmlns:a16="http://schemas.microsoft.com/office/drawing/2014/main" id="{766FD648-9005-4E7D-A64A-90E74053DE9A}"/>
+              </a:ext>
+            </a:extLst>
+          </p:cNvPr>
+          <p:cNvSpPr>
+            <a:spLocks xmlns:a="http://schemas.openxmlformats.org/drawingml/2006/main" noGrp="1"/>
+          </p:cNvSpPr>
+          <p:nvPr/>
+        </p:nvSpPr>
+        <p:spPr>
+          <a:xfrm xmlns:a="http://schemas.openxmlformats.org/drawingml/2006/main">
+            <a:off x="1143000" y="3638550"/>
+            <a:ext cx="9906000" cy="1314450"/>
           </a:xfrm>
           <a:prstGeom xmlns:a="http://schemas.openxmlformats.org/drawingml/2006/main" prst="roundRect">
             <a:avLst>
-              <a:gd name="adj" fmla="val 15385"/>
+              <a:gd name="adj" fmla="val 5797"/>
             </a:avLst>
-          </a:prstGeom>
-          <a:solidFill xmlns:a="http://schemas.openxmlformats.org/drawingml/2006/main">
-            <a:srgbClr val="A86C12"/>
-          </a:solidFill>
-          <a:ln xmlns:a="http://schemas.openxmlformats.org/drawingml/2006/main" w="0">
-            <a:noFill/>
-            <a:prstDash val="solid"/>
-          </a:ln>
-        </p:spPr>
-        <p:txBody>
-          <a:bodyPr xmlns:a="http://schemas.openxmlformats.org/drawingml/2006/main" lIns="76200" tIns="38100" rIns="76200" bIns="38100" anchor="ctr"/>
-          <a:lstStyle xmlns:a="http://schemas.openxmlformats.org/drawingml/2006/main"/>
-          <a:p xmlns:a="http://schemas.openxmlformats.org/drawingml/2006/main">
-            <a:pPr algn="ctr">
-              <a:defRPr sz="1200" b="1">
-                <a:solidFill>
-                  <a:srgbClr val="FFFFFF"/>
-                </a:solidFill>
-              </a:defRPr>
-            </a:pPr>
-            <a:r>
-              <a:rPr sz="1200" b="1">
-                <a:solidFill>
-                  <a:srgbClr val="FFFFFF"/>
-                </a:solidFill>
-                <a:latin typeface="Microsoft YaHei"/>
-                <a:ea typeface="Microsoft YaHei"/>
-                <a:cs typeface="Microsoft YaHei"/>
-              </a:rPr>
-              <a:t>stop</a:t>
-            </a:r>
-          </a:p>
-        </p:txBody>
-      </p:sp>
-      <p:sp>
-        <p:nvSpPr>
-          <p:cNvPr id="14" name="p16-time2">
-            <a:extLst xmlns:a="http://schemas.openxmlformats.org/drawingml/2006/main">
-              <a:ext uri="{FF2B5EF4-FFF2-40B4-BE49-F238E27FC236}">
-                <a16:creationId xmlns:a16="http://schemas.microsoft.com/office/drawing/2014/main" id="{43109AF1-F020-458C-827B-1ED749B8B99D}"/>
-              </a:ext>
-            </a:extLst>
-          </p:cNvPr>
-          <p:cNvSpPr>
-            <a:spLocks xmlns:a="http://schemas.openxmlformats.org/drawingml/2006/main" noGrp="1"/>
-          </p:cNvSpPr>
-          <p:nvPr/>
-        </p:nvSpPr>
-        <p:spPr>
-          <a:xfrm xmlns:a="http://schemas.openxmlformats.org/drawingml/2006/main">
-            <a:off x="5162550" y="1885950"/>
-            <a:ext cx="1066800" cy="361950"/>
-          </a:xfrm>
-          <a:prstGeom xmlns:a="http://schemas.openxmlformats.org/drawingml/2006/main" prst="rect">
-            <a:avLst/>
-          </a:prstGeom>
-          <a:noFill xmlns:a="http://schemas.openxmlformats.org/drawingml/2006/main"/>
-          <a:ln xmlns:a="http://schemas.openxmlformats.org/drawingml/2006/main" w="0">
-            <a:noFill/>
-            <a:prstDash val="solid"/>
-          </a:ln>
-        </p:spPr>
-        <p:txBody>
-          <a:bodyPr xmlns:a="http://schemas.openxmlformats.org/drawingml/2006/main" lIns="76200" tIns="38100" rIns="76200" bIns="38100" anchor="ctr"/>
-          <a:lstStyle xmlns:a="http://schemas.openxmlformats.org/drawingml/2006/main"/>
-          <a:p xmlns:a="http://schemas.openxmlformats.org/drawingml/2006/main">
-            <a:pPr algn="ctr">
-              <a:defRPr sz="1350" b="1">
-                <a:solidFill>
-                  <a:srgbClr val="667684"/>
-                </a:solidFill>
-              </a:defRPr>
-            </a:pPr>
-            <a:r>
-              <a:rPr sz="1350" b="1">
-                <a:solidFill>
-                  <a:srgbClr val="667684"/>
-                </a:solidFill>
-                <a:latin typeface="Consolas"/>
-                <a:ea typeface="Consolas"/>
-                <a:cs typeface="Consolas"/>
-              </a:rPr>
-              <a:t>09:04</a:t>
-            </a:r>
-          </a:p>
-        </p:txBody>
-      </p:sp>
-      <p:sp>
-        <p:nvSpPr>
-          <p:cNvPr id="15" name="p16-t2">
-            <a:extLst xmlns:a="http://schemas.openxmlformats.org/drawingml/2006/main">
-              <a:ext uri="{FF2B5EF4-FFF2-40B4-BE49-F238E27FC236}">
-                <a16:creationId xmlns:a16="http://schemas.microsoft.com/office/drawing/2014/main" id="{0EE7FD51-6537-4785-A0E8-4873F163F3A0}"/>
-              </a:ext>
-            </a:extLst>
-          </p:cNvPr>
-          <p:cNvSpPr>
-            <a:spLocks xmlns:a="http://schemas.openxmlformats.org/drawingml/2006/main" noGrp="1"/>
-          </p:cNvSpPr>
-          <p:nvPr/>
-        </p:nvSpPr>
-        <p:spPr>
-          <a:xfrm xmlns:a="http://schemas.openxmlformats.org/drawingml/2006/main">
-            <a:off x="4857750" y="3238500"/>
-            <a:ext cx="1676400" cy="819150"/>
-          </a:xfrm>
-          <a:prstGeom xmlns:a="http://schemas.openxmlformats.org/drawingml/2006/main" prst="rect">
-            <a:avLst/>
-          </a:prstGeom>
-          <a:solidFill xmlns:a="http://schemas.openxmlformats.org/drawingml/2006/main">
-            <a:srgbClr val="F3F6F7"/>
-          </a:solidFill>
-          <a:ln xmlns:a="http://schemas.openxmlformats.org/drawingml/2006/main" w="0">
-            <a:noFill/>
-            <a:prstDash val="solid"/>
-          </a:ln>
-        </p:spPr>
-        <p:txBody>
-          <a:bodyPr xmlns:a="http://schemas.openxmlformats.org/drawingml/2006/main" lIns="76200" tIns="38100" rIns="76200" bIns="38100" anchor="ctr"/>
-          <a:lstStyle xmlns:a="http://schemas.openxmlformats.org/drawingml/2006/main"/>
-          <a:p xmlns:a="http://schemas.openxmlformats.org/drawingml/2006/main">
-            <a:pPr algn="ctr">
-              <a:defRPr sz="1425" b="1">
-                <a:solidFill>
-                  <a:srgbClr val="A86C12"/>
-                </a:solidFill>
-              </a:defRPr>
-            </a:pPr>
-            <a:r>
-              <a:rPr sz="1425" b="1">
-                <a:solidFill>
-                  <a:srgbClr val="A86C12"/>
-                </a:solidFill>
-                <a:latin typeface="Microsoft YaHei"/>
-                <a:ea typeface="Microsoft YaHei"/>
-                <a:cs typeface="Microsoft YaHei"/>
-              </a:rPr>
-              <a:t>拒绝动作并记录</a:t>
-            </a:r>
-          </a:p>
-        </p:txBody>
-      </p:sp>
-      <p:sp>
-        <p:nvSpPr>
-          <p:cNvPr id="16" name="p16-dot3">
-            <a:extLst xmlns:a="http://schemas.openxmlformats.org/drawingml/2006/main">
-              <a:ext uri="{FF2B5EF4-FFF2-40B4-BE49-F238E27FC236}">
-                <a16:creationId xmlns:a16="http://schemas.microsoft.com/office/drawing/2014/main" id="{B8248143-1862-4B16-BEB2-26BE5697B5E9}"/>
-              </a:ext>
-            </a:extLst>
-          </p:cNvPr>
-          <p:cNvSpPr>
-            <a:spLocks xmlns:a="http://schemas.openxmlformats.org/drawingml/2006/main" noGrp="1"/>
-          </p:cNvSpPr>
-          <p:nvPr/>
-        </p:nvSpPr>
-        <p:spPr>
-          <a:xfrm xmlns:a="http://schemas.openxmlformats.org/drawingml/2006/main">
-            <a:off x="7486650" y="2514600"/>
-            <a:ext cx="1066800" cy="495300"/>
-          </a:xfrm>
-          <a:prstGeom xmlns:a="http://schemas.openxmlformats.org/drawingml/2006/main" prst="roundRect">
-            <a:avLst>
-              <a:gd name="adj" fmla="val 15385"/>
-            </a:avLst>
-          </a:prstGeom>
-          <a:solidFill xmlns:a="http://schemas.openxmlformats.org/drawingml/2006/main">
-            <a:srgbClr val="2F638A"/>
-          </a:solidFill>
-          <a:ln xmlns:a="http://schemas.openxmlformats.org/drawingml/2006/main" w="0">
-            <a:noFill/>
-            <a:prstDash val="solid"/>
-          </a:ln>
-        </p:spPr>
-        <p:txBody>
-          <a:bodyPr xmlns:a="http://schemas.openxmlformats.org/drawingml/2006/main" lIns="76200" tIns="38100" rIns="76200" bIns="38100" anchor="ctr"/>
-          <a:lstStyle xmlns:a="http://schemas.openxmlformats.org/drawingml/2006/main"/>
-          <a:p xmlns:a="http://schemas.openxmlformats.org/drawingml/2006/main">
-            <a:pPr algn="ctr">
-              <a:defRPr sz="1200" b="1">
-                <a:solidFill>
-                  <a:srgbClr val="FFFFFF"/>
-                </a:solidFill>
-              </a:defRPr>
-            </a:pPr>
-            <a:r>
-              <a:rPr sz="1200" b="1">
-                <a:solidFill>
-                  <a:srgbClr val="FFFFFF"/>
-                </a:solidFill>
-                <a:latin typeface="Microsoft YaHei"/>
-                <a:ea typeface="Microsoft YaHei"/>
-                <a:cs typeface="Microsoft YaHei"/>
-              </a:rPr>
-              <a:t>review</a:t>
-            </a:r>
-          </a:p>
-        </p:txBody>
-      </p:sp>
-      <p:sp>
-        <p:nvSpPr>
-          <p:cNvPr id="17" name="p16-time3">
-            <a:extLst xmlns:a="http://schemas.openxmlformats.org/drawingml/2006/main">
-              <a:ext uri="{FF2B5EF4-FFF2-40B4-BE49-F238E27FC236}">
-                <a16:creationId xmlns:a16="http://schemas.microsoft.com/office/drawing/2014/main" id="{7EE16CA2-3ED1-4231-A994-3D942F19E1C6}"/>
-              </a:ext>
-            </a:extLst>
-          </p:cNvPr>
-          <p:cNvSpPr>
-            <a:spLocks xmlns:a="http://schemas.openxmlformats.org/drawingml/2006/main" noGrp="1"/>
-          </p:cNvSpPr>
-          <p:nvPr/>
-        </p:nvSpPr>
-        <p:spPr>
-          <a:xfrm xmlns:a="http://schemas.openxmlformats.org/drawingml/2006/main">
-            <a:off x="7486650" y="1885950"/>
-            <a:ext cx="1066800" cy="361950"/>
-          </a:xfrm>
-          <a:prstGeom xmlns:a="http://schemas.openxmlformats.org/drawingml/2006/main" prst="rect">
-            <a:avLst/>
-          </a:prstGeom>
-          <a:noFill xmlns:a="http://schemas.openxmlformats.org/drawingml/2006/main"/>
-          <a:ln xmlns:a="http://schemas.openxmlformats.org/drawingml/2006/main" w="0">
-            <a:noFill/>
-            <a:prstDash val="solid"/>
-          </a:ln>
-        </p:spPr>
-        <p:txBody>
-          <a:bodyPr xmlns:a="http://schemas.openxmlformats.org/drawingml/2006/main" lIns="76200" tIns="38100" rIns="76200" bIns="38100" anchor="ctr"/>
-          <a:lstStyle xmlns:a="http://schemas.openxmlformats.org/drawingml/2006/main"/>
-          <a:p xmlns:a="http://schemas.openxmlformats.org/drawingml/2006/main">
-            <a:pPr algn="ctr">
-              <a:defRPr sz="1350" b="1">
-                <a:solidFill>
-                  <a:srgbClr val="667684"/>
-                </a:solidFill>
-              </a:defRPr>
-            </a:pPr>
-            <a:r>
-              <a:rPr sz="1350" b="1">
-                <a:solidFill>
-                  <a:srgbClr val="667684"/>
-                </a:solidFill>
-                <a:latin typeface="Consolas"/>
-                <a:ea typeface="Consolas"/>
-                <a:cs typeface="Consolas"/>
-              </a:rPr>
-              <a:t>09:06</a:t>
-            </a:r>
-          </a:p>
-        </p:txBody>
-      </p:sp>
-      <p:sp>
-        <p:nvSpPr>
-          <p:cNvPr id="18" name="p16-t3">
-            <a:extLst xmlns:a="http://schemas.openxmlformats.org/drawingml/2006/main">
-              <a:ext uri="{FF2B5EF4-FFF2-40B4-BE49-F238E27FC236}">
-                <a16:creationId xmlns:a16="http://schemas.microsoft.com/office/drawing/2014/main" id="{44862C6C-AC49-4688-8E4B-BB3AB9A133A3}"/>
-              </a:ext>
-            </a:extLst>
-          </p:cNvPr>
-          <p:cNvSpPr>
-            <a:spLocks xmlns:a="http://schemas.openxmlformats.org/drawingml/2006/main" noGrp="1"/>
-          </p:cNvSpPr>
-          <p:nvPr/>
-        </p:nvSpPr>
-        <p:spPr>
-          <a:xfrm xmlns:a="http://schemas.openxmlformats.org/drawingml/2006/main">
-            <a:off x="7181850" y="3238500"/>
-            <a:ext cx="1676400" cy="819150"/>
-          </a:xfrm>
-          <a:prstGeom xmlns:a="http://schemas.openxmlformats.org/drawingml/2006/main" prst="rect">
-            <a:avLst/>
-          </a:prstGeom>
-          <a:solidFill xmlns:a="http://schemas.openxmlformats.org/drawingml/2006/main">
-            <a:srgbClr val="F3F6F7"/>
-          </a:solidFill>
-          <a:ln xmlns:a="http://schemas.openxmlformats.org/drawingml/2006/main" w="0">
-            <a:noFill/>
-            <a:prstDash val="solid"/>
-          </a:ln>
-        </p:spPr>
-        <p:txBody>
-          <a:bodyPr xmlns:a="http://schemas.openxmlformats.org/drawingml/2006/main" lIns="76200" tIns="38100" rIns="76200" bIns="38100" anchor="ctr"/>
-          <a:lstStyle xmlns:a="http://schemas.openxmlformats.org/drawingml/2006/main"/>
-          <a:p xmlns:a="http://schemas.openxmlformats.org/drawingml/2006/main">
-            <a:pPr algn="ctr">
-              <a:defRPr sz="1425" b="1">
-                <a:solidFill>
-                  <a:srgbClr val="2F638A"/>
-                </a:solidFill>
-              </a:defRPr>
-            </a:pPr>
-            <a:r>
-              <a:rPr sz="1425" b="1">
-                <a:solidFill>
-                  <a:srgbClr val="2F638A"/>
-                </a:solidFill>
-                <a:latin typeface="Microsoft YaHei"/>
-                <a:ea typeface="Microsoft YaHei"/>
-                <a:cs typeface="Microsoft YaHei"/>
-              </a:rPr>
-              <a:t>人工收窄到清单</a:t>
-            </a:r>
-          </a:p>
-        </p:txBody>
-      </p:sp>
-      <p:sp>
-        <p:nvSpPr>
-          <p:cNvPr id="19" name="p16-dot4">
-            <a:extLst xmlns:a="http://schemas.openxmlformats.org/drawingml/2006/main">
-              <a:ext uri="{FF2B5EF4-FFF2-40B4-BE49-F238E27FC236}">
-                <a16:creationId xmlns:a16="http://schemas.microsoft.com/office/drawing/2014/main" id="{EFC282F1-40EC-4CD9-BD5F-0167EB3552EB}"/>
-              </a:ext>
-            </a:extLst>
-          </p:cNvPr>
-          <p:cNvSpPr>
-            <a:spLocks xmlns:a="http://schemas.openxmlformats.org/drawingml/2006/main" noGrp="1"/>
-          </p:cNvSpPr>
-          <p:nvPr/>
-        </p:nvSpPr>
-        <p:spPr>
-          <a:xfrm xmlns:a="http://schemas.openxmlformats.org/drawingml/2006/main">
-            <a:off x="9810750" y="2514600"/>
-            <a:ext cx="1066800" cy="495300"/>
-          </a:xfrm>
-          <a:prstGeom xmlns:a="http://schemas.openxmlformats.org/drawingml/2006/main" prst="roundRect">
-            <a:avLst>
-              <a:gd name="adj" fmla="val 15385"/>
-            </a:avLst>
-          </a:prstGeom>
-          <a:solidFill xmlns:a="http://schemas.openxmlformats.org/drawingml/2006/main">
-            <a:srgbClr val="28745A"/>
-          </a:solidFill>
-          <a:ln xmlns:a="http://schemas.openxmlformats.org/drawingml/2006/main" w="0">
-            <a:noFill/>
-            <a:prstDash val="solid"/>
-          </a:ln>
-        </p:spPr>
-        <p:txBody>
-          <a:bodyPr xmlns:a="http://schemas.openxmlformats.org/drawingml/2006/main" lIns="76200" tIns="38100" rIns="76200" bIns="38100" anchor="ctr"/>
-          <a:lstStyle xmlns:a="http://schemas.openxmlformats.org/drawingml/2006/main"/>
-          <a:p xmlns:a="http://schemas.openxmlformats.org/drawingml/2006/main">
-            <a:pPr algn="ctr">
-              <a:defRPr sz="1200" b="1">
-                <a:solidFill>
-                  <a:srgbClr val="FFFFFF"/>
-                </a:solidFill>
-              </a:defRPr>
-            </a:pPr>
-            <a:r>
-              <a:rPr sz="1200" b="1">
-                <a:solidFill>
-                  <a:srgbClr val="FFFFFF"/>
-                </a:solidFill>
-                <a:latin typeface="Microsoft YaHei"/>
-                <a:ea typeface="Microsoft YaHei"/>
-                <a:cs typeface="Microsoft YaHei"/>
-              </a:rPr>
-              <a:t>ok</a:t>
-            </a:r>
-          </a:p>
-        </p:txBody>
-      </p:sp>
-      <p:sp>
-        <p:nvSpPr>
-          <p:cNvPr id="20" name="p16-time4">
-            <a:extLst xmlns:a="http://schemas.openxmlformats.org/drawingml/2006/main">
-              <a:ext uri="{FF2B5EF4-FFF2-40B4-BE49-F238E27FC236}">
-                <a16:creationId xmlns:a16="http://schemas.microsoft.com/office/drawing/2014/main" id="{4BEA7E31-A82F-493A-AF74-C376E4541D25}"/>
-              </a:ext>
-            </a:extLst>
-          </p:cNvPr>
-          <p:cNvSpPr>
-            <a:spLocks xmlns:a="http://schemas.openxmlformats.org/drawingml/2006/main" noGrp="1"/>
-          </p:cNvSpPr>
-          <p:nvPr/>
-        </p:nvSpPr>
-        <p:spPr>
-          <a:xfrm xmlns:a="http://schemas.openxmlformats.org/drawingml/2006/main">
-            <a:off x="9810750" y="1885950"/>
-            <a:ext cx="1066800" cy="361950"/>
-          </a:xfrm>
-          <a:prstGeom xmlns:a="http://schemas.openxmlformats.org/drawingml/2006/main" prst="rect">
-            <a:avLst/>
-          </a:prstGeom>
-          <a:noFill xmlns:a="http://schemas.openxmlformats.org/drawingml/2006/main"/>
-          <a:ln xmlns:a="http://schemas.openxmlformats.org/drawingml/2006/main" w="0">
-            <a:noFill/>
-            <a:prstDash val="solid"/>
-          </a:ln>
-        </p:spPr>
-        <p:txBody>
-          <a:bodyPr xmlns:a="http://schemas.openxmlformats.org/drawingml/2006/main" lIns="76200" tIns="38100" rIns="76200" bIns="38100" anchor="ctr"/>
-          <a:lstStyle xmlns:a="http://schemas.openxmlformats.org/drawingml/2006/main"/>
-          <a:p xmlns:a="http://schemas.openxmlformats.org/drawingml/2006/main">
-            <a:pPr algn="ctr">
-              <a:defRPr sz="1350" b="1">
-                <a:solidFill>
-                  <a:srgbClr val="667684"/>
-                </a:solidFill>
-              </a:defRPr>
-            </a:pPr>
-            <a:r>
-              <a:rPr sz="1350" b="1">
-                <a:solidFill>
-                  <a:srgbClr val="667684"/>
-                </a:solidFill>
-                <a:latin typeface="Consolas"/>
-                <a:ea typeface="Consolas"/>
-                <a:cs typeface="Consolas"/>
-              </a:rPr>
-              <a:t>09:10</a:t>
-            </a:r>
-          </a:p>
-        </p:txBody>
-      </p:sp>
-      <p:sp>
-        <p:nvSpPr>
-          <p:cNvPr id="21" name="p16-t4">
-            <a:extLst xmlns:a="http://schemas.openxmlformats.org/drawingml/2006/main">
-              <a:ext uri="{FF2B5EF4-FFF2-40B4-BE49-F238E27FC236}">
-                <a16:creationId xmlns:a16="http://schemas.microsoft.com/office/drawing/2014/main" id="{520836F7-C1D7-419D-AA20-1319417BF120}"/>
-              </a:ext>
-            </a:extLst>
-          </p:cNvPr>
-          <p:cNvSpPr>
-            <a:spLocks xmlns:a="http://schemas.openxmlformats.org/drawingml/2006/main" noGrp="1"/>
-          </p:cNvSpPr>
-          <p:nvPr/>
-        </p:nvSpPr>
-        <p:spPr>
-          <a:xfrm xmlns:a="http://schemas.openxmlformats.org/drawingml/2006/main">
-            <a:off x="9505950" y="3238500"/>
-            <a:ext cx="1676400" cy="819150"/>
-          </a:xfrm>
-          <a:prstGeom xmlns:a="http://schemas.openxmlformats.org/drawingml/2006/main" prst="rect">
-            <a:avLst/>
-          </a:prstGeom>
-          <a:solidFill xmlns:a="http://schemas.openxmlformats.org/drawingml/2006/main">
-            <a:srgbClr val="E7F2ED"/>
-          </a:solidFill>
-          <a:ln xmlns:a="http://schemas.openxmlformats.org/drawingml/2006/main" w="0">
-            <a:noFill/>
-            <a:prstDash val="solid"/>
-          </a:ln>
-        </p:spPr>
-        <p:txBody>
-          <a:bodyPr xmlns:a="http://schemas.openxmlformats.org/drawingml/2006/main" lIns="76200" tIns="38100" rIns="76200" bIns="38100" anchor="ctr"/>
-          <a:lstStyle xmlns:a="http://schemas.openxmlformats.org/drawingml/2006/main"/>
-          <a:p xmlns:a="http://schemas.openxmlformats.org/drawingml/2006/main">
-            <a:pPr algn="ctr">
-              <a:defRPr sz="1425" b="1">
-                <a:solidFill>
-                  <a:srgbClr val="28745A"/>
-                </a:solidFill>
-              </a:defRPr>
-            </a:pPr>
-            <a:r>
-              <a:rPr sz="1425" b="1">
-                <a:solidFill>
-                  <a:srgbClr val="28745A"/>
-                </a:solidFill>
-                <a:latin typeface="Microsoft YaHei"/>
-                <a:ea typeface="Microsoft YaHei"/>
-                <a:cs typeface="Microsoft YaHei"/>
-              </a:rPr>
-              <a:t>恢复并输出草稿</a:t>
-            </a:r>
-          </a:p>
-        </p:txBody>
-      </p:sp>
-      <p:sp>
-        <p:nvSpPr>
-          <p:cNvPr id="22" name="p16-log">
-            <a:extLst xmlns:a="http://schemas.openxmlformats.org/drawingml/2006/main">
-              <a:ext uri="{FF2B5EF4-FFF2-40B4-BE49-F238E27FC236}">
-                <a16:creationId xmlns:a16="http://schemas.microsoft.com/office/drawing/2014/main" id="{EEDAD10E-6128-4CC5-AB06-089D36428B98}"/>
-              </a:ext>
-            </a:extLst>
-          </p:cNvPr>
-          <p:cNvSpPr>
-            <a:spLocks xmlns:a="http://schemas.openxmlformats.org/drawingml/2006/main" noGrp="1"/>
-          </p:cNvSpPr>
-          <p:nvPr/>
-        </p:nvSpPr>
-        <p:spPr>
-          <a:xfrm xmlns:a="http://schemas.openxmlformats.org/drawingml/2006/main">
-            <a:off x="1143000" y="4552950"/>
-            <a:ext cx="9906000" cy="552450"/>
-          </a:xfrm>
-          <a:prstGeom xmlns:a="http://schemas.openxmlformats.org/drawingml/2006/main" prst="rect">
-            <a:avLst/>
           </a:prstGeom>
           <a:solidFill xmlns:a="http://schemas.openxmlformats.org/drawingml/2006/main">
             <a:srgbClr val="F5F6F7"/>
@@ -10058,14 +9626,18 @@
           <a:lstStyle xmlns:a="http://schemas.openxmlformats.org/drawingml/2006/main"/>
           <a:p xmlns:a="http://schemas.openxmlformats.org/drawingml/2006/main">
             <a:pPr algn="ctr">
-              <a:defRPr sz="1350" b="1">
+              <a:lnSpc>
+                <a:spcPct val="122000"/>
+              </a:lnSpc>
+              <a:buNone/>
+              <a:defRPr sz="1800" b="1">
                 <a:solidFill>
                   <a:srgbClr val="18354E"/>
                 </a:solidFill>
               </a:defRPr>
             </a:pPr>
             <a:r>
-              <a:rPr sz="1350" b="1">
+              <a:rPr sz="1800" b="1">
                 <a:solidFill>
                   <a:srgbClr val="18354E"/>
                 </a:solidFill>
@@ -10073,7 +9645,55 @@
                 <a:ea typeface="Consolas"/>
                 <a:cs typeface="Consolas"/>
               </a:rPr>
-              <a:t>trace.jsonl：action=network_search  permission=denied  recovery=narrow_scope  reviewer=human</a:t>
+              <a:t>trace.jsonl</a:t>
+            </a:r>
+          </a:p>
+          <a:p xmlns:a="http://schemas.openxmlformats.org/drawingml/2006/main">
+            <a:pPr algn="ctr">
+              <a:lnSpc>
+                <a:spcPct val="122000"/>
+              </a:lnSpc>
+              <a:buNone/>
+              <a:defRPr sz="1800" b="1">
+                <a:solidFill>
+                  <a:srgbClr val="18354E"/>
+                </a:solidFill>
+              </a:defRPr>
+            </a:pPr>
+            <a:r>
+              <a:rPr sz="1800" b="1">
+                <a:solidFill>
+                  <a:srgbClr val="18354E"/>
+                </a:solidFill>
+                <a:latin typeface="Consolas"/>
+                <a:ea typeface="Consolas"/>
+                <a:cs typeface="Consolas"/>
+              </a:rPr>
+              <a:t>action=network_search   permission=denied</a:t>
+            </a:r>
+          </a:p>
+          <a:p xmlns:a="http://schemas.openxmlformats.org/drawingml/2006/main">
+            <a:pPr algn="ctr">
+              <a:lnSpc>
+                <a:spcPct val="122000"/>
+              </a:lnSpc>
+              <a:buNone/>
+              <a:defRPr sz="1800" b="1">
+                <a:solidFill>
+                  <a:srgbClr val="18354E"/>
+                </a:solidFill>
+              </a:defRPr>
+            </a:pPr>
+            <a:r>
+              <a:rPr sz="1800" b="1">
+                <a:solidFill>
+                  <a:srgbClr val="18354E"/>
+                </a:solidFill>
+                <a:latin typeface="Consolas"/>
+                <a:ea typeface="Consolas"/>
+                <a:cs typeface="Consolas"/>
+              </a:rPr>
+              <a:t>recovery=narrow_scope   reviewer=human</a:t>
             </a:r>
           </a:p>
         </p:txBody>
@@ -10177,7 +9797,7 @@
           <p:cNvPr id="6" name="p17-time">
             <a:extLst xmlns:a="http://schemas.openxmlformats.org/drawingml/2006/main">
               <a:ext uri="{FF2B5EF4-FFF2-40B4-BE49-F238E27FC236}">
-                <a16:creationId xmlns:a16="http://schemas.microsoft.com/office/drawing/2014/main" id="{38715B4A-AAF7-4AE8-84CB-4846E970FD56}"/>
+                <a16:creationId xmlns:a16="http://schemas.microsoft.com/office/drawing/2014/main" id="{A1CD2FEF-300B-47BC-98D1-261684D3CBA7}"/>
               </a:ext>
             </a:extLst>
           </p:cNvPr>
@@ -10234,7 +9854,7 @@
           <p:cNvPr id="7" name="p17-span">
             <a:extLst xmlns:a="http://schemas.openxmlformats.org/drawingml/2006/main">
               <a:ext uri="{FF2B5EF4-FFF2-40B4-BE49-F238E27FC236}">
-                <a16:creationId xmlns:a16="http://schemas.microsoft.com/office/drawing/2014/main" id="{036558F1-492C-4FE0-9271-CB5D45B7CB71}"/>
+                <a16:creationId xmlns:a16="http://schemas.microsoft.com/office/drawing/2014/main" id="{1E12D7FF-F528-436C-8757-042363A3B870}"/>
               </a:ext>
             </a:extLst>
           </p:cNvPr>
@@ -10287,7 +9907,7 @@
           <p:cNvPr id="8" name="p17-n0">
             <a:extLst xmlns:a="http://schemas.openxmlformats.org/drawingml/2006/main">
               <a:ext uri="{FF2B5EF4-FFF2-40B4-BE49-F238E27FC236}">
-                <a16:creationId xmlns:a16="http://schemas.microsoft.com/office/drawing/2014/main" id="{B6E971FE-926A-4C0D-B3F0-2DA863C5B852}"/>
+                <a16:creationId xmlns:a16="http://schemas.microsoft.com/office/drawing/2014/main" id="{95C19B56-2199-421A-92F6-B8840B15EC6F}"/>
               </a:ext>
             </a:extLst>
           </p:cNvPr>
@@ -10344,7 +9964,7 @@
           <p:cNvPr id="9" name="p17-t0">
             <a:extLst xmlns:a="http://schemas.openxmlformats.org/drawingml/2006/main">
               <a:ext uri="{FF2B5EF4-FFF2-40B4-BE49-F238E27FC236}">
-                <a16:creationId xmlns:a16="http://schemas.microsoft.com/office/drawing/2014/main" id="{7B9A7CBD-75A8-4F08-B659-217598685E1C}"/>
+                <a16:creationId xmlns:a16="http://schemas.microsoft.com/office/drawing/2014/main" id="{D4023F36-21DD-4149-AF45-B707CF56D09A}"/>
               </a:ext>
             </a:extLst>
           </p:cNvPr>
@@ -10399,7 +10019,7 @@
           <p:cNvPr id="10" name="p17-n1">
             <a:extLst xmlns:a="http://schemas.openxmlformats.org/drawingml/2006/main">
               <a:ext uri="{FF2B5EF4-FFF2-40B4-BE49-F238E27FC236}">
-                <a16:creationId xmlns:a16="http://schemas.microsoft.com/office/drawing/2014/main" id="{C71F6278-9F25-4E40-BD64-0CB501D43D3C}"/>
+                <a16:creationId xmlns:a16="http://schemas.microsoft.com/office/drawing/2014/main" id="{A4B6424D-6B4D-4E12-A019-B25B7F695E54}"/>
               </a:ext>
             </a:extLst>
           </p:cNvPr>
@@ -10456,7 +10076,7 @@
           <p:cNvPr id="11" name="p17-t1">
             <a:extLst xmlns:a="http://schemas.openxmlformats.org/drawingml/2006/main">
               <a:ext uri="{FF2B5EF4-FFF2-40B4-BE49-F238E27FC236}">
-                <a16:creationId xmlns:a16="http://schemas.microsoft.com/office/drawing/2014/main" id="{2BDA0DE5-DDB1-4D83-B4CE-4966589F87AF}"/>
+                <a16:creationId xmlns:a16="http://schemas.microsoft.com/office/drawing/2014/main" id="{5B2F0483-667C-42B8-AB12-E755030F4337}"/>
               </a:ext>
             </a:extLst>
           </p:cNvPr>
@@ -10511,7 +10131,7 @@
           <p:cNvPr id="12" name="p17-n2">
             <a:extLst xmlns:a="http://schemas.openxmlformats.org/drawingml/2006/main">
               <a:ext uri="{FF2B5EF4-FFF2-40B4-BE49-F238E27FC236}">
-                <a16:creationId xmlns:a16="http://schemas.microsoft.com/office/drawing/2014/main" id="{1ED8B90A-8A7A-492A-A7C6-FD8982A01327}"/>
+                <a16:creationId xmlns:a16="http://schemas.microsoft.com/office/drawing/2014/main" id="{2D397449-65B7-40FA-8036-977C8981ED8F}"/>
               </a:ext>
             </a:extLst>
           </p:cNvPr>
@@ -10568,7 +10188,7 @@
           <p:cNvPr id="13" name="p17-t2">
             <a:extLst xmlns:a="http://schemas.openxmlformats.org/drawingml/2006/main">
               <a:ext uri="{FF2B5EF4-FFF2-40B4-BE49-F238E27FC236}">
-                <a16:creationId xmlns:a16="http://schemas.microsoft.com/office/drawing/2014/main" id="{6BBA92DC-CB29-4B0B-89D3-4700BD7B1524}"/>
+                <a16:creationId xmlns:a16="http://schemas.microsoft.com/office/drawing/2014/main" id="{46D32A91-860A-4289-9158-DA0630626236}"/>
               </a:ext>
             </a:extLst>
           </p:cNvPr>
@@ -10623,7 +10243,7 @@
           <p:cNvPr id="14" name="p17-n3">
             <a:extLst xmlns:a="http://schemas.openxmlformats.org/drawingml/2006/main">
               <a:ext uri="{FF2B5EF4-FFF2-40B4-BE49-F238E27FC236}">
-                <a16:creationId xmlns:a16="http://schemas.microsoft.com/office/drawing/2014/main" id="{6E5AFF2D-DEB8-4D0A-9DD6-18426EDA6A15}"/>
+                <a16:creationId xmlns:a16="http://schemas.microsoft.com/office/drawing/2014/main" id="{8AAE41A1-15E6-4B7C-99BA-F8ABCD6844A5}"/>
               </a:ext>
             </a:extLst>
           </p:cNvPr>
@@ -10680,7 +10300,7 @@
           <p:cNvPr id="15" name="p17-t3">
             <a:extLst xmlns:a="http://schemas.openxmlformats.org/drawingml/2006/main">
               <a:ext uri="{FF2B5EF4-FFF2-40B4-BE49-F238E27FC236}">
-                <a16:creationId xmlns:a16="http://schemas.microsoft.com/office/drawing/2014/main" id="{B5E73F3E-D9D8-46E2-A111-0E03B799023C}"/>
+                <a16:creationId xmlns:a16="http://schemas.microsoft.com/office/drawing/2014/main" id="{B387D60D-D81E-4264-B92F-49320B56EC46}"/>
               </a:ext>
             </a:extLst>
           </p:cNvPr>
@@ -10735,7 +10355,7 @@
           <p:cNvPr id="16" name="p17-fallback">
             <a:extLst xmlns:a="http://schemas.openxmlformats.org/drawingml/2006/main">
               <a:ext uri="{FF2B5EF4-FFF2-40B4-BE49-F238E27FC236}">
-                <a16:creationId xmlns:a16="http://schemas.microsoft.com/office/drawing/2014/main" id="{B7C9FB20-D046-4A3F-A172-49692C0FE863}"/>
+                <a16:creationId xmlns:a16="http://schemas.microsoft.com/office/drawing/2014/main" id="{7587656F-A519-4010-A3B1-ECD5DE3A58B8}"/>
               </a:ext>
             </a:extLst>
           </p:cNvPr>
@@ -10881,868 +10501,499 @@
       </p:sp>
       <p:sp>
         <p:nvSpPr>
-          <p:cNvPr id="6" name="p18-0-l">
-            <a:extLst xmlns:a="http://schemas.openxmlformats.org/drawingml/2006/main">
-              <a:ext uri="{FF2B5EF4-FFF2-40B4-BE49-F238E27FC236}">
-                <a16:creationId xmlns:a16="http://schemas.microsoft.com/office/drawing/2014/main" id="{8FF89C95-7F21-4023-AFB7-AD7CB96C20BB}"/>
-              </a:ext>
-            </a:extLst>
-          </p:cNvPr>
-          <p:cNvSpPr>
-            <a:spLocks xmlns:a="http://schemas.openxmlformats.org/drawingml/2006/main" noGrp="1"/>
-          </p:cNvSpPr>
-          <p:nvPr/>
-        </p:nvSpPr>
-        <p:spPr>
-          <a:xfrm xmlns:a="http://schemas.openxmlformats.org/drawingml/2006/main">
-            <a:off x="533400" y="990600"/>
-            <a:ext cx="1714500" cy="571500"/>
+          <p:cNvPr id="6" name="p18-0">
+            <a:extLst xmlns:a="http://schemas.openxmlformats.org/drawingml/2006/main">
+              <a:ext uri="{FF2B5EF4-FFF2-40B4-BE49-F238E27FC236}">
+                <a16:creationId xmlns:a16="http://schemas.microsoft.com/office/drawing/2014/main" id="{5940265F-5E98-4BA9-948B-4AB46B41B872}"/>
+              </a:ext>
+            </a:extLst>
+          </p:cNvPr>
+          <p:cNvSpPr>
+            <a:spLocks xmlns:a="http://schemas.openxmlformats.org/drawingml/2006/main" noGrp="1"/>
+          </p:cNvSpPr>
+          <p:nvPr/>
+        </p:nvSpPr>
+        <p:spPr>
+          <a:xfrm xmlns:a="http://schemas.openxmlformats.org/drawingml/2006/main">
+            <a:off x="609600" y="1028700"/>
+            <a:ext cx="5219700" cy="609600"/>
           </a:xfrm>
           <a:prstGeom xmlns:a="http://schemas.openxmlformats.org/drawingml/2006/main" prst="roundRect">
             <a:avLst>
-              <a:gd name="adj" fmla="val 13333"/>
+              <a:gd name="adj" fmla="val 12500"/>
             </a:avLst>
           </a:prstGeom>
           <a:solidFill xmlns:a="http://schemas.openxmlformats.org/drawingml/2006/main">
-            <a:srgbClr val="18354E"/>
-          </a:solidFill>
-          <a:ln xmlns:a="http://schemas.openxmlformats.org/drawingml/2006/main" w="0">
-            <a:noFill/>
-            <a:prstDash val="solid"/>
-          </a:ln>
-        </p:spPr>
-        <p:txBody>
-          <a:bodyPr xmlns:a="http://schemas.openxmlformats.org/drawingml/2006/main" lIns="76200" tIns="38100" rIns="76200" bIns="38100" anchor="ctr"/>
-          <a:lstStyle xmlns:a="http://schemas.openxmlformats.org/drawingml/2006/main"/>
-          <a:p xmlns:a="http://schemas.openxmlformats.org/drawingml/2006/main">
-            <a:pPr algn="ctr">
-              <a:defRPr sz="1350" b="1">
-                <a:solidFill>
-                  <a:srgbClr val="FFFFFF"/>
-                </a:solidFill>
-              </a:defRPr>
-            </a:pPr>
-            <a:r>
-              <a:rPr sz="1350" b="1">
-                <a:solidFill>
-                  <a:srgbClr val="FFFFFF"/>
-                </a:solidFill>
-                <a:latin typeface="Microsoft YaHei"/>
-                <a:ea typeface="Microsoft YaHei"/>
-                <a:cs typeface="Microsoft YaHei"/>
-              </a:rPr>
-              <a:t>1 任务契约</a:t>
-            </a:r>
-          </a:p>
-        </p:txBody>
-      </p:sp>
-      <p:sp>
-        <p:nvSpPr>
-          <p:cNvPr id="7" name="p18-0-t">
-            <a:extLst xmlns:a="http://schemas.openxmlformats.org/drawingml/2006/main">
-              <a:ext uri="{FF2B5EF4-FFF2-40B4-BE49-F238E27FC236}">
-                <a16:creationId xmlns:a16="http://schemas.microsoft.com/office/drawing/2014/main" id="{35C63B80-4054-4942-9147-6E1EA3F7484E}"/>
-              </a:ext>
-            </a:extLst>
-          </p:cNvPr>
-          <p:cNvSpPr>
-            <a:spLocks xmlns:a="http://schemas.openxmlformats.org/drawingml/2006/main" noGrp="1"/>
-          </p:cNvSpPr>
-          <p:nvPr/>
-        </p:nvSpPr>
-        <p:spPr>
-          <a:xfrm xmlns:a="http://schemas.openxmlformats.org/drawingml/2006/main">
-            <a:off x="2400300" y="990600"/>
-            <a:ext cx="3619500" cy="571500"/>
+            <a:srgbClr val="F3F6F7"/>
+          </a:solidFill>
+          <a:ln xmlns:a="http://schemas.openxmlformats.org/drawingml/2006/main" w="9525">
+            <a:solidFill>
+              <a:srgbClr val="D6DDE2"/>
+            </a:solidFill>
+            <a:prstDash val="solid"/>
+          </a:ln>
+        </p:spPr>
+        <p:txBody>
+          <a:bodyPr xmlns:a="http://schemas.openxmlformats.org/drawingml/2006/main" lIns="76200" tIns="38100" rIns="76200" bIns="38100" anchor="ctr"/>
+          <a:lstStyle xmlns:a="http://schemas.openxmlformats.org/drawingml/2006/main"/>
+          <a:p xmlns:a="http://schemas.openxmlformats.org/drawingml/2006/main">
+            <a:pPr algn="l">
+              <a:defRPr sz="1800" b="1">
+                <a:solidFill>
+                  <a:srgbClr val="263746"/>
+                </a:solidFill>
+              </a:defRPr>
+            </a:pPr>
+            <a:r>
+              <a:rPr sz="1800" b="1">
+                <a:solidFill>
+                  <a:srgbClr val="263746"/>
+                </a:solidFill>
+                <a:latin typeface="Microsoft YaHei"/>
+                <a:ea typeface="Microsoft YaHei"/>
+                <a:cs typeface="Microsoft YaHei"/>
+              </a:rPr>
+              <a:t>□  1 任务契约｜成功 + 禁止</a:t>
+            </a:r>
+          </a:p>
+        </p:txBody>
+      </p:sp>
+      <p:sp>
+        <p:nvSpPr>
+          <p:cNvPr id="7" name="p18-1">
+            <a:extLst xmlns:a="http://schemas.openxmlformats.org/drawingml/2006/main">
+              <a:ext uri="{FF2B5EF4-FFF2-40B4-BE49-F238E27FC236}">
+                <a16:creationId xmlns:a16="http://schemas.microsoft.com/office/drawing/2014/main" id="{EA88B73C-DFAD-4465-90DD-08CEB40F11F6}"/>
+              </a:ext>
+            </a:extLst>
+          </p:cNvPr>
+          <p:cNvSpPr>
+            <a:spLocks xmlns:a="http://schemas.openxmlformats.org/drawingml/2006/main" noGrp="1"/>
+          </p:cNvSpPr>
+          <p:nvPr/>
+        </p:nvSpPr>
+        <p:spPr>
+          <a:xfrm xmlns:a="http://schemas.openxmlformats.org/drawingml/2006/main">
+            <a:off x="609600" y="1809750"/>
+            <a:ext cx="5219700" cy="609600"/>
+          </a:xfrm>
+          <a:prstGeom xmlns:a="http://schemas.openxmlformats.org/drawingml/2006/main" prst="roundRect">
+            <a:avLst>
+              <a:gd name="adj" fmla="val 12500"/>
+            </a:avLst>
+          </a:prstGeom>
+          <a:solidFill xmlns:a="http://schemas.openxmlformats.org/drawingml/2006/main">
+            <a:srgbClr val="FFFFFF"/>
+          </a:solidFill>
+          <a:ln xmlns:a="http://schemas.openxmlformats.org/drawingml/2006/main" w="9525">
+            <a:solidFill>
+              <a:srgbClr val="D6DDE2"/>
+            </a:solidFill>
+            <a:prstDash val="solid"/>
+          </a:ln>
+        </p:spPr>
+        <p:txBody>
+          <a:bodyPr xmlns:a="http://schemas.openxmlformats.org/drawingml/2006/main" lIns="76200" tIns="38100" rIns="76200" bIns="38100" anchor="ctr"/>
+          <a:lstStyle xmlns:a="http://schemas.openxmlformats.org/drawingml/2006/main"/>
+          <a:p xmlns:a="http://schemas.openxmlformats.org/drawingml/2006/main">
+            <a:pPr algn="l">
+              <a:defRPr sz="1800" b="1">
+                <a:solidFill>
+                  <a:srgbClr val="263746"/>
+                </a:solidFill>
+              </a:defRPr>
+            </a:pPr>
+            <a:r>
+              <a:rPr sz="1800" b="1">
+                <a:solidFill>
+                  <a:srgbClr val="263746"/>
+                </a:solidFill>
+                <a:latin typeface="Microsoft YaHei"/>
+                <a:ea typeface="Microsoft YaHei"/>
+                <a:cs typeface="Microsoft YaHei"/>
+              </a:rPr>
+              <a:t>□  2 Context｜材料最小</a:t>
+            </a:r>
+          </a:p>
+        </p:txBody>
+      </p:sp>
+      <p:sp>
+        <p:nvSpPr>
+          <p:cNvPr id="8" name="p18-2">
+            <a:extLst xmlns:a="http://schemas.openxmlformats.org/drawingml/2006/main">
+              <a:ext uri="{FF2B5EF4-FFF2-40B4-BE49-F238E27FC236}">
+                <a16:creationId xmlns:a16="http://schemas.microsoft.com/office/drawing/2014/main" id="{A7CB42BA-7326-4B64-98B5-9DBB9009EBDB}"/>
+              </a:ext>
+            </a:extLst>
+          </p:cNvPr>
+          <p:cNvSpPr>
+            <a:spLocks xmlns:a="http://schemas.openxmlformats.org/drawingml/2006/main" noGrp="1"/>
+          </p:cNvSpPr>
+          <p:nvPr/>
+        </p:nvSpPr>
+        <p:spPr>
+          <a:xfrm xmlns:a="http://schemas.openxmlformats.org/drawingml/2006/main">
+            <a:off x="609600" y="2590800"/>
+            <a:ext cx="5219700" cy="609600"/>
+          </a:xfrm>
+          <a:prstGeom xmlns:a="http://schemas.openxmlformats.org/drawingml/2006/main" prst="roundRect">
+            <a:avLst>
+              <a:gd name="adj" fmla="val 12500"/>
+            </a:avLst>
+          </a:prstGeom>
+          <a:solidFill xmlns:a="http://schemas.openxmlformats.org/drawingml/2006/main">
+            <a:srgbClr val="F3F6F7"/>
+          </a:solidFill>
+          <a:ln xmlns:a="http://schemas.openxmlformats.org/drawingml/2006/main" w="9525">
+            <a:solidFill>
+              <a:srgbClr val="D6DDE2"/>
+            </a:solidFill>
+            <a:prstDash val="solid"/>
+          </a:ln>
+        </p:spPr>
+        <p:txBody>
+          <a:bodyPr xmlns:a="http://schemas.openxmlformats.org/drawingml/2006/main" lIns="76200" tIns="38100" rIns="76200" bIns="38100" anchor="ctr"/>
+          <a:lstStyle xmlns:a="http://schemas.openxmlformats.org/drawingml/2006/main"/>
+          <a:p xmlns:a="http://schemas.openxmlformats.org/drawingml/2006/main">
+            <a:pPr algn="l">
+              <a:defRPr sz="1800" b="1">
+                <a:solidFill>
+                  <a:srgbClr val="263746"/>
+                </a:solidFill>
+              </a:defRPr>
+            </a:pPr>
+            <a:r>
+              <a:rPr sz="1800" b="1">
+                <a:solidFill>
+                  <a:srgbClr val="263746"/>
+                </a:solidFill>
+                <a:latin typeface="Microsoft YaHei"/>
+                <a:ea typeface="Microsoft YaHei"/>
+                <a:cs typeface="Microsoft YaHei"/>
+              </a:rPr>
+              <a:t>□  3 Memory｜写回工件</a:t>
+            </a:r>
+          </a:p>
+        </p:txBody>
+      </p:sp>
+      <p:sp>
+        <p:nvSpPr>
+          <p:cNvPr id="9" name="p18-3">
+            <a:extLst xmlns:a="http://schemas.openxmlformats.org/drawingml/2006/main">
+              <a:ext uri="{FF2B5EF4-FFF2-40B4-BE49-F238E27FC236}">
+                <a16:creationId xmlns:a16="http://schemas.microsoft.com/office/drawing/2014/main" id="{919AC029-9DDB-44EE-81F0-57E10009C7D7}"/>
+              </a:ext>
+            </a:extLst>
+          </p:cNvPr>
+          <p:cNvSpPr>
+            <a:spLocks xmlns:a="http://schemas.openxmlformats.org/drawingml/2006/main" noGrp="1"/>
+          </p:cNvSpPr>
+          <p:nvPr/>
+        </p:nvSpPr>
+        <p:spPr>
+          <a:xfrm xmlns:a="http://schemas.openxmlformats.org/drawingml/2006/main">
+            <a:off x="609600" y="3371850"/>
+            <a:ext cx="5219700" cy="609600"/>
+          </a:xfrm>
+          <a:prstGeom xmlns:a="http://schemas.openxmlformats.org/drawingml/2006/main" prst="roundRect">
+            <a:avLst>
+              <a:gd name="adj" fmla="val 12500"/>
+            </a:avLst>
+          </a:prstGeom>
+          <a:solidFill xmlns:a="http://schemas.openxmlformats.org/drawingml/2006/main">
+            <a:srgbClr val="FFFFFF"/>
+          </a:solidFill>
+          <a:ln xmlns:a="http://schemas.openxmlformats.org/drawingml/2006/main" w="9525">
+            <a:solidFill>
+              <a:srgbClr val="D6DDE2"/>
+            </a:solidFill>
+            <a:prstDash val="solid"/>
+          </a:ln>
+        </p:spPr>
+        <p:txBody>
+          <a:bodyPr xmlns:a="http://schemas.openxmlformats.org/drawingml/2006/main" lIns="76200" tIns="38100" rIns="76200" bIns="38100" anchor="ctr"/>
+          <a:lstStyle xmlns:a="http://schemas.openxmlformats.org/drawingml/2006/main"/>
+          <a:p xmlns:a="http://schemas.openxmlformats.org/drawingml/2006/main">
+            <a:pPr algn="l">
+              <a:defRPr sz="1800" b="1">
+                <a:solidFill>
+                  <a:srgbClr val="263746"/>
+                </a:solidFill>
+              </a:defRPr>
+            </a:pPr>
+            <a:r>
+              <a:rPr sz="1800" b="1">
+                <a:solidFill>
+                  <a:srgbClr val="263746"/>
+                </a:solidFill>
+                <a:latin typeface="Microsoft YaHei"/>
+                <a:ea typeface="Microsoft YaHei"/>
+                <a:cs typeface="Microsoft YaHei"/>
+              </a:rPr>
+              <a:t>□  4 权限｜分档 + 确认</a:t>
+            </a:r>
+          </a:p>
+        </p:txBody>
+      </p:sp>
+      <p:sp>
+        <p:nvSpPr>
+          <p:cNvPr id="10" name="p18-4">
+            <a:extLst xmlns:a="http://schemas.openxmlformats.org/drawingml/2006/main">
+              <a:ext uri="{FF2B5EF4-FFF2-40B4-BE49-F238E27FC236}">
+                <a16:creationId xmlns:a16="http://schemas.microsoft.com/office/drawing/2014/main" id="{0D82DA1B-C98E-4A4F-AF08-5D1B1805D03B}"/>
+              </a:ext>
+            </a:extLst>
+          </p:cNvPr>
+          <p:cNvSpPr>
+            <a:spLocks xmlns:a="http://schemas.openxmlformats.org/drawingml/2006/main" noGrp="1"/>
+          </p:cNvSpPr>
+          <p:nvPr/>
+        </p:nvSpPr>
+        <p:spPr>
+          <a:xfrm xmlns:a="http://schemas.openxmlformats.org/drawingml/2006/main">
+            <a:off x="6381750" y="1028700"/>
+            <a:ext cx="5219700" cy="609600"/>
+          </a:xfrm>
+          <a:prstGeom xmlns:a="http://schemas.openxmlformats.org/drawingml/2006/main" prst="roundRect">
+            <a:avLst>
+              <a:gd name="adj" fmla="val 12500"/>
+            </a:avLst>
+          </a:prstGeom>
+          <a:solidFill xmlns:a="http://schemas.openxmlformats.org/drawingml/2006/main">
+            <a:srgbClr val="F3F6F7"/>
+          </a:solidFill>
+          <a:ln xmlns:a="http://schemas.openxmlformats.org/drawingml/2006/main" w="9525">
+            <a:solidFill>
+              <a:srgbClr val="D6DDE2"/>
+            </a:solidFill>
+            <a:prstDash val="solid"/>
+          </a:ln>
+        </p:spPr>
+        <p:txBody>
+          <a:bodyPr xmlns:a="http://schemas.openxmlformats.org/drawingml/2006/main" lIns="76200" tIns="38100" rIns="76200" bIns="38100" anchor="ctr"/>
+          <a:lstStyle xmlns:a="http://schemas.openxmlformats.org/drawingml/2006/main"/>
+          <a:p xmlns:a="http://schemas.openxmlformats.org/drawingml/2006/main">
+            <a:pPr algn="l">
+              <a:defRPr sz="1800" b="1">
+                <a:solidFill>
+                  <a:srgbClr val="263746"/>
+                </a:solidFill>
+              </a:defRPr>
+            </a:pPr>
+            <a:r>
+              <a:rPr sz="1800" b="1">
+                <a:solidFill>
+                  <a:srgbClr val="263746"/>
+                </a:solidFill>
+                <a:latin typeface="Microsoft YaHei"/>
+                <a:ea typeface="Microsoft YaHei"/>
+                <a:cs typeface="Microsoft YaHei"/>
+              </a:rPr>
+              <a:t>□  5 循环｜预算 + 停止</a:t>
+            </a:r>
+          </a:p>
+        </p:txBody>
+      </p:sp>
+      <p:sp>
+        <p:nvSpPr>
+          <p:cNvPr id="11" name="p18-5">
+            <a:extLst xmlns:a="http://schemas.openxmlformats.org/drawingml/2006/main">
+              <a:ext uri="{FF2B5EF4-FFF2-40B4-BE49-F238E27FC236}">
+                <a16:creationId xmlns:a16="http://schemas.microsoft.com/office/drawing/2014/main" id="{22DA6359-1AFC-4A15-AD0F-89D502B021E9}"/>
+              </a:ext>
+            </a:extLst>
+          </p:cNvPr>
+          <p:cNvSpPr>
+            <a:spLocks xmlns:a="http://schemas.openxmlformats.org/drawingml/2006/main" noGrp="1"/>
+          </p:cNvSpPr>
+          <p:nvPr/>
+        </p:nvSpPr>
+        <p:spPr>
+          <a:xfrm xmlns:a="http://schemas.openxmlformats.org/drawingml/2006/main">
+            <a:off x="6381750" y="1809750"/>
+            <a:ext cx="5219700" cy="609600"/>
+          </a:xfrm>
+          <a:prstGeom xmlns:a="http://schemas.openxmlformats.org/drawingml/2006/main" prst="roundRect">
+            <a:avLst>
+              <a:gd name="adj" fmla="val 12500"/>
+            </a:avLst>
+          </a:prstGeom>
+          <a:solidFill xmlns:a="http://schemas.openxmlformats.org/drawingml/2006/main">
+            <a:srgbClr val="FFFFFF"/>
+          </a:solidFill>
+          <a:ln xmlns:a="http://schemas.openxmlformats.org/drawingml/2006/main" w="9525">
+            <a:solidFill>
+              <a:srgbClr val="D6DDE2"/>
+            </a:solidFill>
+            <a:prstDash val="solid"/>
+          </a:ln>
+        </p:spPr>
+        <p:txBody>
+          <a:bodyPr xmlns:a="http://schemas.openxmlformats.org/drawingml/2006/main" lIns="76200" tIns="38100" rIns="76200" bIns="38100" anchor="ctr"/>
+          <a:lstStyle xmlns:a="http://schemas.openxmlformats.org/drawingml/2006/main"/>
+          <a:p xmlns:a="http://schemas.openxmlformats.org/drawingml/2006/main">
+            <a:pPr algn="l">
+              <a:defRPr sz="1800" b="1">
+                <a:solidFill>
+                  <a:srgbClr val="263746"/>
+                </a:solidFill>
+              </a:defRPr>
+            </a:pPr>
+            <a:r>
+              <a:rPr sz="1800" b="1">
+                <a:solidFill>
+                  <a:srgbClr val="263746"/>
+                </a:solidFill>
+                <a:latin typeface="Microsoft YaHei"/>
+                <a:ea typeface="Microsoft YaHei"/>
+                <a:cs typeface="Microsoft YaHei"/>
+              </a:rPr>
+              <a:t>□  6 追踪｜证据 / 实验 ID</a:t>
+            </a:r>
+          </a:p>
+        </p:txBody>
+      </p:sp>
+      <p:sp>
+        <p:nvSpPr>
+          <p:cNvPr id="12" name="p18-6">
+            <a:extLst xmlns:a="http://schemas.openxmlformats.org/drawingml/2006/main">
+              <a:ext uri="{FF2B5EF4-FFF2-40B4-BE49-F238E27FC236}">
+                <a16:creationId xmlns:a16="http://schemas.microsoft.com/office/drawing/2014/main" id="{10146635-463E-4A1F-87C8-CA9251F659F6}"/>
+              </a:ext>
+            </a:extLst>
+          </p:cNvPr>
+          <p:cNvSpPr>
+            <a:spLocks xmlns:a="http://schemas.openxmlformats.org/drawingml/2006/main" noGrp="1"/>
+          </p:cNvSpPr>
+          <p:nvPr/>
+        </p:nvSpPr>
+        <p:spPr>
+          <a:xfrm xmlns:a="http://schemas.openxmlformats.org/drawingml/2006/main">
+            <a:off x="6381750" y="2590800"/>
+            <a:ext cx="5219700" cy="609600"/>
+          </a:xfrm>
+          <a:prstGeom xmlns:a="http://schemas.openxmlformats.org/drawingml/2006/main" prst="roundRect">
+            <a:avLst>
+              <a:gd name="adj" fmla="val 12500"/>
+            </a:avLst>
+          </a:prstGeom>
+          <a:solidFill xmlns:a="http://schemas.openxmlformats.org/drawingml/2006/main">
+            <a:srgbClr val="F3F6F7"/>
+          </a:solidFill>
+          <a:ln xmlns:a="http://schemas.openxmlformats.org/drawingml/2006/main" w="9525">
+            <a:solidFill>
+              <a:srgbClr val="D6DDE2"/>
+            </a:solidFill>
+            <a:prstDash val="solid"/>
+          </a:ln>
+        </p:spPr>
+        <p:txBody>
+          <a:bodyPr xmlns:a="http://schemas.openxmlformats.org/drawingml/2006/main" lIns="76200" tIns="38100" rIns="76200" bIns="38100" anchor="ctr"/>
+          <a:lstStyle xmlns:a="http://schemas.openxmlformats.org/drawingml/2006/main"/>
+          <a:p xmlns:a="http://schemas.openxmlformats.org/drawingml/2006/main">
+            <a:pPr algn="l">
+              <a:defRPr sz="1800" b="1">
+                <a:solidFill>
+                  <a:srgbClr val="263746"/>
+                </a:solidFill>
+              </a:defRPr>
+            </a:pPr>
+            <a:r>
+              <a:rPr sz="1800" b="1">
+                <a:solidFill>
+                  <a:srgbClr val="263746"/>
+                </a:solidFill>
+                <a:latin typeface="Microsoft YaHei"/>
+                <a:ea typeface="Microsoft YaHei"/>
+                <a:cs typeface="Microsoft YaHei"/>
+              </a:rPr>
+              <a:t>□  7 Evals｜baseline + 人工</a:t>
+            </a:r>
+          </a:p>
+        </p:txBody>
+      </p:sp>
+      <p:sp>
+        <p:nvSpPr>
+          <p:cNvPr id="13" name="p18-7">
+            <a:extLst xmlns:a="http://schemas.openxmlformats.org/drawingml/2006/main">
+              <a:ext uri="{FF2B5EF4-FFF2-40B4-BE49-F238E27FC236}">
+                <a16:creationId xmlns:a16="http://schemas.microsoft.com/office/drawing/2014/main" id="{51590A99-9832-43F5-A725-878BB00C03BB}"/>
+              </a:ext>
+            </a:extLst>
+          </p:cNvPr>
+          <p:cNvSpPr>
+            <a:spLocks xmlns:a="http://schemas.openxmlformats.org/drawingml/2006/main" noGrp="1"/>
+          </p:cNvSpPr>
+          <p:nvPr/>
+        </p:nvSpPr>
+        <p:spPr>
+          <a:xfrm xmlns:a="http://schemas.openxmlformats.org/drawingml/2006/main">
+            <a:off x="6381750" y="3371850"/>
+            <a:ext cx="5219700" cy="609600"/>
+          </a:xfrm>
+          <a:prstGeom xmlns:a="http://schemas.openxmlformats.org/drawingml/2006/main" prst="roundRect">
+            <a:avLst>
+              <a:gd name="adj" fmla="val 12500"/>
+            </a:avLst>
+          </a:prstGeom>
+          <a:solidFill xmlns:a="http://schemas.openxmlformats.org/drawingml/2006/main">
+            <a:srgbClr val="F8E9EA"/>
+          </a:solidFill>
+          <a:ln xmlns:a="http://schemas.openxmlformats.org/drawingml/2006/main" w="9525">
+            <a:solidFill>
+              <a:srgbClr val="C8161E"/>
+            </a:solidFill>
+            <a:prstDash val="solid"/>
+          </a:ln>
+        </p:spPr>
+        <p:txBody>
+          <a:bodyPr xmlns:a="http://schemas.openxmlformats.org/drawingml/2006/main" lIns="76200" tIns="38100" rIns="76200" bIns="38100" anchor="ctr"/>
+          <a:lstStyle xmlns:a="http://schemas.openxmlformats.org/drawingml/2006/main"/>
+          <a:p xmlns:a="http://schemas.openxmlformats.org/drawingml/2006/main">
+            <a:pPr algn="l">
+              <a:defRPr sz="1800" b="1">
+                <a:solidFill>
+                  <a:srgbClr val="C8161E"/>
+                </a:solidFill>
+              </a:defRPr>
+            </a:pPr>
+            <a:r>
+              <a:rPr sz="1800" b="1">
+                <a:solidFill>
+                  <a:srgbClr val="C8161E"/>
+                </a:solidFill>
+                <a:latin typeface="Microsoft YaHei"/>
+                <a:ea typeface="Microsoft YaHei"/>
+                <a:cs typeface="Microsoft YaHei"/>
+              </a:rPr>
+              <a:t>□  8 恢复｜保留 + 回退</a:t>
+            </a:r>
+          </a:p>
+        </p:txBody>
+      </p:sp>
+      <p:sp>
+        <p:nvSpPr>
+          <p:cNvPr id="14" name="p18-bottom">
+            <a:extLst xmlns:a="http://schemas.openxmlformats.org/drawingml/2006/main">
+              <a:ext uri="{FF2B5EF4-FFF2-40B4-BE49-F238E27FC236}">
+                <a16:creationId xmlns:a16="http://schemas.microsoft.com/office/drawing/2014/main" id="{B640FD12-AFAF-471E-8E9F-643EFF37DD5E}"/>
+              </a:ext>
+            </a:extLst>
+          </p:cNvPr>
+          <p:cNvSpPr>
+            <a:spLocks xmlns:a="http://schemas.openxmlformats.org/drawingml/2006/main" noGrp="1"/>
+          </p:cNvSpPr>
+          <p:nvPr/>
+        </p:nvSpPr>
+        <p:spPr>
+          <a:xfrm xmlns:a="http://schemas.openxmlformats.org/drawingml/2006/main">
+            <a:off x="1524000" y="4762500"/>
+            <a:ext cx="9144000" cy="723900"/>
           </a:xfrm>
           <a:prstGeom xmlns:a="http://schemas.openxmlformats.org/drawingml/2006/main" prst="rect">
             <a:avLst/>
           </a:prstGeom>
           <a:solidFill xmlns:a="http://schemas.openxmlformats.org/drawingml/2006/main">
-            <a:srgbClr val="F3F6F7"/>
-          </a:solidFill>
-          <a:ln xmlns:a="http://schemas.openxmlformats.org/drawingml/2006/main" w="0">
-            <a:noFill/>
-            <a:prstDash val="solid"/>
-          </a:ln>
-        </p:spPr>
-        <p:txBody>
-          <a:bodyPr xmlns:a="http://schemas.openxmlformats.org/drawingml/2006/main" lIns="76200" tIns="38100" rIns="76200" bIns="38100" anchor="ctr"/>
-          <a:lstStyle xmlns:a="http://schemas.openxmlformats.org/drawingml/2006/main"/>
-          <a:p xmlns:a="http://schemas.openxmlformats.org/drawingml/2006/main">
-            <a:pPr algn="l">
-              <a:defRPr sz="1350" b="1">
-                <a:solidFill>
-                  <a:srgbClr val="263746"/>
-                </a:solidFill>
-              </a:defRPr>
-            </a:pPr>
-            <a:r>
-              <a:rPr sz="1350" b="1">
-                <a:solidFill>
-                  <a:srgbClr val="263746"/>
-                </a:solidFill>
-                <a:latin typeface="Microsoft YaHei"/>
-                <a:ea typeface="Microsoft YaHei"/>
-                <a:cs typeface="Microsoft YaHei"/>
-              </a:rPr>
-              <a:t>四字段完整</a:t>
-            </a:r>
-          </a:p>
-        </p:txBody>
-      </p:sp>
-      <p:sp>
-        <p:nvSpPr>
-          <p:cNvPr id="8" name="p18-1-l">
-            <a:extLst xmlns:a="http://schemas.openxmlformats.org/drawingml/2006/main">
-              <a:ext uri="{FF2B5EF4-FFF2-40B4-BE49-F238E27FC236}">
-                <a16:creationId xmlns:a16="http://schemas.microsoft.com/office/drawing/2014/main" id="{E23E1976-9CD1-440A-9C0B-4AFCB146B8DB}"/>
-              </a:ext>
-            </a:extLst>
-          </p:cNvPr>
-          <p:cNvSpPr>
-            <a:spLocks xmlns:a="http://schemas.openxmlformats.org/drawingml/2006/main" noGrp="1"/>
-          </p:cNvSpPr>
-          <p:nvPr/>
-        </p:nvSpPr>
-        <p:spPr>
-          <a:xfrm xmlns:a="http://schemas.openxmlformats.org/drawingml/2006/main">
-            <a:off x="533400" y="1866900"/>
-            <a:ext cx="1714500" cy="571500"/>
-          </a:xfrm>
-          <a:prstGeom xmlns:a="http://schemas.openxmlformats.org/drawingml/2006/main" prst="roundRect">
-            <a:avLst>
-              <a:gd name="adj" fmla="val 13333"/>
-            </a:avLst>
-          </a:prstGeom>
-          <a:solidFill xmlns:a="http://schemas.openxmlformats.org/drawingml/2006/main">
-            <a:srgbClr val="18354E"/>
-          </a:solidFill>
-          <a:ln xmlns:a="http://schemas.openxmlformats.org/drawingml/2006/main" w="0">
-            <a:noFill/>
-            <a:prstDash val="solid"/>
-          </a:ln>
-        </p:spPr>
-        <p:txBody>
-          <a:bodyPr xmlns:a="http://schemas.openxmlformats.org/drawingml/2006/main" lIns="76200" tIns="38100" rIns="76200" bIns="38100" anchor="ctr"/>
-          <a:lstStyle xmlns:a="http://schemas.openxmlformats.org/drawingml/2006/main"/>
-          <a:p xmlns:a="http://schemas.openxmlformats.org/drawingml/2006/main">
-            <a:pPr algn="ctr">
-              <a:defRPr sz="1350" b="1">
-                <a:solidFill>
-                  <a:srgbClr val="FFFFFF"/>
-                </a:solidFill>
-              </a:defRPr>
-            </a:pPr>
-            <a:r>
-              <a:rPr sz="1350" b="1">
-                <a:solidFill>
-                  <a:srgbClr val="FFFFFF"/>
-                </a:solidFill>
-                <a:latin typeface="Microsoft YaHei"/>
-                <a:ea typeface="Microsoft YaHei"/>
-                <a:cs typeface="Microsoft YaHei"/>
-              </a:rPr>
-              <a:t>2 Context</a:t>
-            </a:r>
-          </a:p>
-        </p:txBody>
-      </p:sp>
-      <p:sp>
-        <p:nvSpPr>
-          <p:cNvPr id="9" name="p18-1-t">
-            <a:extLst xmlns:a="http://schemas.openxmlformats.org/drawingml/2006/main">
-              <a:ext uri="{FF2B5EF4-FFF2-40B4-BE49-F238E27FC236}">
-                <a16:creationId xmlns:a16="http://schemas.microsoft.com/office/drawing/2014/main" id="{55528201-1739-4B57-B906-415F3675C697}"/>
-              </a:ext>
-            </a:extLst>
-          </p:cNvPr>
-          <p:cNvSpPr>
-            <a:spLocks xmlns:a="http://schemas.openxmlformats.org/drawingml/2006/main" noGrp="1"/>
-          </p:cNvSpPr>
-          <p:nvPr/>
-        </p:nvSpPr>
-        <p:spPr>
-          <a:xfrm xmlns:a="http://schemas.openxmlformats.org/drawingml/2006/main">
-            <a:off x="2400300" y="1866900"/>
-            <a:ext cx="3619500" cy="571500"/>
-          </a:xfrm>
-          <a:prstGeom xmlns:a="http://schemas.openxmlformats.org/drawingml/2006/main" prst="rect">
-            <a:avLst/>
-          </a:prstGeom>
-          <a:solidFill xmlns:a="http://schemas.openxmlformats.org/drawingml/2006/main">
-            <a:srgbClr val="F3F6F7"/>
-          </a:solidFill>
-          <a:ln xmlns:a="http://schemas.openxmlformats.org/drawingml/2006/main" w="0">
-            <a:noFill/>
-            <a:prstDash val="solid"/>
-          </a:ln>
-        </p:spPr>
-        <p:txBody>
-          <a:bodyPr xmlns:a="http://schemas.openxmlformats.org/drawingml/2006/main" lIns="76200" tIns="38100" rIns="76200" bIns="38100" anchor="ctr"/>
-          <a:lstStyle xmlns:a="http://schemas.openxmlformats.org/drawingml/2006/main"/>
-          <a:p xmlns:a="http://schemas.openxmlformats.org/drawingml/2006/main">
-            <a:pPr algn="l">
-              <a:defRPr sz="1350" b="1">
-                <a:solidFill>
-                  <a:srgbClr val="263746"/>
-                </a:solidFill>
-              </a:defRPr>
-            </a:pPr>
-            <a:r>
-              <a:rPr sz="1350" b="1">
-                <a:solidFill>
-                  <a:srgbClr val="263746"/>
-                </a:solidFill>
-                <a:latin typeface="Microsoft YaHei"/>
-                <a:ea typeface="Microsoft YaHei"/>
-                <a:cs typeface="Microsoft YaHei"/>
-              </a:rPr>
-              <a:t>材料最小、来源明确</a:t>
-            </a:r>
-          </a:p>
-        </p:txBody>
-      </p:sp>
-      <p:sp>
-        <p:nvSpPr>
-          <p:cNvPr id="10" name="p18-2-l">
-            <a:extLst xmlns:a="http://schemas.openxmlformats.org/drawingml/2006/main">
-              <a:ext uri="{FF2B5EF4-FFF2-40B4-BE49-F238E27FC236}">
-                <a16:creationId xmlns:a16="http://schemas.microsoft.com/office/drawing/2014/main" id="{F2410934-3D5D-4C08-ACC7-F5D872506003}"/>
-              </a:ext>
-            </a:extLst>
-          </p:cNvPr>
-          <p:cNvSpPr>
-            <a:spLocks xmlns:a="http://schemas.openxmlformats.org/drawingml/2006/main" noGrp="1"/>
-          </p:cNvSpPr>
-          <p:nvPr/>
-        </p:nvSpPr>
-        <p:spPr>
-          <a:xfrm xmlns:a="http://schemas.openxmlformats.org/drawingml/2006/main">
-            <a:off x="533400" y="2743200"/>
-            <a:ext cx="1714500" cy="571500"/>
-          </a:xfrm>
-          <a:prstGeom xmlns:a="http://schemas.openxmlformats.org/drawingml/2006/main" prst="roundRect">
-            <a:avLst>
-              <a:gd name="adj" fmla="val 13333"/>
-            </a:avLst>
-          </a:prstGeom>
-          <a:solidFill xmlns:a="http://schemas.openxmlformats.org/drawingml/2006/main">
-            <a:srgbClr val="18354E"/>
-          </a:solidFill>
-          <a:ln xmlns:a="http://schemas.openxmlformats.org/drawingml/2006/main" w="0">
-            <a:noFill/>
-            <a:prstDash val="solid"/>
-          </a:ln>
-        </p:spPr>
-        <p:txBody>
-          <a:bodyPr xmlns:a="http://schemas.openxmlformats.org/drawingml/2006/main" lIns="76200" tIns="38100" rIns="76200" bIns="38100" anchor="ctr"/>
-          <a:lstStyle xmlns:a="http://schemas.openxmlformats.org/drawingml/2006/main"/>
-          <a:p xmlns:a="http://schemas.openxmlformats.org/drawingml/2006/main">
-            <a:pPr algn="ctr">
-              <a:defRPr sz="1350" b="1">
-                <a:solidFill>
-                  <a:srgbClr val="FFFFFF"/>
-                </a:solidFill>
-              </a:defRPr>
-            </a:pPr>
-            <a:r>
-              <a:rPr sz="1350" b="1">
-                <a:solidFill>
-                  <a:srgbClr val="FFFFFF"/>
-                </a:solidFill>
-                <a:latin typeface="Microsoft YaHei"/>
-                <a:ea typeface="Microsoft YaHei"/>
-                <a:cs typeface="Microsoft YaHei"/>
-              </a:rPr>
-              <a:t>3 Memory / 状态</a:t>
-            </a:r>
-          </a:p>
-        </p:txBody>
-      </p:sp>
-      <p:sp>
-        <p:nvSpPr>
-          <p:cNvPr id="11" name="p18-2-t">
-            <a:extLst xmlns:a="http://schemas.openxmlformats.org/drawingml/2006/main">
-              <a:ext uri="{FF2B5EF4-FFF2-40B4-BE49-F238E27FC236}">
-                <a16:creationId xmlns:a16="http://schemas.microsoft.com/office/drawing/2014/main" id="{A0F3F526-9A22-403F-9E72-ED66C1332606}"/>
-              </a:ext>
-            </a:extLst>
-          </p:cNvPr>
-          <p:cNvSpPr>
-            <a:spLocks xmlns:a="http://schemas.openxmlformats.org/drawingml/2006/main" noGrp="1"/>
-          </p:cNvSpPr>
-          <p:nvPr/>
-        </p:nvSpPr>
-        <p:spPr>
-          <a:xfrm xmlns:a="http://schemas.openxmlformats.org/drawingml/2006/main">
-            <a:off x="2400300" y="2743200"/>
-            <a:ext cx="3619500" cy="571500"/>
-          </a:xfrm>
-          <a:prstGeom xmlns:a="http://schemas.openxmlformats.org/drawingml/2006/main" prst="rect">
-            <a:avLst/>
-          </a:prstGeom>
-          <a:solidFill xmlns:a="http://schemas.openxmlformats.org/drawingml/2006/main">
-            <a:srgbClr val="F3F6F7"/>
-          </a:solidFill>
-          <a:ln xmlns:a="http://schemas.openxmlformats.org/drawingml/2006/main" w="0">
-            <a:noFill/>
-            <a:prstDash val="solid"/>
-          </a:ln>
-        </p:spPr>
-        <p:txBody>
-          <a:bodyPr xmlns:a="http://schemas.openxmlformats.org/drawingml/2006/main" lIns="76200" tIns="38100" rIns="76200" bIns="38100" anchor="ctr"/>
-          <a:lstStyle xmlns:a="http://schemas.openxmlformats.org/drawingml/2006/main"/>
-          <a:p xmlns:a="http://schemas.openxmlformats.org/drawingml/2006/main">
-            <a:pPr algn="l">
-              <a:defRPr sz="1350" b="1">
-                <a:solidFill>
-                  <a:srgbClr val="263746"/>
-                </a:solidFill>
-              </a:defRPr>
-            </a:pPr>
-            <a:r>
-              <a:rPr sz="1350" b="1">
-                <a:solidFill>
-                  <a:srgbClr val="263746"/>
-                </a:solidFill>
-                <a:latin typeface="Microsoft YaHei"/>
-                <a:ea typeface="Microsoft YaHei"/>
-                <a:cs typeface="Microsoft YaHei"/>
-              </a:rPr>
-              <a:t>写回可审计工件</a:t>
-            </a:r>
-          </a:p>
-        </p:txBody>
-      </p:sp>
-      <p:sp>
-        <p:nvSpPr>
-          <p:cNvPr id="12" name="p18-3-l">
-            <a:extLst xmlns:a="http://schemas.openxmlformats.org/drawingml/2006/main">
-              <a:ext uri="{FF2B5EF4-FFF2-40B4-BE49-F238E27FC236}">
-                <a16:creationId xmlns:a16="http://schemas.microsoft.com/office/drawing/2014/main" id="{B8B74E75-556A-416C-8C5B-213243392992}"/>
-              </a:ext>
-            </a:extLst>
-          </p:cNvPr>
-          <p:cNvSpPr>
-            <a:spLocks xmlns:a="http://schemas.openxmlformats.org/drawingml/2006/main" noGrp="1"/>
-          </p:cNvSpPr>
-          <p:nvPr/>
-        </p:nvSpPr>
-        <p:spPr>
-          <a:xfrm xmlns:a="http://schemas.openxmlformats.org/drawingml/2006/main">
-            <a:off x="533400" y="3619500"/>
-            <a:ext cx="1714500" cy="571500"/>
-          </a:xfrm>
-          <a:prstGeom xmlns:a="http://schemas.openxmlformats.org/drawingml/2006/main" prst="roundRect">
-            <a:avLst>
-              <a:gd name="adj" fmla="val 13333"/>
-            </a:avLst>
-          </a:prstGeom>
-          <a:solidFill xmlns:a="http://schemas.openxmlformats.org/drawingml/2006/main">
-            <a:srgbClr val="18354E"/>
-          </a:solidFill>
-          <a:ln xmlns:a="http://schemas.openxmlformats.org/drawingml/2006/main" w="0">
-            <a:noFill/>
-            <a:prstDash val="solid"/>
-          </a:ln>
-        </p:spPr>
-        <p:txBody>
-          <a:bodyPr xmlns:a="http://schemas.openxmlformats.org/drawingml/2006/main" lIns="76200" tIns="38100" rIns="76200" bIns="38100" anchor="ctr"/>
-          <a:lstStyle xmlns:a="http://schemas.openxmlformats.org/drawingml/2006/main"/>
-          <a:p xmlns:a="http://schemas.openxmlformats.org/drawingml/2006/main">
-            <a:pPr algn="ctr">
-              <a:defRPr sz="1350" b="1">
-                <a:solidFill>
-                  <a:srgbClr val="FFFFFF"/>
-                </a:solidFill>
-              </a:defRPr>
-            </a:pPr>
-            <a:r>
-              <a:rPr sz="1350" b="1">
-                <a:solidFill>
-                  <a:srgbClr val="FFFFFF"/>
-                </a:solidFill>
-                <a:latin typeface="Microsoft YaHei"/>
-                <a:ea typeface="Microsoft YaHei"/>
-                <a:cs typeface="Microsoft YaHei"/>
-              </a:rPr>
-              <a:t>4 工具与权限</a:t>
-            </a:r>
-          </a:p>
-        </p:txBody>
-      </p:sp>
-      <p:sp>
-        <p:nvSpPr>
-          <p:cNvPr id="13" name="p18-3-t">
-            <a:extLst xmlns:a="http://schemas.openxmlformats.org/drawingml/2006/main">
-              <a:ext uri="{FF2B5EF4-FFF2-40B4-BE49-F238E27FC236}">
-                <a16:creationId xmlns:a16="http://schemas.microsoft.com/office/drawing/2014/main" id="{F5C425CE-53FC-4951-8C1D-295C80C610FD}"/>
-              </a:ext>
-            </a:extLst>
-          </p:cNvPr>
-          <p:cNvSpPr>
-            <a:spLocks xmlns:a="http://schemas.openxmlformats.org/drawingml/2006/main" noGrp="1"/>
-          </p:cNvSpPr>
-          <p:nvPr/>
-        </p:nvSpPr>
-        <p:spPr>
-          <a:xfrm xmlns:a="http://schemas.openxmlformats.org/drawingml/2006/main">
-            <a:off x="2400300" y="3619500"/>
-            <a:ext cx="3619500" cy="571500"/>
-          </a:xfrm>
-          <a:prstGeom xmlns:a="http://schemas.openxmlformats.org/drawingml/2006/main" prst="rect">
-            <a:avLst/>
-          </a:prstGeom>
-          <a:solidFill xmlns:a="http://schemas.openxmlformats.org/drawingml/2006/main">
-            <a:srgbClr val="F3F6F7"/>
-          </a:solidFill>
-          <a:ln xmlns:a="http://schemas.openxmlformats.org/drawingml/2006/main" w="0">
-            <a:noFill/>
-            <a:prstDash val="solid"/>
-          </a:ln>
-        </p:spPr>
-        <p:txBody>
-          <a:bodyPr xmlns:a="http://schemas.openxmlformats.org/drawingml/2006/main" lIns="76200" tIns="38100" rIns="76200" bIns="38100" anchor="ctr"/>
-          <a:lstStyle xmlns:a="http://schemas.openxmlformats.org/drawingml/2006/main"/>
-          <a:p xmlns:a="http://schemas.openxmlformats.org/drawingml/2006/main">
-            <a:pPr algn="l">
-              <a:defRPr sz="1350" b="1">
-                <a:solidFill>
-                  <a:srgbClr val="263746"/>
-                </a:solidFill>
-              </a:defRPr>
-            </a:pPr>
-            <a:r>
-              <a:rPr sz="1350" b="1">
-                <a:solidFill>
-                  <a:srgbClr val="263746"/>
-                </a:solidFill>
-                <a:latin typeface="Microsoft YaHei"/>
-                <a:ea typeface="Microsoft YaHei"/>
-                <a:cs typeface="Microsoft YaHei"/>
-              </a:rPr>
-              <a:t>五档 + 确认点</a:t>
-            </a:r>
-          </a:p>
-        </p:txBody>
-      </p:sp>
-      <p:sp>
-        <p:nvSpPr>
-          <p:cNvPr id="14" name="p18-4-l">
-            <a:extLst xmlns:a="http://schemas.openxmlformats.org/drawingml/2006/main">
-              <a:ext uri="{FF2B5EF4-FFF2-40B4-BE49-F238E27FC236}">
-                <a16:creationId xmlns:a16="http://schemas.microsoft.com/office/drawing/2014/main" id="{2AE9F251-2CF3-4158-B323-A2DEB96280DE}"/>
-              </a:ext>
-            </a:extLst>
-          </p:cNvPr>
-          <p:cNvSpPr>
-            <a:spLocks xmlns:a="http://schemas.openxmlformats.org/drawingml/2006/main" noGrp="1"/>
-          </p:cNvSpPr>
-          <p:nvPr/>
-        </p:nvSpPr>
-        <p:spPr>
-          <a:xfrm xmlns:a="http://schemas.openxmlformats.org/drawingml/2006/main">
-            <a:off x="6362700" y="990600"/>
-            <a:ext cx="1714500" cy="571500"/>
-          </a:xfrm>
-          <a:prstGeom xmlns:a="http://schemas.openxmlformats.org/drawingml/2006/main" prst="roundRect">
-            <a:avLst>
-              <a:gd name="adj" fmla="val 13333"/>
-            </a:avLst>
-          </a:prstGeom>
-          <a:solidFill xmlns:a="http://schemas.openxmlformats.org/drawingml/2006/main">
-            <a:srgbClr val="18354E"/>
-          </a:solidFill>
-          <a:ln xmlns:a="http://schemas.openxmlformats.org/drawingml/2006/main" w="0">
-            <a:noFill/>
-            <a:prstDash val="solid"/>
-          </a:ln>
-        </p:spPr>
-        <p:txBody>
-          <a:bodyPr xmlns:a="http://schemas.openxmlformats.org/drawingml/2006/main" lIns="76200" tIns="38100" rIns="76200" bIns="38100" anchor="ctr"/>
-          <a:lstStyle xmlns:a="http://schemas.openxmlformats.org/drawingml/2006/main"/>
-          <a:p xmlns:a="http://schemas.openxmlformats.org/drawingml/2006/main">
-            <a:pPr algn="ctr">
-              <a:defRPr sz="1350" b="1">
-                <a:solidFill>
-                  <a:srgbClr val="FFFFFF"/>
-                </a:solidFill>
-              </a:defRPr>
-            </a:pPr>
-            <a:r>
-              <a:rPr sz="1350" b="1">
-                <a:solidFill>
-                  <a:srgbClr val="FFFFFF"/>
-                </a:solidFill>
-                <a:latin typeface="Microsoft YaHei"/>
-                <a:ea typeface="Microsoft YaHei"/>
-                <a:cs typeface="Microsoft YaHei"/>
-              </a:rPr>
-              <a:t>5 执行循环</a:t>
-            </a:r>
-          </a:p>
-        </p:txBody>
-      </p:sp>
-      <p:sp>
-        <p:nvSpPr>
-          <p:cNvPr id="15" name="p18-4-t">
-            <a:extLst xmlns:a="http://schemas.openxmlformats.org/drawingml/2006/main">
-              <a:ext uri="{FF2B5EF4-FFF2-40B4-BE49-F238E27FC236}">
-                <a16:creationId xmlns:a16="http://schemas.microsoft.com/office/drawing/2014/main" id="{DEDBEC00-EB4E-4BF2-BC68-1A1B1885261A}"/>
-              </a:ext>
-            </a:extLst>
-          </p:cNvPr>
-          <p:cNvSpPr>
-            <a:spLocks xmlns:a="http://schemas.openxmlformats.org/drawingml/2006/main" noGrp="1"/>
-          </p:cNvSpPr>
-          <p:nvPr/>
-        </p:nvSpPr>
-        <p:spPr>
-          <a:xfrm xmlns:a="http://schemas.openxmlformats.org/drawingml/2006/main">
-            <a:off x="8229600" y="990600"/>
-            <a:ext cx="3619500" cy="571500"/>
-          </a:xfrm>
-          <a:prstGeom xmlns:a="http://schemas.openxmlformats.org/drawingml/2006/main" prst="rect">
-            <a:avLst/>
-          </a:prstGeom>
-          <a:solidFill xmlns:a="http://schemas.openxmlformats.org/drawingml/2006/main">
-            <a:srgbClr val="F3F6F7"/>
-          </a:solidFill>
-          <a:ln xmlns:a="http://schemas.openxmlformats.org/drawingml/2006/main" w="0">
-            <a:noFill/>
-            <a:prstDash val="solid"/>
-          </a:ln>
-        </p:spPr>
-        <p:txBody>
-          <a:bodyPr xmlns:a="http://schemas.openxmlformats.org/drawingml/2006/main" lIns="76200" tIns="38100" rIns="76200" bIns="38100" anchor="ctr"/>
-          <a:lstStyle xmlns:a="http://schemas.openxmlformats.org/drawingml/2006/main"/>
-          <a:p xmlns:a="http://schemas.openxmlformats.org/drawingml/2006/main">
-            <a:pPr algn="l">
-              <a:defRPr sz="1350" b="1">
-                <a:solidFill>
-                  <a:srgbClr val="263746"/>
-                </a:solidFill>
-              </a:defRPr>
-            </a:pPr>
-            <a:r>
-              <a:rPr sz="1350" b="1">
-                <a:solidFill>
-                  <a:srgbClr val="263746"/>
-                </a:solidFill>
-                <a:latin typeface="Microsoft YaHei"/>
-                <a:ea typeface="Microsoft YaHei"/>
-                <a:cs typeface="Microsoft YaHei"/>
-              </a:rPr>
-              <a:t>模式 / 预算 / 停止</a:t>
-            </a:r>
-          </a:p>
-        </p:txBody>
-      </p:sp>
-      <p:sp>
-        <p:nvSpPr>
-          <p:cNvPr id="16" name="p18-5-l">
-            <a:extLst xmlns:a="http://schemas.openxmlformats.org/drawingml/2006/main">
-              <a:ext uri="{FF2B5EF4-FFF2-40B4-BE49-F238E27FC236}">
-                <a16:creationId xmlns:a16="http://schemas.microsoft.com/office/drawing/2014/main" id="{80E520E7-3856-42A7-A997-A45E9C753D99}"/>
-              </a:ext>
-            </a:extLst>
-          </p:cNvPr>
-          <p:cNvSpPr>
-            <a:spLocks xmlns:a="http://schemas.openxmlformats.org/drawingml/2006/main" noGrp="1"/>
-          </p:cNvSpPr>
-          <p:nvPr/>
-        </p:nvSpPr>
-        <p:spPr>
-          <a:xfrm xmlns:a="http://schemas.openxmlformats.org/drawingml/2006/main">
-            <a:off x="6362700" y="1866900"/>
-            <a:ext cx="1714500" cy="571500"/>
-          </a:xfrm>
-          <a:prstGeom xmlns:a="http://schemas.openxmlformats.org/drawingml/2006/main" prst="roundRect">
-            <a:avLst>
-              <a:gd name="adj" fmla="val 13333"/>
-            </a:avLst>
-          </a:prstGeom>
-          <a:solidFill xmlns:a="http://schemas.openxmlformats.org/drawingml/2006/main">
-            <a:srgbClr val="18354E"/>
-          </a:solidFill>
-          <a:ln xmlns:a="http://schemas.openxmlformats.org/drawingml/2006/main" w="0">
-            <a:noFill/>
-            <a:prstDash val="solid"/>
-          </a:ln>
-        </p:spPr>
-        <p:txBody>
-          <a:bodyPr xmlns:a="http://schemas.openxmlformats.org/drawingml/2006/main" lIns="76200" tIns="38100" rIns="76200" bIns="38100" anchor="ctr"/>
-          <a:lstStyle xmlns:a="http://schemas.openxmlformats.org/drawingml/2006/main"/>
-          <a:p xmlns:a="http://schemas.openxmlformats.org/drawingml/2006/main">
-            <a:pPr algn="ctr">
-              <a:defRPr sz="1350" b="1">
-                <a:solidFill>
-                  <a:srgbClr val="FFFFFF"/>
-                </a:solidFill>
-              </a:defRPr>
-            </a:pPr>
-            <a:r>
-              <a:rPr sz="1350" b="1">
-                <a:solidFill>
-                  <a:srgbClr val="FFFFFF"/>
-                </a:solidFill>
-                <a:latin typeface="Microsoft YaHei"/>
-                <a:ea typeface="Microsoft YaHei"/>
-                <a:cs typeface="Microsoft YaHei"/>
-              </a:rPr>
-              <a:t>6 工件与追踪</a:t>
-            </a:r>
-          </a:p>
-        </p:txBody>
-      </p:sp>
-      <p:sp>
-        <p:nvSpPr>
-          <p:cNvPr id="17" name="p18-5-t">
-            <a:extLst xmlns:a="http://schemas.openxmlformats.org/drawingml/2006/main">
-              <a:ext uri="{FF2B5EF4-FFF2-40B4-BE49-F238E27FC236}">
-                <a16:creationId xmlns:a16="http://schemas.microsoft.com/office/drawing/2014/main" id="{DD7C220E-A1B8-4451-A9FE-ED0C9B9A2CC1}"/>
-              </a:ext>
-            </a:extLst>
-          </p:cNvPr>
-          <p:cNvSpPr>
-            <a:spLocks xmlns:a="http://schemas.openxmlformats.org/drawingml/2006/main" noGrp="1"/>
-          </p:cNvSpPr>
-          <p:nvPr/>
-        </p:nvSpPr>
-        <p:spPr>
-          <a:xfrm xmlns:a="http://schemas.openxmlformats.org/drawingml/2006/main">
-            <a:off x="8229600" y="1866900"/>
-            <a:ext cx="3619500" cy="571500"/>
-          </a:xfrm>
-          <a:prstGeom xmlns:a="http://schemas.openxmlformats.org/drawingml/2006/main" prst="rect">
-            <a:avLst/>
-          </a:prstGeom>
-          <a:solidFill xmlns:a="http://schemas.openxmlformats.org/drawingml/2006/main">
-            <a:srgbClr val="F3F6F7"/>
-          </a:solidFill>
-          <a:ln xmlns:a="http://schemas.openxmlformats.org/drawingml/2006/main" w="0">
-            <a:noFill/>
-            <a:prstDash val="solid"/>
-          </a:ln>
-        </p:spPr>
-        <p:txBody>
-          <a:bodyPr xmlns:a="http://schemas.openxmlformats.org/drawingml/2006/main" lIns="76200" tIns="38100" rIns="76200" bIns="38100" anchor="ctr"/>
-          <a:lstStyle xmlns:a="http://schemas.openxmlformats.org/drawingml/2006/main"/>
-          <a:p xmlns:a="http://schemas.openxmlformats.org/drawingml/2006/main">
-            <a:pPr algn="l">
-              <a:defRPr sz="1350" b="1">
-                <a:solidFill>
-                  <a:srgbClr val="263746"/>
-                </a:solidFill>
-              </a:defRPr>
-            </a:pPr>
-            <a:r>
-              <a:rPr sz="1350" b="1">
-                <a:solidFill>
-                  <a:srgbClr val="263746"/>
-                </a:solidFill>
-                <a:latin typeface="Microsoft YaHei"/>
-                <a:ea typeface="Microsoft YaHei"/>
-                <a:cs typeface="Microsoft YaHei"/>
-              </a:rPr>
-              <a:t>可回证据 / 实验 ID</a:t>
-            </a:r>
-          </a:p>
-        </p:txBody>
-      </p:sp>
-      <p:sp>
-        <p:nvSpPr>
-          <p:cNvPr id="18" name="p18-6-l">
-            <a:extLst xmlns:a="http://schemas.openxmlformats.org/drawingml/2006/main">
-              <a:ext uri="{FF2B5EF4-FFF2-40B4-BE49-F238E27FC236}">
-                <a16:creationId xmlns:a16="http://schemas.microsoft.com/office/drawing/2014/main" id="{FA6BAAA0-2930-4681-8836-2505915949E5}"/>
-              </a:ext>
-            </a:extLst>
-          </p:cNvPr>
-          <p:cNvSpPr>
-            <a:spLocks xmlns:a="http://schemas.openxmlformats.org/drawingml/2006/main" noGrp="1"/>
-          </p:cNvSpPr>
-          <p:nvPr/>
-        </p:nvSpPr>
-        <p:spPr>
-          <a:xfrm xmlns:a="http://schemas.openxmlformats.org/drawingml/2006/main">
-            <a:off x="6362700" y="2743200"/>
-            <a:ext cx="1714500" cy="571500"/>
-          </a:xfrm>
-          <a:prstGeom xmlns:a="http://schemas.openxmlformats.org/drawingml/2006/main" prst="roundRect">
-            <a:avLst>
-              <a:gd name="adj" fmla="val 13333"/>
-            </a:avLst>
-          </a:prstGeom>
-          <a:solidFill xmlns:a="http://schemas.openxmlformats.org/drawingml/2006/main">
-            <a:srgbClr val="18354E"/>
-          </a:solidFill>
-          <a:ln xmlns:a="http://schemas.openxmlformats.org/drawingml/2006/main" w="0">
-            <a:noFill/>
-            <a:prstDash val="solid"/>
-          </a:ln>
-        </p:spPr>
-        <p:txBody>
-          <a:bodyPr xmlns:a="http://schemas.openxmlformats.org/drawingml/2006/main" lIns="76200" tIns="38100" rIns="76200" bIns="38100" anchor="ctr"/>
-          <a:lstStyle xmlns:a="http://schemas.openxmlformats.org/drawingml/2006/main"/>
-          <a:p xmlns:a="http://schemas.openxmlformats.org/drawingml/2006/main">
-            <a:pPr algn="ctr">
-              <a:defRPr sz="1350" b="1">
-                <a:solidFill>
-                  <a:srgbClr val="FFFFFF"/>
-                </a:solidFill>
-              </a:defRPr>
-            </a:pPr>
-            <a:r>
-              <a:rPr sz="1350" b="1">
-                <a:solidFill>
-                  <a:srgbClr val="FFFFFF"/>
-                </a:solidFill>
-                <a:latin typeface="Microsoft YaHei"/>
-                <a:ea typeface="Microsoft YaHei"/>
-                <a:cs typeface="Microsoft YaHei"/>
-              </a:rPr>
-              <a:t>7 Evals + 人工</a:t>
-            </a:r>
-          </a:p>
-        </p:txBody>
-      </p:sp>
-      <p:sp>
-        <p:nvSpPr>
-          <p:cNvPr id="19" name="p18-6-t">
-            <a:extLst xmlns:a="http://schemas.openxmlformats.org/drawingml/2006/main">
-              <a:ext uri="{FF2B5EF4-FFF2-40B4-BE49-F238E27FC236}">
-                <a16:creationId xmlns:a16="http://schemas.microsoft.com/office/drawing/2014/main" id="{CB964203-21FA-47A2-A6BC-7A491F0B67D9}"/>
-              </a:ext>
-            </a:extLst>
-          </p:cNvPr>
-          <p:cNvSpPr>
-            <a:spLocks xmlns:a="http://schemas.openxmlformats.org/drawingml/2006/main" noGrp="1"/>
-          </p:cNvSpPr>
-          <p:nvPr/>
-        </p:nvSpPr>
-        <p:spPr>
-          <a:xfrm xmlns:a="http://schemas.openxmlformats.org/drawingml/2006/main">
-            <a:off x="8229600" y="2743200"/>
-            <a:ext cx="3619500" cy="571500"/>
-          </a:xfrm>
-          <a:prstGeom xmlns:a="http://schemas.openxmlformats.org/drawingml/2006/main" prst="rect">
-            <a:avLst/>
-          </a:prstGeom>
-          <a:solidFill xmlns:a="http://schemas.openxmlformats.org/drawingml/2006/main">
-            <a:srgbClr val="F3F6F7"/>
-          </a:solidFill>
-          <a:ln xmlns:a="http://schemas.openxmlformats.org/drawingml/2006/main" w="0">
-            <a:noFill/>
-            <a:prstDash val="solid"/>
-          </a:ln>
-        </p:spPr>
-        <p:txBody>
-          <a:bodyPr xmlns:a="http://schemas.openxmlformats.org/drawingml/2006/main" lIns="76200" tIns="38100" rIns="76200" bIns="38100" anchor="ctr"/>
-          <a:lstStyle xmlns:a="http://schemas.openxmlformats.org/drawingml/2006/main"/>
-          <a:p xmlns:a="http://schemas.openxmlformats.org/drawingml/2006/main">
-            <a:pPr algn="l">
-              <a:defRPr sz="1350" b="1">
-                <a:solidFill>
-                  <a:srgbClr val="263746"/>
-                </a:solidFill>
-              </a:defRPr>
-            </a:pPr>
-            <a:r>
-              <a:rPr sz="1350" b="1">
-                <a:solidFill>
-                  <a:srgbClr val="263746"/>
-                </a:solidFill>
-                <a:latin typeface="Microsoft YaHei"/>
-                <a:ea typeface="Microsoft YaHei"/>
-                <a:cs typeface="Microsoft YaHei"/>
-              </a:rPr>
-              <a:t>baseline / 指标 / 对照</a:t>
-            </a:r>
-          </a:p>
-        </p:txBody>
-      </p:sp>
-      <p:sp>
-        <p:nvSpPr>
-          <p:cNvPr id="20" name="p18-7-l">
-            <a:extLst xmlns:a="http://schemas.openxmlformats.org/drawingml/2006/main">
-              <a:ext uri="{FF2B5EF4-FFF2-40B4-BE49-F238E27FC236}">
-                <a16:creationId xmlns:a16="http://schemas.microsoft.com/office/drawing/2014/main" id="{EEE2372E-5E7E-40DE-A615-A0CFFB477780}"/>
-              </a:ext>
-            </a:extLst>
-          </p:cNvPr>
-          <p:cNvSpPr>
-            <a:spLocks xmlns:a="http://schemas.openxmlformats.org/drawingml/2006/main" noGrp="1"/>
-          </p:cNvSpPr>
-          <p:nvPr/>
-        </p:nvSpPr>
-        <p:spPr>
-          <a:xfrm xmlns:a="http://schemas.openxmlformats.org/drawingml/2006/main">
-            <a:off x="6362700" y="3619500"/>
-            <a:ext cx="1714500" cy="571500"/>
-          </a:xfrm>
-          <a:prstGeom xmlns:a="http://schemas.openxmlformats.org/drawingml/2006/main" prst="roundRect">
-            <a:avLst>
-              <a:gd name="adj" fmla="val 13333"/>
-            </a:avLst>
-          </a:prstGeom>
-          <a:solidFill xmlns:a="http://schemas.openxmlformats.org/drawingml/2006/main">
-            <a:srgbClr val="C8161E"/>
-          </a:solidFill>
-          <a:ln xmlns:a="http://schemas.openxmlformats.org/drawingml/2006/main" w="0">
-            <a:noFill/>
-            <a:prstDash val="solid"/>
-          </a:ln>
-        </p:spPr>
-        <p:txBody>
-          <a:bodyPr xmlns:a="http://schemas.openxmlformats.org/drawingml/2006/main" lIns="76200" tIns="38100" rIns="76200" bIns="38100" anchor="ctr"/>
-          <a:lstStyle xmlns:a="http://schemas.openxmlformats.org/drawingml/2006/main"/>
-          <a:p xmlns:a="http://schemas.openxmlformats.org/drawingml/2006/main">
-            <a:pPr algn="ctr">
-              <a:defRPr sz="1350" b="1">
-                <a:solidFill>
-                  <a:srgbClr val="FFFFFF"/>
-                </a:solidFill>
-              </a:defRPr>
-            </a:pPr>
-            <a:r>
-              <a:rPr sz="1350" b="1">
-                <a:solidFill>
-                  <a:srgbClr val="FFFFFF"/>
-                </a:solidFill>
-                <a:latin typeface="Microsoft YaHei"/>
-                <a:ea typeface="Microsoft YaHei"/>
-                <a:cs typeface="Microsoft YaHei"/>
-              </a:rPr>
-              <a:t>8 失败恢复</a:t>
-            </a:r>
-          </a:p>
-        </p:txBody>
-      </p:sp>
-      <p:sp>
-        <p:nvSpPr>
-          <p:cNvPr id="21" name="p18-7-t">
-            <a:extLst xmlns:a="http://schemas.openxmlformats.org/drawingml/2006/main">
-              <a:ext uri="{FF2B5EF4-FFF2-40B4-BE49-F238E27FC236}">
-                <a16:creationId xmlns:a16="http://schemas.microsoft.com/office/drawing/2014/main" id="{59487714-C4CF-4C5C-91A7-52DCB5AA8433}"/>
-              </a:ext>
-            </a:extLst>
-          </p:cNvPr>
-          <p:cNvSpPr>
-            <a:spLocks xmlns:a="http://schemas.openxmlformats.org/drawingml/2006/main" noGrp="1"/>
-          </p:cNvSpPr>
-          <p:nvPr/>
-        </p:nvSpPr>
-        <p:spPr>
-          <a:xfrm xmlns:a="http://schemas.openxmlformats.org/drawingml/2006/main">
-            <a:off x="8229600" y="3619500"/>
-            <a:ext cx="3619500" cy="571500"/>
-          </a:xfrm>
-          <a:prstGeom xmlns:a="http://schemas.openxmlformats.org/drawingml/2006/main" prst="rect">
-            <a:avLst/>
-          </a:prstGeom>
-          <a:solidFill xmlns:a="http://schemas.openxmlformats.org/drawingml/2006/main">
             <a:srgbClr val="F8E9EA"/>
           </a:solidFill>
           <a:ln xmlns:a="http://schemas.openxmlformats.org/drawingml/2006/main" w="0">
@@ -11754,70 +11005,15 @@
           <a:bodyPr xmlns:a="http://schemas.openxmlformats.org/drawingml/2006/main" lIns="76200" tIns="38100" rIns="76200" bIns="38100" anchor="ctr"/>
           <a:lstStyle xmlns:a="http://schemas.openxmlformats.org/drawingml/2006/main"/>
           <a:p xmlns:a="http://schemas.openxmlformats.org/drawingml/2006/main">
-            <a:pPr algn="l">
-              <a:defRPr sz="1350" b="1">
-                <a:solidFill>
-                  <a:srgbClr val="263746"/>
-                </a:solidFill>
-              </a:defRPr>
-            </a:pPr>
-            <a:r>
-              <a:rPr sz="1350" b="1">
-                <a:solidFill>
-                  <a:srgbClr val="263746"/>
-                </a:solidFill>
-                <a:latin typeface="Microsoft YaHei"/>
-                <a:ea typeface="Microsoft YaHei"/>
-                <a:cs typeface="Microsoft YaHei"/>
-              </a:rPr>
-              <a:t>保留、回退、核验</a:t>
-            </a:r>
-          </a:p>
-        </p:txBody>
-      </p:sp>
-      <p:sp>
-        <p:nvSpPr>
-          <p:cNvPr id="22" name="p18-bottom">
-            <a:extLst xmlns:a="http://schemas.openxmlformats.org/drawingml/2006/main">
-              <a:ext uri="{FF2B5EF4-FFF2-40B4-BE49-F238E27FC236}">
-                <a16:creationId xmlns:a16="http://schemas.microsoft.com/office/drawing/2014/main" id="{F0CCD065-1356-408B-B675-57D29B21B7D1}"/>
-              </a:ext>
-            </a:extLst>
-          </p:cNvPr>
-          <p:cNvSpPr>
-            <a:spLocks xmlns:a="http://schemas.openxmlformats.org/drawingml/2006/main" noGrp="1"/>
-          </p:cNvSpPr>
-          <p:nvPr/>
-        </p:nvSpPr>
-        <p:spPr>
-          <a:xfrm xmlns:a="http://schemas.openxmlformats.org/drawingml/2006/main">
-            <a:off x="1524000" y="4895850"/>
-            <a:ext cx="9144000" cy="628650"/>
-          </a:xfrm>
-          <a:prstGeom xmlns:a="http://schemas.openxmlformats.org/drawingml/2006/main" prst="rect">
-            <a:avLst/>
-          </a:prstGeom>
-          <a:solidFill xmlns:a="http://schemas.openxmlformats.org/drawingml/2006/main">
-            <a:srgbClr val="F8E9EA"/>
-          </a:solidFill>
-          <a:ln xmlns:a="http://schemas.openxmlformats.org/drawingml/2006/main" w="0">
-            <a:noFill/>
-            <a:prstDash val="solid"/>
-          </a:ln>
-        </p:spPr>
-        <p:txBody>
-          <a:bodyPr xmlns:a="http://schemas.openxmlformats.org/drawingml/2006/main" lIns="76200" tIns="38100" rIns="76200" bIns="38100" anchor="ctr"/>
-          <a:lstStyle xmlns:a="http://schemas.openxmlformats.org/drawingml/2006/main"/>
-          <a:p xmlns:a="http://schemas.openxmlformats.org/drawingml/2006/main">
-            <a:pPr algn="ctr">
-              <a:defRPr sz="1500" b="1">
+            <a:pPr algn="ctr">
+              <a:defRPr sz="1800" b="1">
                 <a:solidFill>
                   <a:srgbClr val="C8161E"/>
                 </a:solidFill>
               </a:defRPr>
             </a:pPr>
             <a:r>
-              <a:rPr sz="1500" b="1">
+              <a:rPr sz="1800" b="1">
                 <a:solidFill>
                   <a:srgbClr val="C8161E"/>
                 </a:solidFill>
@@ -11825,7 +11021,7 @@
                 <a:ea typeface="Microsoft YaHei"/>
                 <a:cs typeface="Microsoft YaHei"/>
               </a:rPr>
-              <a:t>设计前置 ≠ 验证门完成：第 13 课还要实际运行、评价、影响报告、证据回写与合规更新。</a:t>
+              <a:t>设计前置 ≠ 验证门完成｜第 13 课还要实际运行、评价、报告与回写。</a:t>
             </a:r>
           </a:p>
         </p:txBody>
@@ -11929,7 +11125,7 @@
           <p:cNvPr id="6" name="p19-n0">
             <a:extLst xmlns:a="http://schemas.openxmlformats.org/drawingml/2006/main">
               <a:ext uri="{FF2B5EF4-FFF2-40B4-BE49-F238E27FC236}">
-                <a16:creationId xmlns:a16="http://schemas.microsoft.com/office/drawing/2014/main" id="{9A13523D-39EE-45B2-8DB7-6AE04A296E2E}"/>
+                <a16:creationId xmlns:a16="http://schemas.microsoft.com/office/drawing/2014/main" id="{77F85A53-7508-4894-AB39-E830CE9DBFC6}"/>
               </a:ext>
             </a:extLst>
           </p:cNvPr>
@@ -11986,7 +11182,7 @@
           <p:cNvPr id="7" name="p19-a0">
             <a:extLst xmlns:a="http://schemas.openxmlformats.org/drawingml/2006/main">
               <a:ext uri="{FF2B5EF4-FFF2-40B4-BE49-F238E27FC236}">
-                <a16:creationId xmlns:a16="http://schemas.microsoft.com/office/drawing/2014/main" id="{9369F3AD-6FCC-45F6-9551-654FAA31DB1F}"/>
+                <a16:creationId xmlns:a16="http://schemas.microsoft.com/office/drawing/2014/main" id="{A0073D4D-7009-45C5-9BC7-70B14B1A512E}"/>
               </a:ext>
             </a:extLst>
           </p:cNvPr>
@@ -12041,7 +11237,7 @@
           <p:cNvPr id="8" name="p19-b0">
             <a:extLst xmlns:a="http://schemas.openxmlformats.org/drawingml/2006/main">
               <a:ext uri="{FF2B5EF4-FFF2-40B4-BE49-F238E27FC236}">
-                <a16:creationId xmlns:a16="http://schemas.microsoft.com/office/drawing/2014/main" id="{CCE3452B-43AB-4910-B93A-2A74B1A5DFF6}"/>
+                <a16:creationId xmlns:a16="http://schemas.microsoft.com/office/drawing/2014/main" id="{AF54B77E-8A14-4E2F-A96A-AF59027EDC63}"/>
               </a:ext>
             </a:extLst>
           </p:cNvPr>
@@ -12096,7 +11292,7 @@
           <p:cNvPr id="9" name="p19-n1">
             <a:extLst xmlns:a="http://schemas.openxmlformats.org/drawingml/2006/main">
               <a:ext uri="{FF2B5EF4-FFF2-40B4-BE49-F238E27FC236}">
-                <a16:creationId xmlns:a16="http://schemas.microsoft.com/office/drawing/2014/main" id="{D9D74406-F968-455B-88A2-D514BB8E397E}"/>
+                <a16:creationId xmlns:a16="http://schemas.microsoft.com/office/drawing/2014/main" id="{4684A542-D7E3-4CDA-A512-BEE87EEA43BB}"/>
               </a:ext>
             </a:extLst>
           </p:cNvPr>
@@ -12153,7 +11349,7 @@
           <p:cNvPr id="10" name="p19-a1">
             <a:extLst xmlns:a="http://schemas.openxmlformats.org/drawingml/2006/main">
               <a:ext uri="{FF2B5EF4-FFF2-40B4-BE49-F238E27FC236}">
-                <a16:creationId xmlns:a16="http://schemas.microsoft.com/office/drawing/2014/main" id="{98E9BFEE-50F9-41C0-BCD9-934F2A0A26C9}"/>
+                <a16:creationId xmlns:a16="http://schemas.microsoft.com/office/drawing/2014/main" id="{F3FF9694-7A7F-4D6D-A442-7ECB44C96717}"/>
               </a:ext>
             </a:extLst>
           </p:cNvPr>
@@ -12208,7 +11404,7 @@
           <p:cNvPr id="11" name="p19-b1">
             <a:extLst xmlns:a="http://schemas.openxmlformats.org/drawingml/2006/main">
               <a:ext uri="{FF2B5EF4-FFF2-40B4-BE49-F238E27FC236}">
-                <a16:creationId xmlns:a16="http://schemas.microsoft.com/office/drawing/2014/main" id="{A5A5A5B2-D696-4504-AAAF-0F79673BE812}"/>
+                <a16:creationId xmlns:a16="http://schemas.microsoft.com/office/drawing/2014/main" id="{D5BF8C55-EC0E-4AB3-8157-EC6F0E6084B5}"/>
               </a:ext>
             </a:extLst>
           </p:cNvPr>
@@ -12263,7 +11459,7 @@
           <p:cNvPr id="12" name="p19-n2">
             <a:extLst xmlns:a="http://schemas.openxmlformats.org/drawingml/2006/main">
               <a:ext uri="{FF2B5EF4-FFF2-40B4-BE49-F238E27FC236}">
-                <a16:creationId xmlns:a16="http://schemas.microsoft.com/office/drawing/2014/main" id="{C141ED99-3550-4F18-BB59-4CC59EB9A4D4}"/>
+                <a16:creationId xmlns:a16="http://schemas.microsoft.com/office/drawing/2014/main" id="{AEC645DC-D828-4028-96AA-3BD47610BEA1}"/>
               </a:ext>
             </a:extLst>
           </p:cNvPr>
@@ -12320,7 +11516,7 @@
           <p:cNvPr id="13" name="p19-a2">
             <a:extLst xmlns:a="http://schemas.openxmlformats.org/drawingml/2006/main">
               <a:ext uri="{FF2B5EF4-FFF2-40B4-BE49-F238E27FC236}">
-                <a16:creationId xmlns:a16="http://schemas.microsoft.com/office/drawing/2014/main" id="{E443F2D7-082F-41D8-B2B2-6801EE412656}"/>
+                <a16:creationId xmlns:a16="http://schemas.microsoft.com/office/drawing/2014/main" id="{25B9D488-47E0-4649-ABE6-81B3A172C318}"/>
               </a:ext>
             </a:extLst>
           </p:cNvPr>
@@ -12375,7 +11571,7 @@
           <p:cNvPr id="14" name="p19-b2">
             <a:extLst xmlns:a="http://schemas.openxmlformats.org/drawingml/2006/main">
               <a:ext uri="{FF2B5EF4-FFF2-40B4-BE49-F238E27FC236}">
-                <a16:creationId xmlns:a16="http://schemas.microsoft.com/office/drawing/2014/main" id="{D0FAA5A3-9FDB-48D7-819E-A94E4666A15B}"/>
+                <a16:creationId xmlns:a16="http://schemas.microsoft.com/office/drawing/2014/main" id="{291ED83E-3643-434F-ACFA-A1F2FD5C6A6A}"/>
               </a:ext>
             </a:extLst>
           </p:cNvPr>
@@ -12430,7 +11626,7 @@
           <p:cNvPr id="15" name="p19-status">
             <a:extLst xmlns:a="http://schemas.openxmlformats.org/drawingml/2006/main">
               <a:ext uri="{FF2B5EF4-FFF2-40B4-BE49-F238E27FC236}">
-                <a16:creationId xmlns:a16="http://schemas.microsoft.com/office/drawing/2014/main" id="{59A3B785-0E9B-4B44-A8DE-D176E2D79D9D}"/>
+                <a16:creationId xmlns:a16="http://schemas.microsoft.com/office/drawing/2014/main" id="{9D8C6540-82EE-4976-80F9-77A4888E86A3}"/>
               </a:ext>
             </a:extLst>
           </p:cNvPr>
@@ -12579,7 +11775,7 @@
           <p:cNvPr id="6" name="p02-n0">
             <a:extLst xmlns:a="http://schemas.openxmlformats.org/drawingml/2006/main">
               <a:ext uri="{FF2B5EF4-FFF2-40B4-BE49-F238E27FC236}">
-                <a16:creationId xmlns:a16="http://schemas.microsoft.com/office/drawing/2014/main" id="{50E40AD1-D57E-4EFC-B1C1-6F6331377476}"/>
+                <a16:creationId xmlns:a16="http://schemas.microsoft.com/office/drawing/2014/main" id="{9F7D8D99-E5E5-4C92-A069-B01D1B97E510}"/>
               </a:ext>
             </a:extLst>
           </p:cNvPr>
@@ -12636,7 +11832,7 @@
           <p:cNvPr id="7" name="p02-t0">
             <a:extLst xmlns:a="http://schemas.openxmlformats.org/drawingml/2006/main">
               <a:ext uri="{FF2B5EF4-FFF2-40B4-BE49-F238E27FC236}">
-                <a16:creationId xmlns:a16="http://schemas.microsoft.com/office/drawing/2014/main" id="{1042240F-C246-4BFE-BC02-4669E997F4B9}"/>
+                <a16:creationId xmlns:a16="http://schemas.microsoft.com/office/drawing/2014/main" id="{09B210EA-8EE3-4487-A81A-69D968A923B7}"/>
               </a:ext>
             </a:extLst>
           </p:cNvPr>
@@ -12691,7 +11887,7 @@
           <p:cNvPr id="8" name="p02-a0">
             <a:extLst xmlns:a="http://schemas.openxmlformats.org/drawingml/2006/main">
               <a:ext uri="{FF2B5EF4-FFF2-40B4-BE49-F238E27FC236}">
-                <a16:creationId xmlns:a16="http://schemas.microsoft.com/office/drawing/2014/main" id="{80E0D228-BCAB-4E10-AD5C-FDCE2DA2CD98}"/>
+                <a16:creationId xmlns:a16="http://schemas.microsoft.com/office/drawing/2014/main" id="{BBC9CD5A-A40C-45B6-BFF6-3DFE8C5A79EE}"/>
               </a:ext>
             </a:extLst>
           </p:cNvPr>
@@ -12722,7 +11918,7 @@
           <p:cNvPr id="9" name="p02-n1">
             <a:extLst xmlns:a="http://schemas.openxmlformats.org/drawingml/2006/main">
               <a:ext uri="{FF2B5EF4-FFF2-40B4-BE49-F238E27FC236}">
-                <a16:creationId xmlns:a16="http://schemas.microsoft.com/office/drawing/2014/main" id="{F30FDBFC-CDD2-4876-8620-57B53A5ECCFA}"/>
+                <a16:creationId xmlns:a16="http://schemas.microsoft.com/office/drawing/2014/main" id="{88B75CAE-258A-487D-8E56-17A1EDF8375B}"/>
               </a:ext>
             </a:extLst>
           </p:cNvPr>
@@ -12779,7 +11975,7 @@
           <p:cNvPr id="10" name="p02-t1">
             <a:extLst xmlns:a="http://schemas.openxmlformats.org/drawingml/2006/main">
               <a:ext uri="{FF2B5EF4-FFF2-40B4-BE49-F238E27FC236}">
-                <a16:creationId xmlns:a16="http://schemas.microsoft.com/office/drawing/2014/main" id="{7306A7C5-C857-463A-A55F-620AD8EF48EC}"/>
+                <a16:creationId xmlns:a16="http://schemas.microsoft.com/office/drawing/2014/main" id="{E17E0CD9-687C-4AF3-8C60-C547E5B9B070}"/>
               </a:ext>
             </a:extLst>
           </p:cNvPr>
@@ -12834,7 +12030,7 @@
           <p:cNvPr id="11" name="p02-a1">
             <a:extLst xmlns:a="http://schemas.openxmlformats.org/drawingml/2006/main">
               <a:ext uri="{FF2B5EF4-FFF2-40B4-BE49-F238E27FC236}">
-                <a16:creationId xmlns:a16="http://schemas.microsoft.com/office/drawing/2014/main" id="{CC3D969C-00DE-410A-B10C-A643E995CB43}"/>
+                <a16:creationId xmlns:a16="http://schemas.microsoft.com/office/drawing/2014/main" id="{FC5EDB5C-205C-4673-9AE2-36F687B7A1DA}"/>
               </a:ext>
             </a:extLst>
           </p:cNvPr>
@@ -12865,7 +12061,7 @@
           <p:cNvPr id="12" name="p02-n2">
             <a:extLst xmlns:a="http://schemas.openxmlformats.org/drawingml/2006/main">
               <a:ext uri="{FF2B5EF4-FFF2-40B4-BE49-F238E27FC236}">
-                <a16:creationId xmlns:a16="http://schemas.microsoft.com/office/drawing/2014/main" id="{CFB587F6-8350-4652-B6D5-C55EB9BAD056}"/>
+                <a16:creationId xmlns:a16="http://schemas.microsoft.com/office/drawing/2014/main" id="{23A7625C-4BCD-46F3-9967-C660BAF9CAF8}"/>
               </a:ext>
             </a:extLst>
           </p:cNvPr>
@@ -12922,7 +12118,7 @@
           <p:cNvPr id="13" name="p02-t2">
             <a:extLst xmlns:a="http://schemas.openxmlformats.org/drawingml/2006/main">
               <a:ext uri="{FF2B5EF4-FFF2-40B4-BE49-F238E27FC236}">
-                <a16:creationId xmlns:a16="http://schemas.microsoft.com/office/drawing/2014/main" id="{0A9DDF39-E158-42DC-A55D-1BFFEABBF4B5}"/>
+                <a16:creationId xmlns:a16="http://schemas.microsoft.com/office/drawing/2014/main" id="{20BA0AE0-BEA7-45F2-A6E5-3F1A9E50ABBE}"/>
               </a:ext>
             </a:extLst>
           </p:cNvPr>
@@ -12977,7 +12173,7 @@
           <p:cNvPr id="14" name="p02-a2">
             <a:extLst xmlns:a="http://schemas.openxmlformats.org/drawingml/2006/main">
               <a:ext uri="{FF2B5EF4-FFF2-40B4-BE49-F238E27FC236}">
-                <a16:creationId xmlns:a16="http://schemas.microsoft.com/office/drawing/2014/main" id="{56F37EDD-42C5-4CEB-B850-8896451AA413}"/>
+                <a16:creationId xmlns:a16="http://schemas.microsoft.com/office/drawing/2014/main" id="{051850A6-B503-4148-8C20-F4B7F50EB251}"/>
               </a:ext>
             </a:extLst>
           </p:cNvPr>
@@ -13008,7 +12204,7 @@
           <p:cNvPr id="15" name="p02-n3">
             <a:extLst xmlns:a="http://schemas.openxmlformats.org/drawingml/2006/main">
               <a:ext uri="{FF2B5EF4-FFF2-40B4-BE49-F238E27FC236}">
-                <a16:creationId xmlns:a16="http://schemas.microsoft.com/office/drawing/2014/main" id="{85F930EA-D5AC-4B4C-9A13-C82F09256B86}"/>
+                <a16:creationId xmlns:a16="http://schemas.microsoft.com/office/drawing/2014/main" id="{693C4FFC-1FBD-45A3-B8D2-ADD3669DC9CC}"/>
               </a:ext>
             </a:extLst>
           </p:cNvPr>
@@ -13065,7 +12261,7 @@
           <p:cNvPr id="16" name="p02-t3">
             <a:extLst xmlns:a="http://schemas.openxmlformats.org/drawingml/2006/main">
               <a:ext uri="{FF2B5EF4-FFF2-40B4-BE49-F238E27FC236}">
-                <a16:creationId xmlns:a16="http://schemas.microsoft.com/office/drawing/2014/main" id="{32F9BAE4-30EE-4BB9-8D8A-4E2B3F3749CC}"/>
+                <a16:creationId xmlns:a16="http://schemas.microsoft.com/office/drawing/2014/main" id="{D6AFA41E-859D-405B-B5AC-E2B0A79D945E}"/>
               </a:ext>
             </a:extLst>
           </p:cNvPr>
@@ -13120,7 +12316,7 @@
           <p:cNvPr id="17" name="p02-n4">
             <a:extLst xmlns:a="http://schemas.openxmlformats.org/drawingml/2006/main">
               <a:ext uri="{FF2B5EF4-FFF2-40B4-BE49-F238E27FC236}">
-                <a16:creationId xmlns:a16="http://schemas.microsoft.com/office/drawing/2014/main" id="{C87BBB8C-FC07-455D-8E03-2C549E4F9E45}"/>
+                <a16:creationId xmlns:a16="http://schemas.microsoft.com/office/drawing/2014/main" id="{D4CF64E1-F8B5-402E-A5F8-4FF30BC95CB9}"/>
               </a:ext>
             </a:extLst>
           </p:cNvPr>
@@ -13177,7 +12373,7 @@
           <p:cNvPr id="18" name="p02-t4">
             <a:extLst xmlns:a="http://schemas.openxmlformats.org/drawingml/2006/main">
               <a:ext uri="{FF2B5EF4-FFF2-40B4-BE49-F238E27FC236}">
-                <a16:creationId xmlns:a16="http://schemas.microsoft.com/office/drawing/2014/main" id="{1FC3FE0D-AACF-412B-B3BF-39F6726770F9}"/>
+                <a16:creationId xmlns:a16="http://schemas.microsoft.com/office/drawing/2014/main" id="{70D57CA7-14B4-4DE6-BA08-0C639C06DFA6}"/>
               </a:ext>
             </a:extLst>
           </p:cNvPr>
@@ -13232,7 +12428,7 @@
           <p:cNvPr id="19" name="p02-a4">
             <a:extLst xmlns:a="http://schemas.openxmlformats.org/drawingml/2006/main">
               <a:ext uri="{FF2B5EF4-FFF2-40B4-BE49-F238E27FC236}">
-                <a16:creationId xmlns:a16="http://schemas.microsoft.com/office/drawing/2014/main" id="{7A844E3F-38A0-4A11-8501-6C061B987B85}"/>
+                <a16:creationId xmlns:a16="http://schemas.microsoft.com/office/drawing/2014/main" id="{961717AB-6A47-4C33-B9FF-F9C1353F25B6}"/>
               </a:ext>
             </a:extLst>
           </p:cNvPr>
@@ -13263,7 +12459,7 @@
           <p:cNvPr id="20" name="p02-n5">
             <a:extLst xmlns:a="http://schemas.openxmlformats.org/drawingml/2006/main">
               <a:ext uri="{FF2B5EF4-FFF2-40B4-BE49-F238E27FC236}">
-                <a16:creationId xmlns:a16="http://schemas.microsoft.com/office/drawing/2014/main" id="{650BD5F2-7BB6-4A0C-8929-C60088F26532}"/>
+                <a16:creationId xmlns:a16="http://schemas.microsoft.com/office/drawing/2014/main" id="{6C8A0F9E-4B99-4EC2-BE93-43F37C7207A3}"/>
               </a:ext>
             </a:extLst>
           </p:cNvPr>
@@ -13320,7 +12516,7 @@
           <p:cNvPr id="21" name="p02-t5">
             <a:extLst xmlns:a="http://schemas.openxmlformats.org/drawingml/2006/main">
               <a:ext uri="{FF2B5EF4-FFF2-40B4-BE49-F238E27FC236}">
-                <a16:creationId xmlns:a16="http://schemas.microsoft.com/office/drawing/2014/main" id="{2827F104-F415-4BBB-A035-1A44BF114AC2}"/>
+                <a16:creationId xmlns:a16="http://schemas.microsoft.com/office/drawing/2014/main" id="{B73C1E1B-5BCD-468A-8EE9-450FC835D0BF}"/>
               </a:ext>
             </a:extLst>
           </p:cNvPr>
@@ -13375,7 +12571,7 @@
           <p:cNvPr id="22" name="p02-a5">
             <a:extLst xmlns:a="http://schemas.openxmlformats.org/drawingml/2006/main">
               <a:ext uri="{FF2B5EF4-FFF2-40B4-BE49-F238E27FC236}">
-                <a16:creationId xmlns:a16="http://schemas.microsoft.com/office/drawing/2014/main" id="{E885A0DC-9D42-48CB-8ED8-91F13FDF554F}"/>
+                <a16:creationId xmlns:a16="http://schemas.microsoft.com/office/drawing/2014/main" id="{FDD463D0-B911-4252-AD23-98F93F6BB9E0}"/>
               </a:ext>
             </a:extLst>
           </p:cNvPr>
@@ -13406,7 +12602,7 @@
           <p:cNvPr id="23" name="p02-n6">
             <a:extLst xmlns:a="http://schemas.openxmlformats.org/drawingml/2006/main">
               <a:ext uri="{FF2B5EF4-FFF2-40B4-BE49-F238E27FC236}">
-                <a16:creationId xmlns:a16="http://schemas.microsoft.com/office/drawing/2014/main" id="{1980BBC4-E0FC-42EF-998D-EB92E6DF82CA}"/>
+                <a16:creationId xmlns:a16="http://schemas.microsoft.com/office/drawing/2014/main" id="{9FE9F552-D7BD-4A5F-A0B9-C4C990F7A75C}"/>
               </a:ext>
             </a:extLst>
           </p:cNvPr>
@@ -13463,7 +12659,7 @@
           <p:cNvPr id="24" name="p02-t6">
             <a:extLst xmlns:a="http://schemas.openxmlformats.org/drawingml/2006/main">
               <a:ext uri="{FF2B5EF4-FFF2-40B4-BE49-F238E27FC236}">
-                <a16:creationId xmlns:a16="http://schemas.microsoft.com/office/drawing/2014/main" id="{A3DC38DC-BB9C-45B2-800D-516B06AE39C7}"/>
+                <a16:creationId xmlns:a16="http://schemas.microsoft.com/office/drawing/2014/main" id="{2B63F76F-732F-46A1-AEE3-D14E2352F421}"/>
               </a:ext>
             </a:extLst>
           </p:cNvPr>
@@ -13518,7 +12714,7 @@
           <p:cNvPr id="25" name="p02-a6">
             <a:extLst xmlns:a="http://schemas.openxmlformats.org/drawingml/2006/main">
               <a:ext uri="{FF2B5EF4-FFF2-40B4-BE49-F238E27FC236}">
-                <a16:creationId xmlns:a16="http://schemas.microsoft.com/office/drawing/2014/main" id="{A38604B9-2AFF-4759-9443-45DB07C05991}"/>
+                <a16:creationId xmlns:a16="http://schemas.microsoft.com/office/drawing/2014/main" id="{2EF33F47-3C6A-4EA0-AE5E-4AED12A7A04A}"/>
               </a:ext>
             </a:extLst>
           </p:cNvPr>
@@ -13549,7 +12745,7 @@
           <p:cNvPr id="26" name="p02-n7">
             <a:extLst xmlns:a="http://schemas.openxmlformats.org/drawingml/2006/main">
               <a:ext uri="{FF2B5EF4-FFF2-40B4-BE49-F238E27FC236}">
-                <a16:creationId xmlns:a16="http://schemas.microsoft.com/office/drawing/2014/main" id="{5FE5B246-8680-411A-9D5F-AA0C0E16C231}"/>
+                <a16:creationId xmlns:a16="http://schemas.microsoft.com/office/drawing/2014/main" id="{47C7DD0E-89F4-4401-982F-4A997357C27C}"/>
               </a:ext>
             </a:extLst>
           </p:cNvPr>
@@ -13606,7 +12802,7 @@
           <p:cNvPr id="27" name="p02-t7">
             <a:extLst xmlns:a="http://schemas.openxmlformats.org/drawingml/2006/main">
               <a:ext uri="{FF2B5EF4-FFF2-40B4-BE49-F238E27FC236}">
-                <a16:creationId xmlns:a16="http://schemas.microsoft.com/office/drawing/2014/main" id="{8AAF4B01-621E-44FD-BC30-9C88D5512B75}"/>
+                <a16:creationId xmlns:a16="http://schemas.microsoft.com/office/drawing/2014/main" id="{A9A10BCB-3EE2-4195-A361-60696E0A1F66}"/>
               </a:ext>
             </a:extLst>
           </p:cNvPr>
@@ -13661,7 +12857,7 @@
           <p:cNvPr id="28" name="p02-down">
             <a:extLst xmlns:a="http://schemas.openxmlformats.org/drawingml/2006/main">
               <a:ext uri="{FF2B5EF4-FFF2-40B4-BE49-F238E27FC236}">
-                <a16:creationId xmlns:a16="http://schemas.microsoft.com/office/drawing/2014/main" id="{9B37A784-46F6-419B-8FF4-64E754A1628F}"/>
+                <a16:creationId xmlns:a16="http://schemas.microsoft.com/office/drawing/2014/main" id="{D398FCCB-29DF-46A7-B863-D4EA0C1ADE0B}"/>
               </a:ext>
             </a:extLst>
           </p:cNvPr>
@@ -13692,7 +12888,7 @@
           <p:cNvPr id="29" name="p02-back">
             <a:extLst xmlns:a="http://schemas.openxmlformats.org/drawingml/2006/main">
               <a:ext uri="{FF2B5EF4-FFF2-40B4-BE49-F238E27FC236}">
-                <a16:creationId xmlns:a16="http://schemas.microsoft.com/office/drawing/2014/main" id="{2697F8ED-2E6C-4A3F-9B8B-62973095BB08}"/>
+                <a16:creationId xmlns:a16="http://schemas.microsoft.com/office/drawing/2014/main" id="{0806971B-E476-43C6-85B6-5F8EB2694254}"/>
               </a:ext>
             </a:extLst>
           </p:cNvPr>
@@ -13723,7 +12919,7 @@
           <p:cNvPr id="30" name="p02-actions">
             <a:extLst xmlns:a="http://schemas.openxmlformats.org/drawingml/2006/main">
               <a:ext uri="{FF2B5EF4-FFF2-40B4-BE49-F238E27FC236}">
-                <a16:creationId xmlns:a16="http://schemas.microsoft.com/office/drawing/2014/main" id="{043C04BB-729C-4EEF-8EFD-466BCA5B5A75}"/>
+                <a16:creationId xmlns:a16="http://schemas.microsoft.com/office/drawing/2014/main" id="{AB23E048-16B3-4DAA-B507-CF7488EB1D36}"/>
               </a:ext>
             </a:extLst>
           </p:cNvPr>
@@ -13778,7 +12974,7 @@
           <p:cNvPr id="31" name="p02-bottom">
             <a:extLst xmlns:a="http://schemas.openxmlformats.org/drawingml/2006/main">
               <a:ext uri="{FF2B5EF4-FFF2-40B4-BE49-F238E27FC236}">
-                <a16:creationId xmlns:a16="http://schemas.microsoft.com/office/drawing/2014/main" id="{0B018BF4-C7A4-46D8-84A2-A5FF624EB2B0}"/>
+                <a16:creationId xmlns:a16="http://schemas.microsoft.com/office/drawing/2014/main" id="{1FEC095A-7440-460F-8BB7-FAF2EB364F55}"/>
               </a:ext>
             </a:extLst>
           </p:cNvPr>
@@ -13927,7 +13123,7 @@
           <p:cNvPr id="6" name="p20-left-title">
             <a:extLst xmlns:a="http://schemas.openxmlformats.org/drawingml/2006/main">
               <a:ext uri="{FF2B5EF4-FFF2-40B4-BE49-F238E27FC236}">
-                <a16:creationId xmlns:a16="http://schemas.microsoft.com/office/drawing/2014/main" id="{FE066EBC-DEB4-4814-B08E-B86C36E06A08}"/>
+                <a16:creationId xmlns:a16="http://schemas.microsoft.com/office/drawing/2014/main" id="{94A62A7F-F181-44A1-93DF-CF6643549B28}"/>
               </a:ext>
             </a:extLst>
           </p:cNvPr>
@@ -13980,7 +13176,7 @@
           <p:cNvPr id="7" name="p20-n0">
             <a:extLst xmlns:a="http://schemas.openxmlformats.org/drawingml/2006/main">
               <a:ext uri="{FF2B5EF4-FFF2-40B4-BE49-F238E27FC236}">
-                <a16:creationId xmlns:a16="http://schemas.microsoft.com/office/drawing/2014/main" id="{2BAFA034-7417-4716-A8F2-BC98E9F66EF3}"/>
+                <a16:creationId xmlns:a16="http://schemas.microsoft.com/office/drawing/2014/main" id="{A241A69B-97FA-468F-ADB3-F1F5008A5F17}"/>
               </a:ext>
             </a:extLst>
           </p:cNvPr>
@@ -14037,7 +13233,7 @@
           <p:cNvPr id="8" name="p20-t0">
             <a:extLst xmlns:a="http://schemas.openxmlformats.org/drawingml/2006/main">
               <a:ext uri="{FF2B5EF4-FFF2-40B4-BE49-F238E27FC236}">
-                <a16:creationId xmlns:a16="http://schemas.microsoft.com/office/drawing/2014/main" id="{3A926278-BF1E-4941-BC06-ADC7F36B57A4}"/>
+                <a16:creationId xmlns:a16="http://schemas.microsoft.com/office/drawing/2014/main" id="{2D5F7C62-FA88-4D0A-A366-F53A39C44B99}"/>
               </a:ext>
             </a:extLst>
           </p:cNvPr>
@@ -14092,7 +13288,7 @@
           <p:cNvPr id="9" name="p20-n1">
             <a:extLst xmlns:a="http://schemas.openxmlformats.org/drawingml/2006/main">
               <a:ext uri="{FF2B5EF4-FFF2-40B4-BE49-F238E27FC236}">
-                <a16:creationId xmlns:a16="http://schemas.microsoft.com/office/drawing/2014/main" id="{BB14803F-7627-4F0C-B3EC-FF4E07756216}"/>
+                <a16:creationId xmlns:a16="http://schemas.microsoft.com/office/drawing/2014/main" id="{6B130874-DC53-4F64-90AE-A0C3AFECB468}"/>
               </a:ext>
             </a:extLst>
           </p:cNvPr>
@@ -14149,7 +13345,7 @@
           <p:cNvPr id="10" name="p20-t1">
             <a:extLst xmlns:a="http://schemas.openxmlformats.org/drawingml/2006/main">
               <a:ext uri="{FF2B5EF4-FFF2-40B4-BE49-F238E27FC236}">
-                <a16:creationId xmlns:a16="http://schemas.microsoft.com/office/drawing/2014/main" id="{2514F229-FEA3-4441-9F73-BEE209DCED30}"/>
+                <a16:creationId xmlns:a16="http://schemas.microsoft.com/office/drawing/2014/main" id="{836415F6-9793-4FA0-9BF2-F9721554335B}"/>
               </a:ext>
             </a:extLst>
           </p:cNvPr>
@@ -14204,7 +13400,7 @@
           <p:cNvPr id="11" name="p20-n2">
             <a:extLst xmlns:a="http://schemas.openxmlformats.org/drawingml/2006/main">
               <a:ext uri="{FF2B5EF4-FFF2-40B4-BE49-F238E27FC236}">
-                <a16:creationId xmlns:a16="http://schemas.microsoft.com/office/drawing/2014/main" id="{6EEF647B-015E-45F5-969A-F063A0C666B9}"/>
+                <a16:creationId xmlns:a16="http://schemas.microsoft.com/office/drawing/2014/main" id="{C32C02EA-66A7-437B-B7FF-934A270C22C3}"/>
               </a:ext>
             </a:extLst>
           </p:cNvPr>
@@ -14261,7 +13457,7 @@
           <p:cNvPr id="12" name="p20-t2">
             <a:extLst xmlns:a="http://schemas.openxmlformats.org/drawingml/2006/main">
               <a:ext uri="{FF2B5EF4-FFF2-40B4-BE49-F238E27FC236}">
-                <a16:creationId xmlns:a16="http://schemas.microsoft.com/office/drawing/2014/main" id="{91078E41-8951-41B3-B3FB-776A37E30DD6}"/>
+                <a16:creationId xmlns:a16="http://schemas.microsoft.com/office/drawing/2014/main" id="{3E194687-D7B7-45F6-84EB-D548F3A7975B}"/>
               </a:ext>
             </a:extLst>
           </p:cNvPr>
@@ -14316,7 +13512,7 @@
           <p:cNvPr id="13" name="p20-arrow">
             <a:extLst xmlns:a="http://schemas.openxmlformats.org/drawingml/2006/main">
               <a:ext uri="{FF2B5EF4-FFF2-40B4-BE49-F238E27FC236}">
-                <a16:creationId xmlns:a16="http://schemas.microsoft.com/office/drawing/2014/main" id="{86E4FB39-0052-4D18-835A-4B306AEA60A6}"/>
+                <a16:creationId xmlns:a16="http://schemas.microsoft.com/office/drawing/2014/main" id="{9AF1FFE2-5E5B-44B1-9EBF-1ECDAD0BC09B}"/>
               </a:ext>
             </a:extLst>
           </p:cNvPr>
@@ -14369,7 +13565,7 @@
           <p:cNvPr id="14" name="p20-right-title">
             <a:extLst xmlns:a="http://schemas.openxmlformats.org/drawingml/2006/main">
               <a:ext uri="{FF2B5EF4-FFF2-40B4-BE49-F238E27FC236}">
-                <a16:creationId xmlns:a16="http://schemas.microsoft.com/office/drawing/2014/main" id="{B985E265-4357-49FD-B7DB-14DEE4814DB4}"/>
+                <a16:creationId xmlns:a16="http://schemas.microsoft.com/office/drawing/2014/main" id="{0CB90EA5-2FF1-45FF-A3F1-02A35A3CC491}"/>
               </a:ext>
             </a:extLst>
           </p:cNvPr>
@@ -14422,7 +13618,7 @@
           <p:cNvPr id="15" name="p20-r0-l">
             <a:extLst xmlns:a="http://schemas.openxmlformats.org/drawingml/2006/main">
               <a:ext uri="{FF2B5EF4-FFF2-40B4-BE49-F238E27FC236}">
-                <a16:creationId xmlns:a16="http://schemas.microsoft.com/office/drawing/2014/main" id="{CE444EC7-ABA6-4537-9424-DCC2CCFB7CBD}"/>
+                <a16:creationId xmlns:a16="http://schemas.microsoft.com/office/drawing/2014/main" id="{B0976F39-7EF9-4916-A233-E90B142203B6}"/>
               </a:ext>
             </a:extLst>
           </p:cNvPr>
@@ -14479,7 +13675,7 @@
           <p:cNvPr id="16" name="p20-r0-t">
             <a:extLst xmlns:a="http://schemas.openxmlformats.org/drawingml/2006/main">
               <a:ext uri="{FF2B5EF4-FFF2-40B4-BE49-F238E27FC236}">
-                <a16:creationId xmlns:a16="http://schemas.microsoft.com/office/drawing/2014/main" id="{2A101242-005A-4888-8627-5CB51A54339B}"/>
+                <a16:creationId xmlns:a16="http://schemas.microsoft.com/office/drawing/2014/main" id="{C6279C6A-E408-4D00-91FE-4EAD45E9B006}"/>
               </a:ext>
             </a:extLst>
           </p:cNvPr>
@@ -14534,7 +13730,7 @@
           <p:cNvPr id="17" name="p20-r1-l">
             <a:extLst xmlns:a="http://schemas.openxmlformats.org/drawingml/2006/main">
               <a:ext uri="{FF2B5EF4-FFF2-40B4-BE49-F238E27FC236}">
-                <a16:creationId xmlns:a16="http://schemas.microsoft.com/office/drawing/2014/main" id="{97B3E04A-6C37-4642-8501-F0D4A2F7D423}"/>
+                <a16:creationId xmlns:a16="http://schemas.microsoft.com/office/drawing/2014/main" id="{E6B5EADD-94F2-4448-993D-7B740C64C60E}"/>
               </a:ext>
             </a:extLst>
           </p:cNvPr>
@@ -14591,7 +13787,7 @@
           <p:cNvPr id="18" name="p20-r1-t">
             <a:extLst xmlns:a="http://schemas.openxmlformats.org/drawingml/2006/main">
               <a:ext uri="{FF2B5EF4-FFF2-40B4-BE49-F238E27FC236}">
-                <a16:creationId xmlns:a16="http://schemas.microsoft.com/office/drawing/2014/main" id="{D3D462D8-C309-49B8-AAD7-E0AD6ADC72E6}"/>
+                <a16:creationId xmlns:a16="http://schemas.microsoft.com/office/drawing/2014/main" id="{AEC38AC2-AA65-4C71-B11A-E0D54ABFE213}"/>
               </a:ext>
             </a:extLst>
           </p:cNvPr>
@@ -14646,7 +13842,7 @@
           <p:cNvPr id="19" name="p20-r2-l">
             <a:extLst xmlns:a="http://schemas.openxmlformats.org/drawingml/2006/main">
               <a:ext uri="{FF2B5EF4-FFF2-40B4-BE49-F238E27FC236}">
-                <a16:creationId xmlns:a16="http://schemas.microsoft.com/office/drawing/2014/main" id="{9F59D118-68DF-41B2-8C74-1CD4018BDB27}"/>
+                <a16:creationId xmlns:a16="http://schemas.microsoft.com/office/drawing/2014/main" id="{1032F6A6-D6F4-4987-8FDB-6561A436EEA2}"/>
               </a:ext>
             </a:extLst>
           </p:cNvPr>
@@ -14703,7 +13899,7 @@
           <p:cNvPr id="20" name="p20-r2-t">
             <a:extLst xmlns:a="http://schemas.openxmlformats.org/drawingml/2006/main">
               <a:ext uri="{FF2B5EF4-FFF2-40B4-BE49-F238E27FC236}">
-                <a16:creationId xmlns:a16="http://schemas.microsoft.com/office/drawing/2014/main" id="{92C6102E-0D38-462F-8A09-C710A69269C2}"/>
+                <a16:creationId xmlns:a16="http://schemas.microsoft.com/office/drawing/2014/main" id="{3FBB9DB1-D7C3-4352-9773-E947B8750BF2}"/>
               </a:ext>
             </a:extLst>
           </p:cNvPr>
@@ -14758,7 +13954,7 @@
           <p:cNvPr id="21" name="p20-r3-l">
             <a:extLst xmlns:a="http://schemas.openxmlformats.org/drawingml/2006/main">
               <a:ext uri="{FF2B5EF4-FFF2-40B4-BE49-F238E27FC236}">
-                <a16:creationId xmlns:a16="http://schemas.microsoft.com/office/drawing/2014/main" id="{8C2787DB-71CE-466C-9E16-4197C8284155}"/>
+                <a16:creationId xmlns:a16="http://schemas.microsoft.com/office/drawing/2014/main" id="{E04F4E94-64AF-48EA-88EB-9E38629D5636}"/>
               </a:ext>
             </a:extLst>
           </p:cNvPr>
@@ -14815,7 +14011,7 @@
           <p:cNvPr id="22" name="p20-r3-t">
             <a:extLst xmlns:a="http://schemas.openxmlformats.org/drawingml/2006/main">
               <a:ext uri="{FF2B5EF4-FFF2-40B4-BE49-F238E27FC236}">
-                <a16:creationId xmlns:a16="http://schemas.microsoft.com/office/drawing/2014/main" id="{866A9820-F2B7-4F37-8F48-4CFCF6A616C7}"/>
+                <a16:creationId xmlns:a16="http://schemas.microsoft.com/office/drawing/2014/main" id="{1FDDF4D5-63CC-4EF7-9EFE-2C619E862C70}"/>
               </a:ext>
             </a:extLst>
           </p:cNvPr>
@@ -14870,7 +14066,7 @@
           <p:cNvPr id="23" name="p20-r4-l">
             <a:extLst xmlns:a="http://schemas.openxmlformats.org/drawingml/2006/main">
               <a:ext uri="{FF2B5EF4-FFF2-40B4-BE49-F238E27FC236}">
-                <a16:creationId xmlns:a16="http://schemas.microsoft.com/office/drawing/2014/main" id="{767F026C-3CAE-4A20-B0A5-6A865889DA43}"/>
+                <a16:creationId xmlns:a16="http://schemas.microsoft.com/office/drawing/2014/main" id="{3626E658-1B3B-48EA-A1F6-3CD6FA04C33A}"/>
               </a:ext>
             </a:extLst>
           </p:cNvPr>
@@ -14927,7 +14123,7 @@
           <p:cNvPr id="24" name="p20-r4-t">
             <a:extLst xmlns:a="http://schemas.openxmlformats.org/drawingml/2006/main">
               <a:ext uri="{FF2B5EF4-FFF2-40B4-BE49-F238E27FC236}">
-                <a16:creationId xmlns:a16="http://schemas.microsoft.com/office/drawing/2014/main" id="{A7DDB1F3-A1EB-42B9-956A-8B567F0E1712}"/>
+                <a16:creationId xmlns:a16="http://schemas.microsoft.com/office/drawing/2014/main" id="{DF12A6B2-8DBD-4FF2-A9DF-2E8F1991F93F}"/>
               </a:ext>
             </a:extLst>
           </p:cNvPr>
@@ -14982,7 +14178,7 @@
           <p:cNvPr id="25" name="p20-bottom">
             <a:extLst xmlns:a="http://schemas.openxmlformats.org/drawingml/2006/main">
               <a:ext uri="{FF2B5EF4-FFF2-40B4-BE49-F238E27FC236}">
-                <a16:creationId xmlns:a16="http://schemas.microsoft.com/office/drawing/2014/main" id="{971C0E37-E04B-45A9-BEEB-E829D23E8AE5}"/>
+                <a16:creationId xmlns:a16="http://schemas.microsoft.com/office/drawing/2014/main" id="{ACFF8AB7-8079-4911-A331-97469866A7D0}"/>
               </a:ext>
             </a:extLst>
           </p:cNvPr>
@@ -15131,7 +14327,7 @@
           <p:cNvPr id="6" name="p03-left-head">
             <a:extLst xmlns:a="http://schemas.openxmlformats.org/drawingml/2006/main">
               <a:ext uri="{FF2B5EF4-FFF2-40B4-BE49-F238E27FC236}">
-                <a16:creationId xmlns:a16="http://schemas.microsoft.com/office/drawing/2014/main" id="{25A23CE9-A2A6-4051-8D35-18EC9E574289}"/>
+                <a16:creationId xmlns:a16="http://schemas.microsoft.com/office/drawing/2014/main" id="{C32EE272-8890-4584-BB40-E5F70B40D3CE}"/>
               </a:ext>
             </a:extLst>
           </p:cNvPr>
@@ -15184,7 +14380,7 @@
           <p:cNvPr id="7" name="p03-l0-l">
             <a:extLst xmlns:a="http://schemas.openxmlformats.org/drawingml/2006/main">
               <a:ext uri="{FF2B5EF4-FFF2-40B4-BE49-F238E27FC236}">
-                <a16:creationId xmlns:a16="http://schemas.microsoft.com/office/drawing/2014/main" id="{2F480976-EA9F-4866-9F24-B77B1EDEAEE6}"/>
+                <a16:creationId xmlns:a16="http://schemas.microsoft.com/office/drawing/2014/main" id="{052EB809-7E11-45A3-AB6E-C511FA0F72AE}"/>
               </a:ext>
             </a:extLst>
           </p:cNvPr>
@@ -15241,7 +14437,7 @@
           <p:cNvPr id="8" name="p03-l0-t">
             <a:extLst xmlns:a="http://schemas.openxmlformats.org/drawingml/2006/main">
               <a:ext uri="{FF2B5EF4-FFF2-40B4-BE49-F238E27FC236}">
-                <a16:creationId xmlns:a16="http://schemas.microsoft.com/office/drawing/2014/main" id="{CB9AE35C-D2F8-4967-98B0-060E891E25E6}"/>
+                <a16:creationId xmlns:a16="http://schemas.microsoft.com/office/drawing/2014/main" id="{51A0FAE5-25F7-4D17-A7C3-B65D412CED44}"/>
               </a:ext>
             </a:extLst>
           </p:cNvPr>
@@ -15296,7 +14492,7 @@
           <p:cNvPr id="9" name="p03-l1-l">
             <a:extLst xmlns:a="http://schemas.openxmlformats.org/drawingml/2006/main">
               <a:ext uri="{FF2B5EF4-FFF2-40B4-BE49-F238E27FC236}">
-                <a16:creationId xmlns:a16="http://schemas.microsoft.com/office/drawing/2014/main" id="{9DA32698-D081-4C82-AC05-8B00EB43E5BB}"/>
+                <a16:creationId xmlns:a16="http://schemas.microsoft.com/office/drawing/2014/main" id="{943C95E7-BE12-48AB-B15C-BBB59F9732C5}"/>
               </a:ext>
             </a:extLst>
           </p:cNvPr>
@@ -15353,7 +14549,7 @@
           <p:cNvPr id="10" name="p03-l1-t">
             <a:extLst xmlns:a="http://schemas.openxmlformats.org/drawingml/2006/main">
               <a:ext uri="{FF2B5EF4-FFF2-40B4-BE49-F238E27FC236}">
-                <a16:creationId xmlns:a16="http://schemas.microsoft.com/office/drawing/2014/main" id="{01D8E995-EC7E-4EE7-95AA-89BDE7F08FA3}"/>
+                <a16:creationId xmlns:a16="http://schemas.microsoft.com/office/drawing/2014/main" id="{E5C64BA3-2E57-4797-ACF1-609110833A84}"/>
               </a:ext>
             </a:extLst>
           </p:cNvPr>
@@ -15408,7 +14604,7 @@
           <p:cNvPr id="11" name="p03-l2-l">
             <a:extLst xmlns:a="http://schemas.openxmlformats.org/drawingml/2006/main">
               <a:ext uri="{FF2B5EF4-FFF2-40B4-BE49-F238E27FC236}">
-                <a16:creationId xmlns:a16="http://schemas.microsoft.com/office/drawing/2014/main" id="{483EBD8A-144F-443D-8DF2-2A41A2BB5F40}"/>
+                <a16:creationId xmlns:a16="http://schemas.microsoft.com/office/drawing/2014/main" id="{E3CE58A6-49B7-41A6-A367-6B781020AF69}"/>
               </a:ext>
             </a:extLst>
           </p:cNvPr>
@@ -15465,7 +14661,7 @@
           <p:cNvPr id="12" name="p03-l2-t">
             <a:extLst xmlns:a="http://schemas.openxmlformats.org/drawingml/2006/main">
               <a:ext uri="{FF2B5EF4-FFF2-40B4-BE49-F238E27FC236}">
-                <a16:creationId xmlns:a16="http://schemas.microsoft.com/office/drawing/2014/main" id="{5B1FAB8C-DF16-4DB5-95BD-6C7D5E089773}"/>
+                <a16:creationId xmlns:a16="http://schemas.microsoft.com/office/drawing/2014/main" id="{CA1F7DF8-8A44-4B1A-8405-A2DFF162B787}"/>
               </a:ext>
             </a:extLst>
           </p:cNvPr>
@@ -15520,7 +14716,7 @@
           <p:cNvPr id="13" name="p03-l3-l">
             <a:extLst xmlns:a="http://schemas.openxmlformats.org/drawingml/2006/main">
               <a:ext uri="{FF2B5EF4-FFF2-40B4-BE49-F238E27FC236}">
-                <a16:creationId xmlns:a16="http://schemas.microsoft.com/office/drawing/2014/main" id="{06F8BDC2-09BE-4161-B79A-60FF9850E9EC}"/>
+                <a16:creationId xmlns:a16="http://schemas.microsoft.com/office/drawing/2014/main" id="{E2B50F4A-E187-4A16-83D7-2E02C322E601}"/>
               </a:ext>
             </a:extLst>
           </p:cNvPr>
@@ -15577,7 +14773,7 @@
           <p:cNvPr id="14" name="p03-l3-t">
             <a:extLst xmlns:a="http://schemas.openxmlformats.org/drawingml/2006/main">
               <a:ext uri="{FF2B5EF4-FFF2-40B4-BE49-F238E27FC236}">
-                <a16:creationId xmlns:a16="http://schemas.microsoft.com/office/drawing/2014/main" id="{9B75E998-C4AC-4A83-9490-ED8E5A4E477F}"/>
+                <a16:creationId xmlns:a16="http://schemas.microsoft.com/office/drawing/2014/main" id="{52D00830-843C-4659-B6B7-48E6F0D10557}"/>
               </a:ext>
             </a:extLst>
           </p:cNvPr>
@@ -15632,7 +14828,7 @@
           <p:cNvPr id="15" name="p03-mid">
             <a:extLst xmlns:a="http://schemas.openxmlformats.org/drawingml/2006/main">
               <a:ext uri="{FF2B5EF4-FFF2-40B4-BE49-F238E27FC236}">
-                <a16:creationId xmlns:a16="http://schemas.microsoft.com/office/drawing/2014/main" id="{CF92BACD-E3B8-4882-9D4E-FE8455B196EE}"/>
+                <a16:creationId xmlns:a16="http://schemas.microsoft.com/office/drawing/2014/main" id="{FE724C77-A99B-4CA9-A748-1FC522235982}"/>
               </a:ext>
             </a:extLst>
           </p:cNvPr>
@@ -15663,7 +14859,7 @@
           <p:cNvPr id="16" name="p03-right-head">
             <a:extLst xmlns:a="http://schemas.openxmlformats.org/drawingml/2006/main">
               <a:ext uri="{FF2B5EF4-FFF2-40B4-BE49-F238E27FC236}">
-                <a16:creationId xmlns:a16="http://schemas.microsoft.com/office/drawing/2014/main" id="{545A6FB6-00D1-4E3B-8854-9B752663DC09}"/>
+                <a16:creationId xmlns:a16="http://schemas.microsoft.com/office/drawing/2014/main" id="{22A6E22E-F0F3-47CC-AAD1-C7730F2C76F0}"/>
               </a:ext>
             </a:extLst>
           </p:cNvPr>
@@ -15716,7 +14912,7 @@
           <p:cNvPr id="17" name="p03-r0-l">
             <a:extLst xmlns:a="http://schemas.openxmlformats.org/drawingml/2006/main">
               <a:ext uri="{FF2B5EF4-FFF2-40B4-BE49-F238E27FC236}">
-                <a16:creationId xmlns:a16="http://schemas.microsoft.com/office/drawing/2014/main" id="{6F59D341-82A0-48A3-96BE-A11FEAB13E62}"/>
+                <a16:creationId xmlns:a16="http://schemas.microsoft.com/office/drawing/2014/main" id="{2D66042A-B547-4DE9-BE50-FA8D1BFDE04D}"/>
               </a:ext>
             </a:extLst>
           </p:cNvPr>
@@ -15773,7 +14969,7 @@
           <p:cNvPr id="18" name="p03-r0-t">
             <a:extLst xmlns:a="http://schemas.openxmlformats.org/drawingml/2006/main">
               <a:ext uri="{FF2B5EF4-FFF2-40B4-BE49-F238E27FC236}">
-                <a16:creationId xmlns:a16="http://schemas.microsoft.com/office/drawing/2014/main" id="{6E8BEF71-B329-4C0A-984B-4A32685398B8}"/>
+                <a16:creationId xmlns:a16="http://schemas.microsoft.com/office/drawing/2014/main" id="{B3BEC3D5-947F-4620-8D5E-3D4AAB6E8065}"/>
               </a:ext>
             </a:extLst>
           </p:cNvPr>
@@ -15828,7 +15024,7 @@
           <p:cNvPr id="19" name="p03-r1-l">
             <a:extLst xmlns:a="http://schemas.openxmlformats.org/drawingml/2006/main">
               <a:ext uri="{FF2B5EF4-FFF2-40B4-BE49-F238E27FC236}">
-                <a16:creationId xmlns:a16="http://schemas.microsoft.com/office/drawing/2014/main" id="{AD949178-DAAD-4065-94CB-8B5425C373BA}"/>
+                <a16:creationId xmlns:a16="http://schemas.microsoft.com/office/drawing/2014/main" id="{68CAFAD2-44C2-4235-86AB-D21E2B807E1C}"/>
               </a:ext>
             </a:extLst>
           </p:cNvPr>
@@ -15885,7 +15081,7 @@
           <p:cNvPr id="20" name="p03-r1-t">
             <a:extLst xmlns:a="http://schemas.openxmlformats.org/drawingml/2006/main">
               <a:ext uri="{FF2B5EF4-FFF2-40B4-BE49-F238E27FC236}">
-                <a16:creationId xmlns:a16="http://schemas.microsoft.com/office/drawing/2014/main" id="{A205130E-1F23-4DBF-94D1-2AC3777CF5AA}"/>
+                <a16:creationId xmlns:a16="http://schemas.microsoft.com/office/drawing/2014/main" id="{328C43BF-51C0-469F-9800-C354FF5D6242}"/>
               </a:ext>
             </a:extLst>
           </p:cNvPr>
@@ -15940,7 +15136,7 @@
           <p:cNvPr id="21" name="p03-r2-l">
             <a:extLst xmlns:a="http://schemas.openxmlformats.org/drawingml/2006/main">
               <a:ext uri="{FF2B5EF4-FFF2-40B4-BE49-F238E27FC236}">
-                <a16:creationId xmlns:a16="http://schemas.microsoft.com/office/drawing/2014/main" id="{A352669A-847C-4BD1-99A3-2D4484D9BCD0}"/>
+                <a16:creationId xmlns:a16="http://schemas.microsoft.com/office/drawing/2014/main" id="{7BC0BBD9-5413-4406-94A6-14161EB3EBC4}"/>
               </a:ext>
             </a:extLst>
           </p:cNvPr>
@@ -15997,7 +15193,7 @@
           <p:cNvPr id="22" name="p03-r2-t">
             <a:extLst xmlns:a="http://schemas.openxmlformats.org/drawingml/2006/main">
               <a:ext uri="{FF2B5EF4-FFF2-40B4-BE49-F238E27FC236}">
-                <a16:creationId xmlns:a16="http://schemas.microsoft.com/office/drawing/2014/main" id="{FFDA8CAB-6811-4AD7-8BF7-C3C612189E96}"/>
+                <a16:creationId xmlns:a16="http://schemas.microsoft.com/office/drawing/2014/main" id="{0322024B-CD1F-4843-A462-0096125A2209}"/>
               </a:ext>
             </a:extLst>
           </p:cNvPr>
@@ -16052,7 +15248,7 @@
           <p:cNvPr id="23" name="p03-r3-l">
             <a:extLst xmlns:a="http://schemas.openxmlformats.org/drawingml/2006/main">
               <a:ext uri="{FF2B5EF4-FFF2-40B4-BE49-F238E27FC236}">
-                <a16:creationId xmlns:a16="http://schemas.microsoft.com/office/drawing/2014/main" id="{68DA28BE-3D8E-4BBF-B751-D3FF7E46D923}"/>
+                <a16:creationId xmlns:a16="http://schemas.microsoft.com/office/drawing/2014/main" id="{570FF7FC-4884-4D26-A3FA-3E5223489DF4}"/>
               </a:ext>
             </a:extLst>
           </p:cNvPr>
@@ -16109,7 +15305,7 @@
           <p:cNvPr id="24" name="p03-r3-t">
             <a:extLst xmlns:a="http://schemas.openxmlformats.org/drawingml/2006/main">
               <a:ext uri="{FF2B5EF4-FFF2-40B4-BE49-F238E27FC236}">
-                <a16:creationId xmlns:a16="http://schemas.microsoft.com/office/drawing/2014/main" id="{B199CAAF-00E7-48B0-ADE5-FC165243291C}"/>
+                <a16:creationId xmlns:a16="http://schemas.microsoft.com/office/drawing/2014/main" id="{00943370-A63B-4CE4-B859-AF268858DDB0}"/>
               </a:ext>
             </a:extLst>
           </p:cNvPr>
@@ -16164,7 +15360,7 @@
           <p:cNvPr id="25" name="p03-bottom">
             <a:extLst xmlns:a="http://schemas.openxmlformats.org/drawingml/2006/main">
               <a:ext uri="{FF2B5EF4-FFF2-40B4-BE49-F238E27FC236}">
-                <a16:creationId xmlns:a16="http://schemas.microsoft.com/office/drawing/2014/main" id="{2ADB0877-95DC-4781-8CCE-725FB1647059}"/>
+                <a16:creationId xmlns:a16="http://schemas.microsoft.com/office/drawing/2014/main" id="{9A905152-98B2-4437-8651-84D5ACB2D641}"/>
               </a:ext>
             </a:extLst>
           </p:cNvPr>
@@ -16313,7 +15509,7 @@
           <p:cNvPr id="6" name="p04-context">
             <a:extLst xmlns:a="http://schemas.openxmlformats.org/drawingml/2006/main">
               <a:ext uri="{FF2B5EF4-FFF2-40B4-BE49-F238E27FC236}">
-                <a16:creationId xmlns:a16="http://schemas.microsoft.com/office/drawing/2014/main" id="{75315D63-FA3E-4C05-9CDD-DE019F6FE248}"/>
+                <a16:creationId xmlns:a16="http://schemas.microsoft.com/office/drawing/2014/main" id="{7A94964A-17A3-403E-9E44-66B259281818}"/>
               </a:ext>
             </a:extLst>
           </p:cNvPr>
@@ -16390,7 +15586,7 @@
           <p:cNvPr id="7" name="p04-c0">
             <a:extLst xmlns:a="http://schemas.openxmlformats.org/drawingml/2006/main">
               <a:ext uri="{FF2B5EF4-FFF2-40B4-BE49-F238E27FC236}">
-                <a16:creationId xmlns:a16="http://schemas.microsoft.com/office/drawing/2014/main" id="{0A0557EF-6644-44F8-8D61-8F8D4598B886}"/>
+                <a16:creationId xmlns:a16="http://schemas.microsoft.com/office/drawing/2014/main" id="{5617A996-DBBF-48C1-AFE6-9702E315F702}"/>
               </a:ext>
             </a:extLst>
           </p:cNvPr>
@@ -16445,7 +15641,7 @@
           <p:cNvPr id="8" name="p04-c1">
             <a:extLst xmlns:a="http://schemas.openxmlformats.org/drawingml/2006/main">
               <a:ext uri="{FF2B5EF4-FFF2-40B4-BE49-F238E27FC236}">
-                <a16:creationId xmlns:a16="http://schemas.microsoft.com/office/drawing/2014/main" id="{0056708D-210A-4D5B-86D4-D65E1415FDFA}"/>
+                <a16:creationId xmlns:a16="http://schemas.microsoft.com/office/drawing/2014/main" id="{52B2A324-A879-4F86-8C7D-E64CAC7499F7}"/>
               </a:ext>
             </a:extLst>
           </p:cNvPr>
@@ -16500,7 +15696,7 @@
           <p:cNvPr id="9" name="p04-c2">
             <a:extLst xmlns:a="http://schemas.openxmlformats.org/drawingml/2006/main">
               <a:ext uri="{FF2B5EF4-FFF2-40B4-BE49-F238E27FC236}">
-                <a16:creationId xmlns:a16="http://schemas.microsoft.com/office/drawing/2014/main" id="{5FAE21CE-97C8-4711-87FE-CCE695F78FE6}"/>
+                <a16:creationId xmlns:a16="http://schemas.microsoft.com/office/drawing/2014/main" id="{4A85BBDC-FDF5-4FB7-9372-0EF23BC2A674}"/>
               </a:ext>
             </a:extLst>
           </p:cNvPr>
@@ -16555,7 +15751,7 @@
           <p:cNvPr id="10" name="p04-arrow">
             <a:extLst xmlns:a="http://schemas.openxmlformats.org/drawingml/2006/main">
               <a:ext uri="{FF2B5EF4-FFF2-40B4-BE49-F238E27FC236}">
-                <a16:creationId xmlns:a16="http://schemas.microsoft.com/office/drawing/2014/main" id="{CFCC3B79-9D7A-4389-9418-51CB5DED9E73}"/>
+                <a16:creationId xmlns:a16="http://schemas.microsoft.com/office/drawing/2014/main" id="{D71CF05D-4AA4-4675-9350-4864C8FFA8A6}"/>
               </a:ext>
             </a:extLst>
           </p:cNvPr>
@@ -16608,7 +15804,7 @@
           <p:cNvPr id="11" name="p04-memory">
             <a:extLst xmlns:a="http://schemas.openxmlformats.org/drawingml/2006/main">
               <a:ext uri="{FF2B5EF4-FFF2-40B4-BE49-F238E27FC236}">
-                <a16:creationId xmlns:a16="http://schemas.microsoft.com/office/drawing/2014/main" id="{4C10EE35-0C6B-4044-AF93-C7B06E6DFAAA}"/>
+                <a16:creationId xmlns:a16="http://schemas.microsoft.com/office/drawing/2014/main" id="{C2D7A054-ED11-4DDF-87FA-DAB0CC456930}"/>
               </a:ext>
             </a:extLst>
           </p:cNvPr>
@@ -16685,7 +15881,7 @@
           <p:cNvPr id="12" name="p04-m0">
             <a:extLst xmlns:a="http://schemas.openxmlformats.org/drawingml/2006/main">
               <a:ext uri="{FF2B5EF4-FFF2-40B4-BE49-F238E27FC236}">
-                <a16:creationId xmlns:a16="http://schemas.microsoft.com/office/drawing/2014/main" id="{744D4C0D-6BB4-48F2-9812-73F11221E47E}"/>
+                <a16:creationId xmlns:a16="http://schemas.microsoft.com/office/drawing/2014/main" id="{A47CA227-A8C1-481E-B0D0-1A21F762BBA2}"/>
               </a:ext>
             </a:extLst>
           </p:cNvPr>
@@ -16740,7 +15936,7 @@
           <p:cNvPr id="13" name="p04-m1">
             <a:extLst xmlns:a="http://schemas.openxmlformats.org/drawingml/2006/main">
               <a:ext uri="{FF2B5EF4-FFF2-40B4-BE49-F238E27FC236}">
-                <a16:creationId xmlns:a16="http://schemas.microsoft.com/office/drawing/2014/main" id="{2156476D-AD79-4719-9B68-EDAA06CB5EA6}"/>
+                <a16:creationId xmlns:a16="http://schemas.microsoft.com/office/drawing/2014/main" id="{30BAECCA-32A3-4D94-977D-7C532BA29CF6}"/>
               </a:ext>
             </a:extLst>
           </p:cNvPr>
@@ -16795,7 +15991,7 @@
           <p:cNvPr id="14" name="p04-m2">
             <a:extLst xmlns:a="http://schemas.openxmlformats.org/drawingml/2006/main">
               <a:ext uri="{FF2B5EF4-FFF2-40B4-BE49-F238E27FC236}">
-                <a16:creationId xmlns:a16="http://schemas.microsoft.com/office/drawing/2014/main" id="{8451AA8A-6C84-480D-A123-12065B3E3D2B}"/>
+                <a16:creationId xmlns:a16="http://schemas.microsoft.com/office/drawing/2014/main" id="{E349F202-5543-4734-BF4F-D21F79308DD0}"/>
               </a:ext>
             </a:extLst>
           </p:cNvPr>
@@ -16850,7 +16046,7 @@
           <p:cNvPr id="15" name="p04-chat">
             <a:extLst xmlns:a="http://schemas.openxmlformats.org/drawingml/2006/main">
               <a:ext uri="{FF2B5EF4-FFF2-40B4-BE49-F238E27FC236}">
-                <a16:creationId xmlns:a16="http://schemas.microsoft.com/office/drawing/2014/main" id="{DF68C4B9-6174-4A04-BDDB-4CB1F552CDF9}"/>
+                <a16:creationId xmlns:a16="http://schemas.microsoft.com/office/drawing/2014/main" id="{B34DA28F-A835-4129-A421-92022E9890C3}"/>
               </a:ext>
             </a:extLst>
           </p:cNvPr>
@@ -16925,7 +16121,7 @@
           <p:cNvPr id="16" name="p04-bottom">
             <a:extLst xmlns:a="http://schemas.openxmlformats.org/drawingml/2006/main">
               <a:ext uri="{FF2B5EF4-FFF2-40B4-BE49-F238E27FC236}">
-                <a16:creationId xmlns:a16="http://schemas.microsoft.com/office/drawing/2014/main" id="{9F7D3A26-1BFE-4429-A243-0D40F5D0CEDC}"/>
+                <a16:creationId xmlns:a16="http://schemas.microsoft.com/office/drawing/2014/main" id="{014E22C7-EE06-4260-A513-85940BDBEA6B}"/>
               </a:ext>
             </a:extLst>
           </p:cNvPr>
@@ -17074,7 +16270,7 @@
           <p:cNvPr id="6" name="p05-n0">
             <a:extLst xmlns:a="http://schemas.openxmlformats.org/drawingml/2006/main">
               <a:ext uri="{FF2B5EF4-FFF2-40B4-BE49-F238E27FC236}">
-                <a16:creationId xmlns:a16="http://schemas.microsoft.com/office/drawing/2014/main" id="{94CCB793-0AC2-4563-AE27-388C7A3BA931}"/>
+                <a16:creationId xmlns:a16="http://schemas.microsoft.com/office/drawing/2014/main" id="{EDF7CCC8-925A-423A-9855-779FEF721B36}"/>
               </a:ext>
             </a:extLst>
           </p:cNvPr>
@@ -17131,7 +16327,7 @@
           <p:cNvPr id="7" name="p05-l0">
             <a:extLst xmlns:a="http://schemas.openxmlformats.org/drawingml/2006/main">
               <a:ext uri="{FF2B5EF4-FFF2-40B4-BE49-F238E27FC236}">
-                <a16:creationId xmlns:a16="http://schemas.microsoft.com/office/drawing/2014/main" id="{1233C51E-393A-41C2-AB07-4D72A339580F}"/>
+                <a16:creationId xmlns:a16="http://schemas.microsoft.com/office/drawing/2014/main" id="{B24E8EAA-050F-4CFB-A9A0-C21949908B27}"/>
               </a:ext>
             </a:extLst>
           </p:cNvPr>
@@ -17186,7 +16382,7 @@
           <p:cNvPr id="8" name="p05-d0">
             <a:extLst xmlns:a="http://schemas.openxmlformats.org/drawingml/2006/main">
               <a:ext uri="{FF2B5EF4-FFF2-40B4-BE49-F238E27FC236}">
-                <a16:creationId xmlns:a16="http://schemas.microsoft.com/office/drawing/2014/main" id="{5D984822-E785-414B-8DBE-CDE514BDF154}"/>
+                <a16:creationId xmlns:a16="http://schemas.microsoft.com/office/drawing/2014/main" id="{A5CCCFEE-850F-40AC-95E9-305C38E25E71}"/>
               </a:ext>
             </a:extLst>
           </p:cNvPr>
@@ -17243,7 +16439,7 @@
           <p:cNvPr id="9" name="p05-up0">
             <a:extLst xmlns:a="http://schemas.openxmlformats.org/drawingml/2006/main">
               <a:ext uri="{FF2B5EF4-FFF2-40B4-BE49-F238E27FC236}">
-                <a16:creationId xmlns:a16="http://schemas.microsoft.com/office/drawing/2014/main" id="{E0CEE691-1DEB-4524-BC78-4A12604F3C71}"/>
+                <a16:creationId xmlns:a16="http://schemas.microsoft.com/office/drawing/2014/main" id="{6E031410-BC6F-4012-9F09-14A6CC39FBEC}"/>
               </a:ext>
             </a:extLst>
           </p:cNvPr>
@@ -17274,7 +16470,7 @@
           <p:cNvPr id="10" name="p05-n1">
             <a:extLst xmlns:a="http://schemas.openxmlformats.org/drawingml/2006/main">
               <a:ext uri="{FF2B5EF4-FFF2-40B4-BE49-F238E27FC236}">
-                <a16:creationId xmlns:a16="http://schemas.microsoft.com/office/drawing/2014/main" id="{C99A9DC4-CE53-4692-A5B0-D8AEBCA60464}"/>
+                <a16:creationId xmlns:a16="http://schemas.microsoft.com/office/drawing/2014/main" id="{D8882A8B-C4CF-4470-BA17-0B65B6CF65A3}"/>
               </a:ext>
             </a:extLst>
           </p:cNvPr>
@@ -17331,7 +16527,7 @@
           <p:cNvPr id="11" name="p05-l1">
             <a:extLst xmlns:a="http://schemas.openxmlformats.org/drawingml/2006/main">
               <a:ext uri="{FF2B5EF4-FFF2-40B4-BE49-F238E27FC236}">
-                <a16:creationId xmlns:a16="http://schemas.microsoft.com/office/drawing/2014/main" id="{A56AC460-013A-4664-B83A-842671F5B06C}"/>
+                <a16:creationId xmlns:a16="http://schemas.microsoft.com/office/drawing/2014/main" id="{18BAF730-2583-4B56-94E3-099F1F1710A2}"/>
               </a:ext>
             </a:extLst>
           </p:cNvPr>
@@ -17386,7 +16582,7 @@
           <p:cNvPr id="12" name="p05-d1">
             <a:extLst xmlns:a="http://schemas.openxmlformats.org/drawingml/2006/main">
               <a:ext uri="{FF2B5EF4-FFF2-40B4-BE49-F238E27FC236}">
-                <a16:creationId xmlns:a16="http://schemas.microsoft.com/office/drawing/2014/main" id="{4646E472-EDB7-40F9-A118-4B5014FFD88D}"/>
+                <a16:creationId xmlns:a16="http://schemas.microsoft.com/office/drawing/2014/main" id="{AF676105-F14E-409B-8293-7B1CF5B18CA5}"/>
               </a:ext>
             </a:extLst>
           </p:cNvPr>
@@ -17443,7 +16639,7 @@
           <p:cNvPr id="13" name="p05-up1">
             <a:extLst xmlns:a="http://schemas.openxmlformats.org/drawingml/2006/main">
               <a:ext uri="{FF2B5EF4-FFF2-40B4-BE49-F238E27FC236}">
-                <a16:creationId xmlns:a16="http://schemas.microsoft.com/office/drawing/2014/main" id="{2E5BFC2F-B9EC-4E22-9613-8EF5CCE08FCD}"/>
+                <a16:creationId xmlns:a16="http://schemas.microsoft.com/office/drawing/2014/main" id="{341234A2-9082-4BE7-8E25-83C58E30C72F}"/>
               </a:ext>
             </a:extLst>
           </p:cNvPr>
@@ -17474,7 +16670,7 @@
           <p:cNvPr id="14" name="p05-n2">
             <a:extLst xmlns:a="http://schemas.openxmlformats.org/drawingml/2006/main">
               <a:ext uri="{FF2B5EF4-FFF2-40B4-BE49-F238E27FC236}">
-                <a16:creationId xmlns:a16="http://schemas.microsoft.com/office/drawing/2014/main" id="{2B35C350-3A44-4D49-9E77-EBC96352D009}"/>
+                <a16:creationId xmlns:a16="http://schemas.microsoft.com/office/drawing/2014/main" id="{97498305-BC52-4FC2-BFF2-7B3FD2361C52}"/>
               </a:ext>
             </a:extLst>
           </p:cNvPr>
@@ -17531,7 +16727,7 @@
           <p:cNvPr id="15" name="p05-l2">
             <a:extLst xmlns:a="http://schemas.openxmlformats.org/drawingml/2006/main">
               <a:ext uri="{FF2B5EF4-FFF2-40B4-BE49-F238E27FC236}">
-                <a16:creationId xmlns:a16="http://schemas.microsoft.com/office/drawing/2014/main" id="{352BB8DC-13B6-41CF-B74C-5A3A4E29232E}"/>
+                <a16:creationId xmlns:a16="http://schemas.microsoft.com/office/drawing/2014/main" id="{F35B604E-4EAB-4E56-88F5-056BB73EDEA3}"/>
               </a:ext>
             </a:extLst>
           </p:cNvPr>
@@ -17586,7 +16782,7 @@
           <p:cNvPr id="16" name="p05-d2">
             <a:extLst xmlns:a="http://schemas.openxmlformats.org/drawingml/2006/main">
               <a:ext uri="{FF2B5EF4-FFF2-40B4-BE49-F238E27FC236}">
-                <a16:creationId xmlns:a16="http://schemas.microsoft.com/office/drawing/2014/main" id="{7CF54ED2-DDCC-4EC9-85DB-8FEED9441889}"/>
+                <a16:creationId xmlns:a16="http://schemas.microsoft.com/office/drawing/2014/main" id="{E0AB3A03-41FB-4C17-BF72-066ADB2A1929}"/>
               </a:ext>
             </a:extLst>
           </p:cNvPr>
@@ -17643,7 +16839,7 @@
           <p:cNvPr id="17" name="p05-up2">
             <a:extLst xmlns:a="http://schemas.openxmlformats.org/drawingml/2006/main">
               <a:ext uri="{FF2B5EF4-FFF2-40B4-BE49-F238E27FC236}">
-                <a16:creationId xmlns:a16="http://schemas.microsoft.com/office/drawing/2014/main" id="{D287F230-C053-4BE1-A23A-143BA2C1C326}"/>
+                <a16:creationId xmlns:a16="http://schemas.microsoft.com/office/drawing/2014/main" id="{D6A33EC1-FE09-4B6D-BBEF-8C66F627B4AD}"/>
               </a:ext>
             </a:extLst>
           </p:cNvPr>
@@ -17674,7 +16870,7 @@
           <p:cNvPr id="18" name="p05-n3">
             <a:extLst xmlns:a="http://schemas.openxmlformats.org/drawingml/2006/main">
               <a:ext uri="{FF2B5EF4-FFF2-40B4-BE49-F238E27FC236}">
-                <a16:creationId xmlns:a16="http://schemas.microsoft.com/office/drawing/2014/main" id="{2CB692B4-4DD1-4F78-BED8-9A1D9FC5B43E}"/>
+                <a16:creationId xmlns:a16="http://schemas.microsoft.com/office/drawing/2014/main" id="{5FB13D78-C98B-46D6-9EFA-2CC69761EF30}"/>
               </a:ext>
             </a:extLst>
           </p:cNvPr>
@@ -17731,7 +16927,7 @@
           <p:cNvPr id="19" name="p05-l3">
             <a:extLst xmlns:a="http://schemas.openxmlformats.org/drawingml/2006/main">
               <a:ext uri="{FF2B5EF4-FFF2-40B4-BE49-F238E27FC236}">
-                <a16:creationId xmlns:a16="http://schemas.microsoft.com/office/drawing/2014/main" id="{CBBD0196-68BA-47D5-8F18-7519C2CE1B08}"/>
+                <a16:creationId xmlns:a16="http://schemas.microsoft.com/office/drawing/2014/main" id="{350451EB-F762-4E29-A44A-EC150469718F}"/>
               </a:ext>
             </a:extLst>
           </p:cNvPr>
@@ -17786,7 +16982,7 @@
           <p:cNvPr id="20" name="p05-d3">
             <a:extLst xmlns:a="http://schemas.openxmlformats.org/drawingml/2006/main">
               <a:ext uri="{FF2B5EF4-FFF2-40B4-BE49-F238E27FC236}">
-                <a16:creationId xmlns:a16="http://schemas.microsoft.com/office/drawing/2014/main" id="{2B92CB16-79AB-466C-90B9-6F0B014147BC}"/>
+                <a16:creationId xmlns:a16="http://schemas.microsoft.com/office/drawing/2014/main" id="{3509C28D-AAF0-47B8-B9D5-616DEC407B60}"/>
               </a:ext>
             </a:extLst>
           </p:cNvPr>
@@ -17843,7 +17039,7 @@
           <p:cNvPr id="21" name="p05-up3">
             <a:extLst xmlns:a="http://schemas.openxmlformats.org/drawingml/2006/main">
               <a:ext uri="{FF2B5EF4-FFF2-40B4-BE49-F238E27FC236}">
-                <a16:creationId xmlns:a16="http://schemas.microsoft.com/office/drawing/2014/main" id="{9F67EDB5-0D7C-4854-BBBA-8D7F585858EC}"/>
+                <a16:creationId xmlns:a16="http://schemas.microsoft.com/office/drawing/2014/main" id="{ADEC8DE4-9777-478F-B33C-D6009006FF1D}"/>
               </a:ext>
             </a:extLst>
           </p:cNvPr>
@@ -17874,7 +17070,7 @@
           <p:cNvPr id="22" name="p05-n4">
             <a:extLst xmlns:a="http://schemas.openxmlformats.org/drawingml/2006/main">
               <a:ext uri="{FF2B5EF4-FFF2-40B4-BE49-F238E27FC236}">
-                <a16:creationId xmlns:a16="http://schemas.microsoft.com/office/drawing/2014/main" id="{4EC42E8E-B696-4885-A85D-AA9B10A3D429}"/>
+                <a16:creationId xmlns:a16="http://schemas.microsoft.com/office/drawing/2014/main" id="{1696573E-4B5C-4859-99E6-C1E255C53FBA}"/>
               </a:ext>
             </a:extLst>
           </p:cNvPr>
@@ -17931,7 +17127,7 @@
           <p:cNvPr id="23" name="p05-l4">
             <a:extLst xmlns:a="http://schemas.openxmlformats.org/drawingml/2006/main">
               <a:ext uri="{FF2B5EF4-FFF2-40B4-BE49-F238E27FC236}">
-                <a16:creationId xmlns:a16="http://schemas.microsoft.com/office/drawing/2014/main" id="{4CD380D5-A7D8-4ED1-8F69-EAF84B6249F5}"/>
+                <a16:creationId xmlns:a16="http://schemas.microsoft.com/office/drawing/2014/main" id="{42C93C3B-F2B6-4A40-AC69-59CF0D1AE9D7}"/>
               </a:ext>
             </a:extLst>
           </p:cNvPr>
@@ -17986,7 +17182,7 @@
           <p:cNvPr id="24" name="p05-d4">
             <a:extLst xmlns:a="http://schemas.openxmlformats.org/drawingml/2006/main">
               <a:ext uri="{FF2B5EF4-FFF2-40B4-BE49-F238E27FC236}">
-                <a16:creationId xmlns:a16="http://schemas.microsoft.com/office/drawing/2014/main" id="{CF414269-79AA-42A6-B8E5-DE12D73CB11C}"/>
+                <a16:creationId xmlns:a16="http://schemas.microsoft.com/office/drawing/2014/main" id="{9FACF536-776C-460F-9F44-D7CA3E208DB7}"/>
               </a:ext>
             </a:extLst>
           </p:cNvPr>
@@ -18043,7 +17239,7 @@
           <p:cNvPr id="25" name="p05-confirm">
             <a:extLst xmlns:a="http://schemas.openxmlformats.org/drawingml/2006/main">
               <a:ext uri="{FF2B5EF4-FFF2-40B4-BE49-F238E27FC236}">
-                <a16:creationId xmlns:a16="http://schemas.microsoft.com/office/drawing/2014/main" id="{7F774EFD-B582-46B7-BC37-8CFEA8F0F3BD}"/>
+                <a16:creationId xmlns:a16="http://schemas.microsoft.com/office/drawing/2014/main" id="{2E0F4413-3476-47B1-B506-6C1A57782352}"/>
               </a:ext>
             </a:extLst>
           </p:cNvPr>
@@ -18098,7 +17294,7 @@
           <p:cNvPr id="26" name="p05-redline">
             <a:extLst xmlns:a="http://schemas.openxmlformats.org/drawingml/2006/main">
               <a:ext uri="{FF2B5EF4-FFF2-40B4-BE49-F238E27FC236}">
-                <a16:creationId xmlns:a16="http://schemas.microsoft.com/office/drawing/2014/main" id="{501FC737-D80C-4898-B053-190D6347A9E7}"/>
+                <a16:creationId xmlns:a16="http://schemas.microsoft.com/office/drawing/2014/main" id="{D36B3860-2C8D-4323-8394-BBF26991D98A}"/>
               </a:ext>
             </a:extLst>
           </p:cNvPr>
@@ -18129,7 +17325,7 @@
           <p:cNvPr id="27" name="p05-bottom">
             <a:extLst xmlns:a="http://schemas.openxmlformats.org/drawingml/2006/main">
               <a:ext uri="{FF2B5EF4-FFF2-40B4-BE49-F238E27FC236}">
-                <a16:creationId xmlns:a16="http://schemas.microsoft.com/office/drawing/2014/main" id="{676FC04C-4F3E-4424-8600-2A5972A3D5D2}"/>
+                <a16:creationId xmlns:a16="http://schemas.microsoft.com/office/drawing/2014/main" id="{D77C2C3B-56BC-405E-811F-A35C569EDB72}"/>
               </a:ext>
             </a:extLst>
           </p:cNvPr>
@@ -18278,7 +17474,7 @@
           <p:cNvPr id="6" name="p06-axis">
             <a:extLst xmlns:a="http://schemas.openxmlformats.org/drawingml/2006/main">
               <a:ext uri="{FF2B5EF4-FFF2-40B4-BE49-F238E27FC236}">
-                <a16:creationId xmlns:a16="http://schemas.microsoft.com/office/drawing/2014/main" id="{4E669188-078B-4977-83AE-E354731B0564}"/>
+                <a16:creationId xmlns:a16="http://schemas.microsoft.com/office/drawing/2014/main" id="{8EA696C6-ACBF-45A5-8A71-4F0903105B11}"/>
               </a:ext>
             </a:extLst>
           </p:cNvPr>
@@ -18309,7 +17505,7 @@
           <p:cNvPr id="7" name="p06-i0">
             <a:extLst xmlns:a="http://schemas.openxmlformats.org/drawingml/2006/main">
               <a:ext uri="{FF2B5EF4-FFF2-40B4-BE49-F238E27FC236}">
-                <a16:creationId xmlns:a16="http://schemas.microsoft.com/office/drawing/2014/main" id="{0F8A6518-1914-4285-95F8-33FFF92446D8}"/>
+                <a16:creationId xmlns:a16="http://schemas.microsoft.com/office/drawing/2014/main" id="{A2E8D4B4-139A-4258-B5C1-748FCFE2CCAB}"/>
               </a:ext>
             </a:extLst>
           </p:cNvPr>
@@ -18366,7 +17562,7 @@
           <p:cNvPr id="8" name="p06-a0">
             <a:extLst xmlns:a="http://schemas.openxmlformats.org/drawingml/2006/main">
               <a:ext uri="{FF2B5EF4-FFF2-40B4-BE49-F238E27FC236}">
-                <a16:creationId xmlns:a16="http://schemas.microsoft.com/office/drawing/2014/main" id="{49C544CA-8127-4317-A638-E5DD7F3B15F1}"/>
+                <a16:creationId xmlns:a16="http://schemas.microsoft.com/office/drawing/2014/main" id="{0B10D7FB-EC2C-4F6F-BD13-07A304798A61}"/>
               </a:ext>
             </a:extLst>
           </p:cNvPr>
@@ -18421,7 +17617,7 @@
           <p:cNvPr id="9" name="p06-b0">
             <a:extLst xmlns:a="http://schemas.openxmlformats.org/drawingml/2006/main">
               <a:ext uri="{FF2B5EF4-FFF2-40B4-BE49-F238E27FC236}">
-                <a16:creationId xmlns:a16="http://schemas.microsoft.com/office/drawing/2014/main" id="{4FF5123A-A957-4D50-BC6B-AC041A1D7981}"/>
+                <a16:creationId xmlns:a16="http://schemas.microsoft.com/office/drawing/2014/main" id="{41A50F75-6B95-46C3-9042-BC6932AF1C2A}"/>
               </a:ext>
             </a:extLst>
           </p:cNvPr>
@@ -18474,7 +17670,7 @@
           <p:cNvPr id="10" name="p06-i1">
             <a:extLst xmlns:a="http://schemas.openxmlformats.org/drawingml/2006/main">
               <a:ext uri="{FF2B5EF4-FFF2-40B4-BE49-F238E27FC236}">
-                <a16:creationId xmlns:a16="http://schemas.microsoft.com/office/drawing/2014/main" id="{7E11E4CE-A48E-46F5-91F7-F4E0DF1DE22F}"/>
+                <a16:creationId xmlns:a16="http://schemas.microsoft.com/office/drawing/2014/main" id="{26ABAC78-3159-440E-9D86-FC708D6EA8C3}"/>
               </a:ext>
             </a:extLst>
           </p:cNvPr>
@@ -18531,7 +17727,7 @@
           <p:cNvPr id="11" name="p06-a1">
             <a:extLst xmlns:a="http://schemas.openxmlformats.org/drawingml/2006/main">
               <a:ext uri="{FF2B5EF4-FFF2-40B4-BE49-F238E27FC236}">
-                <a16:creationId xmlns:a16="http://schemas.microsoft.com/office/drawing/2014/main" id="{E1449190-EAE3-4ACE-BC80-B86F8DE7D646}"/>
+                <a16:creationId xmlns:a16="http://schemas.microsoft.com/office/drawing/2014/main" id="{0ECE18B0-ED97-4D02-B62E-846671EEDB1F}"/>
               </a:ext>
             </a:extLst>
           </p:cNvPr>
@@ -18586,7 +17782,7 @@
           <p:cNvPr id="12" name="p06-b1">
             <a:extLst xmlns:a="http://schemas.openxmlformats.org/drawingml/2006/main">
               <a:ext uri="{FF2B5EF4-FFF2-40B4-BE49-F238E27FC236}">
-                <a16:creationId xmlns:a16="http://schemas.microsoft.com/office/drawing/2014/main" id="{DC8B45C1-C251-43A1-AD99-8B4B0FA2E596}"/>
+                <a16:creationId xmlns:a16="http://schemas.microsoft.com/office/drawing/2014/main" id="{248BF410-AFF4-4BDB-95CB-08AED69A03DF}"/>
               </a:ext>
             </a:extLst>
           </p:cNvPr>
@@ -18639,7 +17835,7 @@
           <p:cNvPr id="13" name="p06-i2">
             <a:extLst xmlns:a="http://schemas.openxmlformats.org/drawingml/2006/main">
               <a:ext uri="{FF2B5EF4-FFF2-40B4-BE49-F238E27FC236}">
-                <a16:creationId xmlns:a16="http://schemas.microsoft.com/office/drawing/2014/main" id="{51EDFE7A-B1A5-43DD-A6F3-31A8306521B8}"/>
+                <a16:creationId xmlns:a16="http://schemas.microsoft.com/office/drawing/2014/main" id="{049F1BB8-688D-4517-BBFD-3A1F82D91F30}"/>
               </a:ext>
             </a:extLst>
           </p:cNvPr>
@@ -18696,7 +17892,7 @@
           <p:cNvPr id="14" name="p06-a2">
             <a:extLst xmlns:a="http://schemas.openxmlformats.org/drawingml/2006/main">
               <a:ext uri="{FF2B5EF4-FFF2-40B4-BE49-F238E27FC236}">
-                <a16:creationId xmlns:a16="http://schemas.microsoft.com/office/drawing/2014/main" id="{930CAA24-08C6-46BB-9408-423570BEF706}"/>
+                <a16:creationId xmlns:a16="http://schemas.microsoft.com/office/drawing/2014/main" id="{06232921-BDC2-44E3-8DA8-46261C51DFDC}"/>
               </a:ext>
             </a:extLst>
           </p:cNvPr>
@@ -18751,7 +17947,7 @@
           <p:cNvPr id="15" name="p06-b2">
             <a:extLst xmlns:a="http://schemas.openxmlformats.org/drawingml/2006/main">
               <a:ext uri="{FF2B5EF4-FFF2-40B4-BE49-F238E27FC236}">
-                <a16:creationId xmlns:a16="http://schemas.microsoft.com/office/drawing/2014/main" id="{28638CC0-D59D-4E82-92C0-BC062F9BA156}"/>
+                <a16:creationId xmlns:a16="http://schemas.microsoft.com/office/drawing/2014/main" id="{83A54013-6331-4E12-98B6-E61DE5554D05}"/>
               </a:ext>
             </a:extLst>
           </p:cNvPr>
@@ -18804,7 +18000,7 @@
           <p:cNvPr id="16" name="p06-i3">
             <a:extLst xmlns:a="http://schemas.openxmlformats.org/drawingml/2006/main">
               <a:ext uri="{FF2B5EF4-FFF2-40B4-BE49-F238E27FC236}">
-                <a16:creationId xmlns:a16="http://schemas.microsoft.com/office/drawing/2014/main" id="{E766B6EC-3970-4997-9E14-EA84E5BB59B5}"/>
+                <a16:creationId xmlns:a16="http://schemas.microsoft.com/office/drawing/2014/main" id="{2D85E45D-6802-45E9-8A86-DB81349F8E73}"/>
               </a:ext>
             </a:extLst>
           </p:cNvPr>
@@ -18861,7 +18057,7 @@
           <p:cNvPr id="17" name="p06-a3">
             <a:extLst xmlns:a="http://schemas.openxmlformats.org/drawingml/2006/main">
               <a:ext uri="{FF2B5EF4-FFF2-40B4-BE49-F238E27FC236}">
-                <a16:creationId xmlns:a16="http://schemas.microsoft.com/office/drawing/2014/main" id="{CA38C0F9-2A0A-40CD-8228-37C62B3278E7}"/>
+                <a16:creationId xmlns:a16="http://schemas.microsoft.com/office/drawing/2014/main" id="{1DED59FF-198C-4CAF-B846-C9E2F8B8B9C0}"/>
               </a:ext>
             </a:extLst>
           </p:cNvPr>
@@ -18936,7 +18132,7 @@
           <p:cNvPr id="18" name="p06-b3">
             <a:extLst xmlns:a="http://schemas.openxmlformats.org/drawingml/2006/main">
               <a:ext uri="{FF2B5EF4-FFF2-40B4-BE49-F238E27FC236}">
-                <a16:creationId xmlns:a16="http://schemas.microsoft.com/office/drawing/2014/main" id="{675DB286-F32D-4403-9DD0-8BEBC29ECE56}"/>
+                <a16:creationId xmlns:a16="http://schemas.microsoft.com/office/drawing/2014/main" id="{A62EEB63-6CA2-4306-ACBD-2B16811AE0D3}"/>
               </a:ext>
             </a:extLst>
           </p:cNvPr>
@@ -18989,7 +18185,7 @@
           <p:cNvPr id="19" name="p06-i4">
             <a:extLst xmlns:a="http://schemas.openxmlformats.org/drawingml/2006/main">
               <a:ext uri="{FF2B5EF4-FFF2-40B4-BE49-F238E27FC236}">
-                <a16:creationId xmlns:a16="http://schemas.microsoft.com/office/drawing/2014/main" id="{F359EFB7-1F0D-4705-AC3E-4286878C5847}"/>
+                <a16:creationId xmlns:a16="http://schemas.microsoft.com/office/drawing/2014/main" id="{FA4695CD-79FB-401A-B7B5-C2A88E44D24B}"/>
               </a:ext>
             </a:extLst>
           </p:cNvPr>
@@ -19046,7 +18242,7 @@
           <p:cNvPr id="20" name="p06-a4">
             <a:extLst xmlns:a="http://schemas.openxmlformats.org/drawingml/2006/main">
               <a:ext uri="{FF2B5EF4-FFF2-40B4-BE49-F238E27FC236}">
-                <a16:creationId xmlns:a16="http://schemas.microsoft.com/office/drawing/2014/main" id="{A6DDB96D-F3DD-44BA-93EF-B8D8E3EFDA42}"/>
+                <a16:creationId xmlns:a16="http://schemas.microsoft.com/office/drawing/2014/main" id="{C0DCCF96-343F-4047-9415-464192852129}"/>
               </a:ext>
             </a:extLst>
           </p:cNvPr>
@@ -19121,7 +18317,7 @@
           <p:cNvPr id="21" name="p06-b4">
             <a:extLst xmlns:a="http://schemas.openxmlformats.org/drawingml/2006/main">
               <a:ext uri="{FF2B5EF4-FFF2-40B4-BE49-F238E27FC236}">
-                <a16:creationId xmlns:a16="http://schemas.microsoft.com/office/drawing/2014/main" id="{C6CAD7CA-33FC-4865-8F71-0555148F83EF}"/>
+                <a16:creationId xmlns:a16="http://schemas.microsoft.com/office/drawing/2014/main" id="{24B24A29-BBB4-4606-876E-3E386B8AF6D5}"/>
               </a:ext>
             </a:extLst>
           </p:cNvPr>
@@ -19174,7 +18370,7 @@
           <p:cNvPr id="22" name="p06-i5">
             <a:extLst xmlns:a="http://schemas.openxmlformats.org/drawingml/2006/main">
               <a:ext uri="{FF2B5EF4-FFF2-40B4-BE49-F238E27FC236}">
-                <a16:creationId xmlns:a16="http://schemas.microsoft.com/office/drawing/2014/main" id="{D7514F20-BF6B-4261-A58B-B386E7ECF474}"/>
+                <a16:creationId xmlns:a16="http://schemas.microsoft.com/office/drawing/2014/main" id="{CE7D394A-C27A-4A73-B9BF-C632AD80BDCF}"/>
               </a:ext>
             </a:extLst>
           </p:cNvPr>
@@ -19231,7 +18427,7 @@
           <p:cNvPr id="23" name="p06-a5">
             <a:extLst xmlns:a="http://schemas.openxmlformats.org/drawingml/2006/main">
               <a:ext uri="{FF2B5EF4-FFF2-40B4-BE49-F238E27FC236}">
-                <a16:creationId xmlns:a16="http://schemas.microsoft.com/office/drawing/2014/main" id="{7346CB36-D467-4776-9A67-F3846042ABCD}"/>
+                <a16:creationId xmlns:a16="http://schemas.microsoft.com/office/drawing/2014/main" id="{7B7D0289-DF57-4E51-9349-C600697F82EA}"/>
               </a:ext>
             </a:extLst>
           </p:cNvPr>
@@ -19286,7 +18482,7 @@
           <p:cNvPr id="24" name="p06-b5">
             <a:extLst xmlns:a="http://schemas.openxmlformats.org/drawingml/2006/main">
               <a:ext uri="{FF2B5EF4-FFF2-40B4-BE49-F238E27FC236}">
-                <a16:creationId xmlns:a16="http://schemas.microsoft.com/office/drawing/2014/main" id="{39499254-00EB-4BB3-B112-5DAA51888C0E}"/>
+                <a16:creationId xmlns:a16="http://schemas.microsoft.com/office/drawing/2014/main" id="{3F92C800-BB92-4ECC-B760-8B053DBBDDF9}"/>
               </a:ext>
             </a:extLst>
           </p:cNvPr>
@@ -19339,7 +18535,7 @@
           <p:cNvPr id="25" name="p06-left">
             <a:extLst xmlns:a="http://schemas.openxmlformats.org/drawingml/2006/main">
               <a:ext uri="{FF2B5EF4-FFF2-40B4-BE49-F238E27FC236}">
-                <a16:creationId xmlns:a16="http://schemas.microsoft.com/office/drawing/2014/main" id="{CB657491-896A-42A4-BE24-1C29B7D37F0A}"/>
+                <a16:creationId xmlns:a16="http://schemas.microsoft.com/office/drawing/2014/main" id="{D8C70284-E498-470C-A7ED-DF9BF8F66E27}"/>
               </a:ext>
             </a:extLst>
           </p:cNvPr>
@@ -19414,7 +18610,7 @@
           <p:cNvPr id="26" name="p06-right">
             <a:extLst xmlns:a="http://schemas.openxmlformats.org/drawingml/2006/main">
               <a:ext uri="{FF2B5EF4-FFF2-40B4-BE49-F238E27FC236}">
-                <a16:creationId xmlns:a16="http://schemas.microsoft.com/office/drawing/2014/main" id="{F8975CD8-66CF-4166-98FE-3023478B5ABE}"/>
+                <a16:creationId xmlns:a16="http://schemas.microsoft.com/office/drawing/2014/main" id="{71CAB724-B0F2-4E3B-880B-6A61948A2FF7}"/>
               </a:ext>
             </a:extLst>
           </p:cNvPr>
@@ -19583,7 +18779,7 @@
           <p:cNvPr id="6" name="p07-n0">
             <a:extLst xmlns:a="http://schemas.openxmlformats.org/drawingml/2006/main">
               <a:ext uri="{FF2B5EF4-FFF2-40B4-BE49-F238E27FC236}">
-                <a16:creationId xmlns:a16="http://schemas.microsoft.com/office/drawing/2014/main" id="{D12508BB-CAF4-4D1D-8CBD-E956B2795966}"/>
+                <a16:creationId xmlns:a16="http://schemas.microsoft.com/office/drawing/2014/main" id="{A9898CB8-AA3C-4FA9-AC4A-027D1D5044AD}"/>
               </a:ext>
             </a:extLst>
           </p:cNvPr>
@@ -19640,7 +18836,7 @@
           <p:cNvPr id="7" name="p07-a0">
             <a:extLst xmlns:a="http://schemas.openxmlformats.org/drawingml/2006/main">
               <a:ext uri="{FF2B5EF4-FFF2-40B4-BE49-F238E27FC236}">
-                <a16:creationId xmlns:a16="http://schemas.microsoft.com/office/drawing/2014/main" id="{8B42E51B-1878-443A-B904-E658B29D9683}"/>
+                <a16:creationId xmlns:a16="http://schemas.microsoft.com/office/drawing/2014/main" id="{9FC12BC6-2192-4F5A-ADE1-98552A5A9B5B}"/>
               </a:ext>
             </a:extLst>
           </p:cNvPr>
@@ -19695,7 +18891,7 @@
           <p:cNvPr id="8" name="p07-b0">
             <a:extLst xmlns:a="http://schemas.openxmlformats.org/drawingml/2006/main">
               <a:ext uri="{FF2B5EF4-FFF2-40B4-BE49-F238E27FC236}">
-                <a16:creationId xmlns:a16="http://schemas.microsoft.com/office/drawing/2014/main" id="{FA994876-F2B1-40AA-ACAD-24BB4AE25D0F}"/>
+                <a16:creationId xmlns:a16="http://schemas.microsoft.com/office/drawing/2014/main" id="{87C07F24-0A94-4904-A16C-D209311D9E0E}"/>
               </a:ext>
             </a:extLst>
           </p:cNvPr>
@@ -19748,7 +18944,7 @@
           <p:cNvPr id="9" name="p07-l0">
             <a:extLst xmlns:a="http://schemas.openxmlformats.org/drawingml/2006/main">
               <a:ext uri="{FF2B5EF4-FFF2-40B4-BE49-F238E27FC236}">
-                <a16:creationId xmlns:a16="http://schemas.microsoft.com/office/drawing/2014/main" id="{27A11177-3B4A-4B5B-9149-0F11D1DA962C}"/>
+                <a16:creationId xmlns:a16="http://schemas.microsoft.com/office/drawing/2014/main" id="{5118C392-7225-4394-BC38-8EFBCF82BA2C}"/>
               </a:ext>
             </a:extLst>
           </p:cNvPr>
@@ -19779,7 +18975,7 @@
           <p:cNvPr id="10" name="p07-n1">
             <a:extLst xmlns:a="http://schemas.openxmlformats.org/drawingml/2006/main">
               <a:ext uri="{FF2B5EF4-FFF2-40B4-BE49-F238E27FC236}">
-                <a16:creationId xmlns:a16="http://schemas.microsoft.com/office/drawing/2014/main" id="{E5C43A7E-0287-49D6-9DC6-4A2DA328DE04}"/>
+                <a16:creationId xmlns:a16="http://schemas.microsoft.com/office/drawing/2014/main" id="{22E90F5F-6658-469A-9EFA-BFF37D691047}"/>
               </a:ext>
             </a:extLst>
           </p:cNvPr>
@@ -19836,7 +19032,7 @@
           <p:cNvPr id="11" name="p07-a1">
             <a:extLst xmlns:a="http://schemas.openxmlformats.org/drawingml/2006/main">
               <a:ext uri="{FF2B5EF4-FFF2-40B4-BE49-F238E27FC236}">
-                <a16:creationId xmlns:a16="http://schemas.microsoft.com/office/drawing/2014/main" id="{AF762C96-AB3D-496C-AB62-FEC25D5EEF98}"/>
+                <a16:creationId xmlns:a16="http://schemas.microsoft.com/office/drawing/2014/main" id="{35CE1F57-BC69-4111-BA36-FB1FBE6CC39E}"/>
               </a:ext>
             </a:extLst>
           </p:cNvPr>
@@ -19891,7 +19087,7 @@
           <p:cNvPr id="12" name="p07-b1">
             <a:extLst xmlns:a="http://schemas.openxmlformats.org/drawingml/2006/main">
               <a:ext uri="{FF2B5EF4-FFF2-40B4-BE49-F238E27FC236}">
-                <a16:creationId xmlns:a16="http://schemas.microsoft.com/office/drawing/2014/main" id="{91E80771-8D5C-4597-BDD6-0D554DB26005}"/>
+                <a16:creationId xmlns:a16="http://schemas.microsoft.com/office/drawing/2014/main" id="{AE050C47-F003-49DC-9EB2-D0A6B8006852}"/>
               </a:ext>
             </a:extLst>
           </p:cNvPr>
@@ -19944,7 +19140,7 @@
           <p:cNvPr id="13" name="p07-l1">
             <a:extLst xmlns:a="http://schemas.openxmlformats.org/drawingml/2006/main">
               <a:ext uri="{FF2B5EF4-FFF2-40B4-BE49-F238E27FC236}">
-                <a16:creationId xmlns:a16="http://schemas.microsoft.com/office/drawing/2014/main" id="{02BE32E1-8F06-48D4-92B0-674B2FAE81E2}"/>
+                <a16:creationId xmlns:a16="http://schemas.microsoft.com/office/drawing/2014/main" id="{D67E781E-985A-4096-AC8E-AC88D482BFD9}"/>
               </a:ext>
             </a:extLst>
           </p:cNvPr>
@@ -19975,7 +19171,7 @@
           <p:cNvPr id="14" name="p07-n2">
             <a:extLst xmlns:a="http://schemas.openxmlformats.org/drawingml/2006/main">
               <a:ext uri="{FF2B5EF4-FFF2-40B4-BE49-F238E27FC236}">
-                <a16:creationId xmlns:a16="http://schemas.microsoft.com/office/drawing/2014/main" id="{E7733B3C-1C7B-4BB6-8F81-259B00B1D581}"/>
+                <a16:creationId xmlns:a16="http://schemas.microsoft.com/office/drawing/2014/main" id="{224F5B39-C5CA-46D7-9043-D8F02DBB791A}"/>
               </a:ext>
             </a:extLst>
           </p:cNvPr>
@@ -20032,7 +19228,7 @@
           <p:cNvPr id="15" name="p07-a2">
             <a:extLst xmlns:a="http://schemas.openxmlformats.org/drawingml/2006/main">
               <a:ext uri="{FF2B5EF4-FFF2-40B4-BE49-F238E27FC236}">
-                <a16:creationId xmlns:a16="http://schemas.microsoft.com/office/drawing/2014/main" id="{E150507E-48B7-47F5-BA9A-017AF7619B62}"/>
+                <a16:creationId xmlns:a16="http://schemas.microsoft.com/office/drawing/2014/main" id="{A4F0846A-855E-4B96-A655-2218959A4637}"/>
               </a:ext>
             </a:extLst>
           </p:cNvPr>
@@ -20087,7 +19283,7 @@
           <p:cNvPr id="16" name="p07-b2">
             <a:extLst xmlns:a="http://schemas.openxmlformats.org/drawingml/2006/main">
               <a:ext uri="{FF2B5EF4-FFF2-40B4-BE49-F238E27FC236}">
-                <a16:creationId xmlns:a16="http://schemas.microsoft.com/office/drawing/2014/main" id="{C0EFCF96-CF7B-4142-8F04-0E0F97923435}"/>
+                <a16:creationId xmlns:a16="http://schemas.microsoft.com/office/drawing/2014/main" id="{CB7C7CD7-DB07-43CD-983C-39F94AD670FF}"/>
               </a:ext>
             </a:extLst>
           </p:cNvPr>
@@ -20140,7 +19336,7 @@
           <p:cNvPr id="17" name="p07-l2">
             <a:extLst xmlns:a="http://schemas.openxmlformats.org/drawingml/2006/main">
               <a:ext uri="{FF2B5EF4-FFF2-40B4-BE49-F238E27FC236}">
-                <a16:creationId xmlns:a16="http://schemas.microsoft.com/office/drawing/2014/main" id="{E09F9E16-CFCF-47B9-B3E0-032E88949AAD}"/>
+                <a16:creationId xmlns:a16="http://schemas.microsoft.com/office/drawing/2014/main" id="{F984B50C-2DDA-4F63-AE64-69033B0314A9}"/>
               </a:ext>
             </a:extLst>
           </p:cNvPr>
@@ -20171,7 +19367,7 @@
           <p:cNvPr id="18" name="p07-n3">
             <a:extLst xmlns:a="http://schemas.openxmlformats.org/drawingml/2006/main">
               <a:ext uri="{FF2B5EF4-FFF2-40B4-BE49-F238E27FC236}">
-                <a16:creationId xmlns:a16="http://schemas.microsoft.com/office/drawing/2014/main" id="{E16A9310-50DA-4229-AC5C-5C3A2F4FDFFC}"/>
+                <a16:creationId xmlns:a16="http://schemas.microsoft.com/office/drawing/2014/main" id="{FB7BDCB2-EDEB-4D38-95C8-EBE29BA8ACCF}"/>
               </a:ext>
             </a:extLst>
           </p:cNvPr>
@@ -20228,7 +19424,7 @@
           <p:cNvPr id="19" name="p07-a3">
             <a:extLst xmlns:a="http://schemas.openxmlformats.org/drawingml/2006/main">
               <a:ext uri="{FF2B5EF4-FFF2-40B4-BE49-F238E27FC236}">
-                <a16:creationId xmlns:a16="http://schemas.microsoft.com/office/drawing/2014/main" id="{8528D0A3-125E-4759-B6A9-DD881923B665}"/>
+                <a16:creationId xmlns:a16="http://schemas.microsoft.com/office/drawing/2014/main" id="{3D2E805D-BFC1-4D0E-AF46-CA3ABDE1EAB0}"/>
               </a:ext>
             </a:extLst>
           </p:cNvPr>
@@ -20283,7 +19479,7 @@
           <p:cNvPr id="20" name="p07-b3">
             <a:extLst xmlns:a="http://schemas.openxmlformats.org/drawingml/2006/main">
               <a:ext uri="{FF2B5EF4-FFF2-40B4-BE49-F238E27FC236}">
-                <a16:creationId xmlns:a16="http://schemas.microsoft.com/office/drawing/2014/main" id="{3D1CEC79-4029-4EB3-B6A5-9648D69095D4}"/>
+                <a16:creationId xmlns:a16="http://schemas.microsoft.com/office/drawing/2014/main" id="{8DC2E940-B9DB-40E2-8773-8352EC8C554A}"/>
               </a:ext>
             </a:extLst>
           </p:cNvPr>
@@ -20336,7 +19532,7 @@
           <p:cNvPr id="21" name="p07-l3">
             <a:extLst xmlns:a="http://schemas.openxmlformats.org/drawingml/2006/main">
               <a:ext uri="{FF2B5EF4-FFF2-40B4-BE49-F238E27FC236}">
-                <a16:creationId xmlns:a16="http://schemas.microsoft.com/office/drawing/2014/main" id="{D1A4FAA8-A3A2-4F93-BC67-0666E4ABEB7D}"/>
+                <a16:creationId xmlns:a16="http://schemas.microsoft.com/office/drawing/2014/main" id="{B68C1000-A7EC-4F7D-AC84-0292ADC6CCA2}"/>
               </a:ext>
             </a:extLst>
           </p:cNvPr>
@@ -20367,7 +19563,7 @@
           <p:cNvPr id="22" name="p07-n4">
             <a:extLst xmlns:a="http://schemas.openxmlformats.org/drawingml/2006/main">
               <a:ext uri="{FF2B5EF4-FFF2-40B4-BE49-F238E27FC236}">
-                <a16:creationId xmlns:a16="http://schemas.microsoft.com/office/drawing/2014/main" id="{2C2DA115-B890-4AC5-A84E-D6CF45D62543}"/>
+                <a16:creationId xmlns:a16="http://schemas.microsoft.com/office/drawing/2014/main" id="{8D8314A9-4855-4622-B1D5-0D0CD744CA42}"/>
               </a:ext>
             </a:extLst>
           </p:cNvPr>
@@ -20424,7 +19620,7 @@
           <p:cNvPr id="23" name="p07-a4">
             <a:extLst xmlns:a="http://schemas.openxmlformats.org/drawingml/2006/main">
               <a:ext uri="{FF2B5EF4-FFF2-40B4-BE49-F238E27FC236}">
-                <a16:creationId xmlns:a16="http://schemas.microsoft.com/office/drawing/2014/main" id="{25247483-B866-4138-8A6F-D024A4CC07CF}"/>
+                <a16:creationId xmlns:a16="http://schemas.microsoft.com/office/drawing/2014/main" id="{B98F0FC3-FA81-4A7C-A95C-2153D4B5D500}"/>
               </a:ext>
             </a:extLst>
           </p:cNvPr>
@@ -20479,7 +19675,7 @@
           <p:cNvPr id="24" name="p07-b4">
             <a:extLst xmlns:a="http://schemas.openxmlformats.org/drawingml/2006/main">
               <a:ext uri="{FF2B5EF4-FFF2-40B4-BE49-F238E27FC236}">
-                <a16:creationId xmlns:a16="http://schemas.microsoft.com/office/drawing/2014/main" id="{50E8F737-C5BA-4FE3-9CF9-BBBB77D441A3}"/>
+                <a16:creationId xmlns:a16="http://schemas.microsoft.com/office/drawing/2014/main" id="{A5A23231-EC09-4626-B680-5C6AC823F617}"/>
               </a:ext>
             </a:extLst>
           </p:cNvPr>
@@ -20532,7 +19728,7 @@
           <p:cNvPr id="25" name="p07-tree">
             <a:extLst xmlns:a="http://schemas.openxmlformats.org/drawingml/2006/main">
               <a:ext uri="{FF2B5EF4-FFF2-40B4-BE49-F238E27FC236}">
-                <a16:creationId xmlns:a16="http://schemas.microsoft.com/office/drawing/2014/main" id="{CC428799-DC96-4882-8237-24DF94A08BE7}"/>
+                <a16:creationId xmlns:a16="http://schemas.microsoft.com/office/drawing/2014/main" id="{958B07B7-D865-4DD5-80CB-A8060ACB424D}"/>
               </a:ext>
             </a:extLst>
           </p:cNvPr>
@@ -20807,7 +20003,7 @@
           <p:cNvPr id="6" name="p08-0">
             <a:extLst xmlns:a="http://schemas.openxmlformats.org/drawingml/2006/main">
               <a:ext uri="{FF2B5EF4-FFF2-40B4-BE49-F238E27FC236}">
-                <a16:creationId xmlns:a16="http://schemas.microsoft.com/office/drawing/2014/main" id="{6F01CD99-5270-42AA-B594-19EDA9FF9726}"/>
+                <a16:creationId xmlns:a16="http://schemas.microsoft.com/office/drawing/2014/main" id="{445CC964-75E2-4C1D-B879-91D6C482376B}"/>
               </a:ext>
             </a:extLst>
           </p:cNvPr>
@@ -20892,7 +20088,7 @@
           <p:cNvPr id="7" name="p08-a0">
             <a:extLst xmlns:a="http://schemas.openxmlformats.org/drawingml/2006/main">
               <a:ext uri="{FF2B5EF4-FFF2-40B4-BE49-F238E27FC236}">
-                <a16:creationId xmlns:a16="http://schemas.microsoft.com/office/drawing/2014/main" id="{008DBD34-CFCB-4303-91C6-95A4EAB72BF6}"/>
+                <a16:creationId xmlns:a16="http://schemas.microsoft.com/office/drawing/2014/main" id="{02A6DA8E-A57E-43E3-8A0E-20A8178D492E}"/>
               </a:ext>
             </a:extLst>
           </p:cNvPr>
@@ -20945,7 +20141,7 @@
           <p:cNvPr id="8" name="p08-1">
             <a:extLst xmlns:a="http://schemas.openxmlformats.org/drawingml/2006/main">
               <a:ext uri="{FF2B5EF4-FFF2-40B4-BE49-F238E27FC236}">
-                <a16:creationId xmlns:a16="http://schemas.microsoft.com/office/drawing/2014/main" id="{947E159F-3CA7-49AB-B901-245747F7E434}"/>
+                <a16:creationId xmlns:a16="http://schemas.microsoft.com/office/drawing/2014/main" id="{920085F7-C443-4106-897A-3595F4A7EB47}"/>
               </a:ext>
             </a:extLst>
           </p:cNvPr>
@@ -21030,7 +20226,7 @@
           <p:cNvPr id="9" name="p08-a1">
             <a:extLst xmlns:a="http://schemas.openxmlformats.org/drawingml/2006/main">
               <a:ext uri="{FF2B5EF4-FFF2-40B4-BE49-F238E27FC236}">
-                <a16:creationId xmlns:a16="http://schemas.microsoft.com/office/drawing/2014/main" id="{30FD4D8B-C6EE-4377-9E20-D3DB0563019B}"/>
+                <a16:creationId xmlns:a16="http://schemas.microsoft.com/office/drawing/2014/main" id="{1DC555C9-AE08-410D-A687-851E25656951}"/>
               </a:ext>
             </a:extLst>
           </p:cNvPr>
@@ -21083,7 +20279,7 @@
           <p:cNvPr id="10" name="p08-2">
             <a:extLst xmlns:a="http://schemas.openxmlformats.org/drawingml/2006/main">
               <a:ext uri="{FF2B5EF4-FFF2-40B4-BE49-F238E27FC236}">
-                <a16:creationId xmlns:a16="http://schemas.microsoft.com/office/drawing/2014/main" id="{7BC5AC62-243B-4008-81BC-B6F9CA1725FF}"/>
+                <a16:creationId xmlns:a16="http://schemas.microsoft.com/office/drawing/2014/main" id="{18EC0EA5-2765-4D47-B3FD-22C947E2EB65}"/>
               </a:ext>
             </a:extLst>
           </p:cNvPr>
@@ -21168,7 +20364,7 @@
           <p:cNvPr id="11" name="p08-a2">
             <a:extLst xmlns:a="http://schemas.openxmlformats.org/drawingml/2006/main">
               <a:ext uri="{FF2B5EF4-FFF2-40B4-BE49-F238E27FC236}">
-                <a16:creationId xmlns:a16="http://schemas.microsoft.com/office/drawing/2014/main" id="{50DC49EB-6720-4B4A-9337-80EDDF291239}"/>
+                <a16:creationId xmlns:a16="http://schemas.microsoft.com/office/drawing/2014/main" id="{1F750310-DC22-45DB-92DC-D3DB9AFF4F8B}"/>
               </a:ext>
             </a:extLst>
           </p:cNvPr>
@@ -21221,7 +20417,7 @@
           <p:cNvPr id="12" name="p08-3">
             <a:extLst xmlns:a="http://schemas.openxmlformats.org/drawingml/2006/main">
               <a:ext uri="{FF2B5EF4-FFF2-40B4-BE49-F238E27FC236}">
-                <a16:creationId xmlns:a16="http://schemas.microsoft.com/office/drawing/2014/main" id="{B3E413BA-B014-4818-A0C2-01FAA60809B9}"/>
+                <a16:creationId xmlns:a16="http://schemas.microsoft.com/office/drawing/2014/main" id="{0BE27558-45BB-41B4-A57C-62B6B078D301}"/>
               </a:ext>
             </a:extLst>
           </p:cNvPr>
@@ -21306,7 +20502,7 @@
           <p:cNvPr id="13" name="p08-fail">
             <a:extLst xmlns:a="http://schemas.openxmlformats.org/drawingml/2006/main">
               <a:ext uri="{FF2B5EF4-FFF2-40B4-BE49-F238E27FC236}">
-                <a16:creationId xmlns:a16="http://schemas.microsoft.com/office/drawing/2014/main" id="{B0A987CC-407F-43B1-9664-AF409230571E}"/>
+                <a16:creationId xmlns:a16="http://schemas.microsoft.com/office/drawing/2014/main" id="{BDAFB163-D225-41B7-B78A-7C069C84EF32}"/>
               </a:ext>
             </a:extLst>
           </p:cNvPr>
@@ -21337,7 +20533,7 @@
           <p:cNvPr id="14" name="p08-failbox">
             <a:extLst xmlns:a="http://schemas.openxmlformats.org/drawingml/2006/main">
               <a:ext uri="{FF2B5EF4-FFF2-40B4-BE49-F238E27FC236}">
-                <a16:creationId xmlns:a16="http://schemas.microsoft.com/office/drawing/2014/main" id="{02D91CAF-D560-4F46-B7B2-F689FCEA1626}"/>
+                <a16:creationId xmlns:a16="http://schemas.microsoft.com/office/drawing/2014/main" id="{BEA6A7D4-546E-4500-8C06-835A00B2556D}"/>
               </a:ext>
             </a:extLst>
           </p:cNvPr>
@@ -21412,7 +20608,7 @@
           <p:cNvPr id="15" name="p08-bottom">
             <a:extLst xmlns:a="http://schemas.openxmlformats.org/drawingml/2006/main">
               <a:ext uri="{FF2B5EF4-FFF2-40B4-BE49-F238E27FC236}">
-                <a16:creationId xmlns:a16="http://schemas.microsoft.com/office/drawing/2014/main" id="{531D12C2-7547-49B0-A49E-DBD34DA22C1E}"/>
+                <a16:creationId xmlns:a16="http://schemas.microsoft.com/office/drawing/2014/main" id="{B550A82B-110F-4671-8948-E2EE5AFA7D82}"/>
               </a:ext>
             </a:extLst>
           </p:cNvPr>
@@ -21561,7 +20757,7 @@
           <p:cNvPr id="6" name="p09-n0">
             <a:extLst xmlns:a="http://schemas.openxmlformats.org/drawingml/2006/main">
               <a:ext uri="{FF2B5EF4-FFF2-40B4-BE49-F238E27FC236}">
-                <a16:creationId xmlns:a16="http://schemas.microsoft.com/office/drawing/2014/main" id="{AA6CA06C-DF2E-4D80-9176-FD57C0AEFB25}"/>
+                <a16:creationId xmlns:a16="http://schemas.microsoft.com/office/drawing/2014/main" id="{6E7A8638-7712-46CB-AD66-436E01E2CB27}"/>
               </a:ext>
             </a:extLst>
           </p:cNvPr>
@@ -21618,7 +20814,7 @@
           <p:cNvPr id="7" name="p09-q0">
             <a:extLst xmlns:a="http://schemas.openxmlformats.org/drawingml/2006/main">
               <a:ext uri="{FF2B5EF4-FFF2-40B4-BE49-F238E27FC236}">
-                <a16:creationId xmlns:a16="http://schemas.microsoft.com/office/drawing/2014/main" id="{56DBE60E-B178-4D5D-AA72-1982BD7F033D}"/>
+                <a16:creationId xmlns:a16="http://schemas.microsoft.com/office/drawing/2014/main" id="{96E09983-3097-41AD-A46E-7BAC22F78259}"/>
               </a:ext>
             </a:extLst>
           </p:cNvPr>
@@ -21673,7 +20869,7 @@
           <p:cNvPr id="8" name="p09-a0">
             <a:extLst xmlns:a="http://schemas.openxmlformats.org/drawingml/2006/main">
               <a:ext uri="{FF2B5EF4-FFF2-40B4-BE49-F238E27FC236}">
-                <a16:creationId xmlns:a16="http://schemas.microsoft.com/office/drawing/2014/main" id="{1209252D-0FCA-47D9-8ED3-7AB730BEF8C9}"/>
+                <a16:creationId xmlns:a16="http://schemas.microsoft.com/office/drawing/2014/main" id="{0947E30D-110F-4A0E-92D0-A7A8B76ABE46}"/>
               </a:ext>
             </a:extLst>
           </p:cNvPr>
@@ -21728,7 +20924,7 @@
           <p:cNvPr id="9" name="p09-n1">
             <a:extLst xmlns:a="http://schemas.openxmlformats.org/drawingml/2006/main">
               <a:ext uri="{FF2B5EF4-FFF2-40B4-BE49-F238E27FC236}">
-                <a16:creationId xmlns:a16="http://schemas.microsoft.com/office/drawing/2014/main" id="{EDCF3A07-E1A0-46D7-A459-49D8F8C48774}"/>
+                <a16:creationId xmlns:a16="http://schemas.microsoft.com/office/drawing/2014/main" id="{FF1635E0-BC18-471E-A218-2DAB1FC901A9}"/>
               </a:ext>
             </a:extLst>
           </p:cNvPr>
@@ -21785,7 +20981,7 @@
           <p:cNvPr id="10" name="p09-q1">
             <a:extLst xmlns:a="http://schemas.openxmlformats.org/drawingml/2006/main">
               <a:ext uri="{FF2B5EF4-FFF2-40B4-BE49-F238E27FC236}">
-                <a16:creationId xmlns:a16="http://schemas.microsoft.com/office/drawing/2014/main" id="{365A4CAA-AA90-482E-AEDF-6DDDBA51010C}"/>
+                <a16:creationId xmlns:a16="http://schemas.microsoft.com/office/drawing/2014/main" id="{251EDF22-032B-4333-9528-75887722D985}"/>
               </a:ext>
             </a:extLst>
           </p:cNvPr>
@@ -21840,7 +21036,7 @@
           <p:cNvPr id="11" name="p09-a1">
             <a:extLst xmlns:a="http://schemas.openxmlformats.org/drawingml/2006/main">
               <a:ext uri="{FF2B5EF4-FFF2-40B4-BE49-F238E27FC236}">
-                <a16:creationId xmlns:a16="http://schemas.microsoft.com/office/drawing/2014/main" id="{E2917DF2-B98B-4154-96F8-93521651078F}"/>
+                <a16:creationId xmlns:a16="http://schemas.microsoft.com/office/drawing/2014/main" id="{339AD69D-2B89-49EB-B19C-546F98D8E96F}"/>
               </a:ext>
             </a:extLst>
           </p:cNvPr>
@@ -21895,7 +21091,7 @@
           <p:cNvPr id="12" name="p09-n2">
             <a:extLst xmlns:a="http://schemas.openxmlformats.org/drawingml/2006/main">
               <a:ext uri="{FF2B5EF4-FFF2-40B4-BE49-F238E27FC236}">
-                <a16:creationId xmlns:a16="http://schemas.microsoft.com/office/drawing/2014/main" id="{6A375E91-CBBF-45B8-9A57-69ECF2BB0CCE}"/>
+                <a16:creationId xmlns:a16="http://schemas.microsoft.com/office/drawing/2014/main" id="{DA3B96E8-2FF8-4D45-B701-CE0F13D7D85C}"/>
               </a:ext>
             </a:extLst>
           </p:cNvPr>
@@ -21952,7 +21148,7 @@
           <p:cNvPr id="13" name="p09-q2">
             <a:extLst xmlns:a="http://schemas.openxmlformats.org/drawingml/2006/main">
               <a:ext uri="{FF2B5EF4-FFF2-40B4-BE49-F238E27FC236}">
-                <a16:creationId xmlns:a16="http://schemas.microsoft.com/office/drawing/2014/main" id="{A3A00846-A40B-440C-82EF-541FEE40165A}"/>
+                <a16:creationId xmlns:a16="http://schemas.microsoft.com/office/drawing/2014/main" id="{0E3F7507-B9CB-4897-85AF-7696CDF63F38}"/>
               </a:ext>
             </a:extLst>
           </p:cNvPr>
@@ -22007,7 +21203,7 @@
           <p:cNvPr id="14" name="p09-a2">
             <a:extLst xmlns:a="http://schemas.openxmlformats.org/drawingml/2006/main">
               <a:ext uri="{FF2B5EF4-FFF2-40B4-BE49-F238E27FC236}">
-                <a16:creationId xmlns:a16="http://schemas.microsoft.com/office/drawing/2014/main" id="{C6924AA6-60E8-4E75-BBA5-F7041788968F}"/>
+                <a16:creationId xmlns:a16="http://schemas.microsoft.com/office/drawing/2014/main" id="{43B610EC-D7A4-4E86-ACF3-C7C08C400DDC}"/>
               </a:ext>
             </a:extLst>
           </p:cNvPr>
@@ -22062,7 +21258,7 @@
           <p:cNvPr id="15" name="p09-n3">
             <a:extLst xmlns:a="http://schemas.openxmlformats.org/drawingml/2006/main">
               <a:ext uri="{FF2B5EF4-FFF2-40B4-BE49-F238E27FC236}">
-                <a16:creationId xmlns:a16="http://schemas.microsoft.com/office/drawing/2014/main" id="{693901AA-6012-4ADE-9651-A5303062FA58}"/>
+                <a16:creationId xmlns:a16="http://schemas.microsoft.com/office/drawing/2014/main" id="{ECBC0C16-B0EE-420B-8FEB-E02F32F37E4A}"/>
               </a:ext>
             </a:extLst>
           </p:cNvPr>
@@ -22119,7 +21315,7 @@
           <p:cNvPr id="16" name="p09-q3">
             <a:extLst xmlns:a="http://schemas.openxmlformats.org/drawingml/2006/main">
               <a:ext uri="{FF2B5EF4-FFF2-40B4-BE49-F238E27FC236}">
-                <a16:creationId xmlns:a16="http://schemas.microsoft.com/office/drawing/2014/main" id="{39CD2E2E-AEE4-405D-A8E7-81605AE16DBF}"/>
+                <a16:creationId xmlns:a16="http://schemas.microsoft.com/office/drawing/2014/main" id="{292DFF03-5EA6-4D81-9C01-B7E939FE680C}"/>
               </a:ext>
             </a:extLst>
           </p:cNvPr>
@@ -22174,7 +21370,7 @@
           <p:cNvPr id="17" name="p09-a3">
             <a:extLst xmlns:a="http://schemas.openxmlformats.org/drawingml/2006/main">
               <a:ext uri="{FF2B5EF4-FFF2-40B4-BE49-F238E27FC236}">
-                <a16:creationId xmlns:a16="http://schemas.microsoft.com/office/drawing/2014/main" id="{DC2A367A-B07D-4019-981B-D1DFA1FC165C}"/>
+                <a16:creationId xmlns:a16="http://schemas.microsoft.com/office/drawing/2014/main" id="{CB05FA11-2933-49F9-8EA4-6BCCB088C106}"/>
               </a:ext>
             </a:extLst>
           </p:cNvPr>
@@ -22229,7 +21425,7 @@
           <p:cNvPr id="18" name="p09-bottom">
             <a:extLst xmlns:a="http://schemas.openxmlformats.org/drawingml/2006/main">
               <a:ext uri="{FF2B5EF4-FFF2-40B4-BE49-F238E27FC236}">
-                <a16:creationId xmlns:a16="http://schemas.microsoft.com/office/drawing/2014/main" id="{EDEE59FA-DAD2-4A83-8417-CAC3F58AFCD4}"/>
+                <a16:creationId xmlns:a16="http://schemas.microsoft.com/office/drawing/2014/main" id="{501F3892-340B-4D64-8068-A67461C12AE5}"/>
               </a:ext>
             </a:extLst>
           </p:cNvPr>
